--- a/deliverables/chem-u02/SHULL_CHEM_Slides_U02_S02.5.pptx
+++ b/deliverables/chem-u02/SHULL_CHEM_Slides_U02_S02.5.pptx
@@ -13982,7 +13982,7 @@
                 <a:ea typeface="Trade Gothic Next" pitchFamily="34" charset="-122"/>
                 <a:cs typeface="Trade Gothic Next" pitchFamily="34" charset="-120"/>
               </a:rPr>
-              <a:t>Hydrogen drops from n = 3 to n = 2 and emits 3.03e-19 J. Find the wavelength and color.</a:t>
+              <a:t>Hydrogen's 3 to 2 drop emits a 3.03e-19 J photon. Find its wavelength and color.</a:t>
             </a:r>
             <a:endParaRPr lang="en-US" sz="1600" dirty="0"/>
           </a:p>

--- a/deliverables/chem-u02/SHULL_CHEM_Slides_U02_S02.5.pptx
+++ b/deliverables/chem-u02/SHULL_CHEM_Slides_U02_S02.5.pptx
@@ -522,7 +522,7 @@
           <a:p>
             <a:r>
               <a:rPr lang="en-US" dirty="0"/>
-              <a:t/>
+              <a:t>Opens 2.5; builds on 2.1 energy levels and delta E. Goal: students leave able to say how an atom makes colored light. IMAGE SLOT EMPTY, photo to shoot or generate: a hydrogen gas discharge tube glowing in a dark lab.</a:t>
             </a:r>
             <a:endParaRPr lang="en-US" dirty="0"/>
           </a:p>
@@ -610,7 +610,7 @@
           <a:p>
             <a:r>
               <a:rPr lang="en-US" dirty="0"/>
-              <a:t/>
+              <a:t>Each line is one drop to n = 2. Electrons drop to lower levels; they do not fall into the nucleus.</a:t>
             </a:r>
             <a:endParaRPr lang="en-US" dirty="0"/>
           </a:p>
@@ -698,7 +698,7 @@
           <a:p>
             <a:r>
               <a:rPr lang="en-US" dirty="0"/>
-              <a:t/>
+              <a:t>FLAG, Matt to confirm: the course sequencing rule delays scientific notation and heavy math (courses/chemistry/DECISIONS.md, Course sequencing rules). This deck holds to ONE student calculation, calculator provided, 3 sig figs. If you prefer S2.5 conceptual only, defer the calculation. Delta E for 3 to 2 comes from S2.1 (3.03e-19 J). OPTIONAL Example 2 (dropped from this deck): the 486 nm line is the 4 to 2 drop. Check: delta E = 2.18e-18 x (1/4 - 1/16) = 4.09e-19 J; wavelength = 1.988e-25 / 4.09e-19 = 4.86e-7 m = 486 nm, blue-green. Re-derived for this revision. IMAGE SLOT EMPTY, photo to shoot or generate: a hydrogen discharge tube glowing pink-magenta.</a:t>
             </a:r>
             <a:endParaRPr lang="en-US" dirty="0"/>
           </a:p>
@@ -786,7 +786,7 @@
           <a:p>
             <a:r>
               <a:rPr lang="en-US" dirty="0"/>
-              <a:t/>
+              <a:t>FLAG, Matt to confirm: the course sequencing rule delays scientific notation and heavy math (courses/chemistry/DECISIONS.md, Course sequencing rules). This deck holds to ONE student calculation, calculator provided, 3 sig figs. If you prefer S2.5 conceptual only, defer the calculation. Accept 656 or 657 nm: the unrounded energy 3.025e-19 J gives 657. Frequency check (optional): 3.00e8 / 6.56e-7 = 4.57e14 Hz. IMAGE SLOT EMPTY, photo to shoot or generate: a calculator beside handwritten wavelength work.</a:t>
             </a:r>
             <a:endParaRPr lang="en-US" dirty="0"/>
           </a:p>
@@ -874,7 +874,7 @@
           <a:p>
             <a:r>
               <a:rPr lang="en-US" dirty="0"/>
-              <a:t/>
+              <a:t>Pre-built table, read-only; check values against the example. 3 to 2: 3.03e-19 J, 656 nm; 4 to 2: 4.09e-19 J, 486 nm; 5 to 2: 4.58e-19 J, 434 nm; 6 to 2: 4.84e-19 J, 410 nm. Scientific-notation flag applies here too (see slide 6).</a:t>
             </a:r>
             <a:endParaRPr lang="en-US" dirty="0"/>
           </a:p>
@@ -962,7 +962,7 @@
           <a:p>
             <a:r>
               <a:rPr lang="en-US" dirty="0"/>
-              <a:t/>
+              <a:t>Helium was first detected in the Sun's spectrum, 1868 (Janssen and Lockyer). Line positions identify an element. IMAGE SLOT EMPTY, photo to shoot or generate: line spectra of several gas discharge tubes side by side, photographed through a spectroscope.</a:t>
             </a:r>
             <a:endParaRPr lang="en-US" dirty="0"/>
           </a:p>
@@ -1050,7 +1050,7 @@
           <a:p>
             <a:r>
               <a:rPr lang="en-US" dirty="0"/>
-              <a:t/>
+              <a:t>PROVISIONAL (flame section): flame tests are not a confirmed U2 lab (DECISIONS.md open question 4), so this is science only, no procedure. Divider into flame tests. Flame photos are still to be shot. IMAGE SLOT EMPTY, photo to shoot or generate: a lab burner flame with a wire loop of metal salt, shot in a darkened room.</a:t>
             </a:r>
             <a:endParaRPr lang="en-US" dirty="0"/>
           </a:p>
@@ -1138,7 +1138,7 @@
           <a:p>
             <a:r>
               <a:rPr lang="en-US" dirty="0"/>
-              <a:t/>
+              <a:t>PROVISIONAL (flame section): flame tests are not a confirmed U2 lab (DECISIONS.md open question 4), so this is science only, no procedure. PROVISIONAL: Ca, Sr, Ba and Cu flame colors come largely from molecular emitters (such as CaOH, SrOH, BaOH, CuCl), not single atomic lines; the electron-drop explanation is a valid HS simplification. Flame photos still to be shot. Color claims checked against textbook convention only. The color suggests the ion; it does not prove it. IMAGE SLOT EMPTY, photo to shoot or generate: a flame test photograph, a bright lilac flame from a wire loop.</a:t>
             </a:r>
             <a:endParaRPr lang="en-US" dirty="0"/>
           </a:p>
@@ -1226,7 +1226,7 @@
           <a:p>
             <a:r>
               <a:rPr lang="en-US" dirty="0"/>
-              <a:t/>
+              <a:t>PROVISIONAL (flame section): flame tests are not a confirmed U2 lab (DECISIONS.md open question 4), so this is science only, no procedure. PROVISIONAL: colors are textbook convention only; swatches are illustrations, not photographs, and flame photos are still to be shot. Do not state a color is one exact wavelength. K lilac is often masked by sodium; the cobalt-glass technique is lab procedure and is not in scope.</a:t>
             </a:r>
             <a:endParaRPr lang="en-US" dirty="0"/>
           </a:p>
@@ -1314,7 +1314,7 @@
           <a:p>
             <a:r>
               <a:rPr lang="en-US" dirty="0"/>
-              <a:t/>
+              <a:t>PROVISIONAL (flame section): flame tests are not a confirmed U2 lab (DECISIONS.md open question 4), so this is science only, no procedure. PROVISIONAL: textbook colors only, Ca, Sr, Ba, Cu largely molecular emitters; photos still to be shot. Many elements give no visible flame color.</a:t>
             </a:r>
             <a:endParaRPr lang="en-US" dirty="0"/>
           </a:p>
@@ -1402,7 +1402,7 @@
           <a:p>
             <a:r>
               <a:rPr lang="en-US" dirty="0"/>
-              <a:t/>
+              <a:t>PROVISIONAL (flame section): flame tests are not a confirmed U2 lab (DECISIONS.md open question 4), so this is science only, no procedure. Textbook colors only; photos still to be shot. Intended answer: K+ (lilac) with a Na+ yellow trace; Ca2+ orange-red. IMAGE SLOT EMPTY, photo to shoot or generate: two wire loops of metal salt in a flame, one lilac and one orange-red, shot side by side.</a:t>
             </a:r>
             <a:endParaRPr lang="en-US" dirty="0"/>
           </a:p>
@@ -1490,7 +1490,7 @@
           <a:p>
             <a:r>
               <a:rPr lang="en-US" dirty="0"/>
-              <a:t/>
+              <a:t>Hook. Take two or three answers, do not correct yet; the answer is the section. IMAGE SLOT EMPTY, photo to shoot or generate: a firework burst beside a glowing neon sign, shot at night.</a:t>
             </a:r>
             <a:endParaRPr lang="en-US" dirty="0"/>
           </a:p>
@@ -1578,7 +1578,7 @@
           <a:p>
             <a:r>
               <a:rPr lang="en-US" dirty="0"/>
-              <a:t/>
+              <a:t>PROVISIONAL (flame section): flame tests are not a confirmed U2 lab (DECISIONS.md open question 4), so this is science only, no procedure. Ca2+ is the likely answer for orange-red, but Sr2+ looks similar, so a flame test alone cannot settle it. Textbook colors only; photos still to be shot. IMAGE SLOT EMPTY, photo to shoot or generate: a notebook page with a flame color table and pencil check marks.</a:t>
             </a:r>
             <a:endParaRPr lang="en-US" dirty="0"/>
           </a:p>
@@ -1666,7 +1666,7 @@
           <a:p>
             <a:r>
               <a:rPr lang="en-US" dirty="0"/>
-              <a:t/>
+              <a:t>Formative check. OPTIONAL extra item 3 (dropped from this deck): calculate the wavelength of a 4.58e-19 J photon (5 to 2 in hydrogen) and state the color. Answer: wavelength = 1.988e-25 / 4.58e-19 = 4.34e-7 m = 434 nm, blue-violet. Check: delta E = 2.18e-18 x (1/4 - 1/25) = 4.58e-19 J. Re-derived for this revision. Answers to the three on-slide items: blue (shorter wavelength, more energy); each element has unique energy levels so unique photon energies; lilac suggests K+ (heat lifts electrons, they drop, photons of visible light). IMAGE SLOT EMPTY, photo to shoot or generate: a student's notebook with a half-finished answer.</a:t>
             </a:r>
             <a:endParaRPr lang="en-US" dirty="0"/>
           </a:p>
@@ -1754,7 +1754,7 @@
           <a:p>
             <a:r>
               <a:rPr lang="en-US" dirty="0"/>
-              <a:t/>
+              <a:t>Frequency is defined on slide 5 (waves per second). Misconception to catch: 'longer wavelength means more energy'. It is the opposite. IMAGE SLOT EMPTY, photo to shoot or generate: a glass prism splitting white light on a dark bench.</a:t>
             </a:r>
             <a:endParaRPr lang="en-US" dirty="0"/>
           </a:p>
@@ -1842,7 +1842,7 @@
           <a:p>
             <a:r>
               <a:rPr lang="en-US" dirty="0"/>
-              <a:t/>
+              <a:t>Ranges: violet 400-450, blue 450-495, green 495-570, yellow 570-590, orange 590-620, red 620-700 nm (approximate).</a:t>
             </a:r>
             <a:endParaRPr lang="en-US" dirty="0"/>
           </a:p>
@@ -1930,7 +1930,7 @@
           <a:p>
             <a:r>
               <a:rPr lang="en-US" dirty="0"/>
-              <a:t/>
+              <a:t>Defines frequency here: how many waves pass per second. Short wavelength, high frequency, high energy. IMAGE SLOT EMPTY, photo to shoot or generate: a red and a violet laser pointer beam crossing in haze.</a:t>
             </a:r>
             <a:endParaRPr lang="en-US" dirty="0"/>
           </a:p>
@@ -2018,7 +2018,7 @@
           <a:p>
             <a:r>
               <a:rPr lang="en-US" dirty="0"/>
-              <a:t/>
+              <a:t>FLAG, Matt to confirm: the course sequencing rule delays scientific notation and heavy math (courses/chemistry/DECISIONS.md, Course sequencing rules). This deck holds to ONE student calculation, calculator provided, 3 sig figs. If you prefer S2.5 conceptual only, defer the calculation. Constants: h = 6.626e-34 J s, c = 3.00e8 m/s. Equations are for reference; students use only E = hc / wavelength today. IMAGE SLOT EMPTY, photo to shoot or generate: a handheld spectroscope resting on a notebook page.</a:t>
             </a:r>
             <a:endParaRPr lang="en-US" dirty="0"/>
           </a:p>
@@ -2106,7 +2106,7 @@
           <a:p>
             <a:r>
               <a:rPr lang="en-US" dirty="0"/>
-              <a:t/>
+              <a:t>Hot solid gives all colors; hot gas gives separate lines. LED and fluorescence are out of scope. IMAGE SLOT EMPTY, photo to shoot or generate: an incandescent bulb filament beside a lit neon tube.</a:t>
             </a:r>
             <a:endParaRPr lang="en-US" dirty="0"/>
           </a:p>
@@ -2194,7 +2194,7 @@
           <a:p>
             <a:r>
               <a:rPr lang="en-US" dirty="0"/>
-              <a:t/>
+              <a:t>Absorption lines sit at the same wavelengths as the element's emission lines. Absorption in starlight reveals composition.</a:t>
             </a:r>
             <a:endParaRPr lang="en-US" dirty="0"/>
           </a:p>
@@ -2282,7 +2282,7 @@
           <a:p>
             <a:r>
               <a:rPr lang="en-US" dirty="0"/>
-              <a:t/>
+              <a:t>Lines are 656, 486, 434, 410 nm, all ending at n = 2. Hydrogen has more lines in the UV (2 to 1 is about 122 nm) and IR (4 to 3 is about 1876 nm). Misconception: 'hydrogen has only four lines'.</a:t>
             </a:r>
             <a:endParaRPr lang="en-US" dirty="0"/>
           </a:p>
@@ -13323,7 +13323,7 @@
       </p:sp>
       <p:sp>
         <p:nvSpPr>
-          <p:cNvPr id="6" name="Text 3"/>
+          <p:cNvPr id="7" name="Text 3"/>
           <p:cNvSpPr txBox="1"/>
           <p:nvPr>
             <p:ph idx="103" hasCustomPrompt="1"/>
@@ -13812,7 +13812,7 @@
       </p:sp>
       <p:sp>
         <p:nvSpPr>
-          <p:cNvPr id="13" name="Text 3"/>
+          <p:cNvPr id="14" name="Text 3"/>
           <p:cNvSpPr txBox="1"/>
           <p:nvPr>
             <p:ph idx="106" type="body" hasCustomPrompt="1"/>
@@ -13982,7 +13982,35 @@
                 <a:ea typeface="Trade Gothic Next" pitchFamily="34" charset="-122"/>
                 <a:cs typeface="Trade Gothic Next" pitchFamily="34" charset="-120"/>
               </a:rPr>
-              <a:t>Hydrogen's 3 to 2 drop emits a 3.03e-19 J photon. Find its wavelength and color.</a:t>
+              <a:t>Hydrogen's 3 to 2 drop emits a 3.03 × 10</a:t>
+            </a:r>
+            <a:pPr indent="0" marL="0">
+              <a:buNone/>
+            </a:pPr>
+            <a:r>
+              <a:rPr lang="en-US" sz="1600" baseline="30000" dirty="0">
+                <a:solidFill>
+                  <a:srgbClr val="EDF0E5"/>
+                </a:solidFill>
+                <a:latin typeface="Trade Gothic Next" pitchFamily="34" charset="0"/>
+                <a:ea typeface="Trade Gothic Next" pitchFamily="34" charset="-122"/>
+                <a:cs typeface="Trade Gothic Next" pitchFamily="34" charset="-120"/>
+              </a:rPr>
+              <a:t>−19</a:t>
+            </a:r>
+            <a:pPr indent="0" marL="0">
+              <a:buNone/>
+            </a:pPr>
+            <a:r>
+              <a:rPr lang="en-US" sz="1600" dirty="0">
+                <a:solidFill>
+                  <a:srgbClr val="EDF0E5"/>
+                </a:solidFill>
+                <a:latin typeface="Trade Gothic Next" pitchFamily="34" charset="0"/>
+                <a:ea typeface="Trade Gothic Next" pitchFamily="34" charset="-122"/>
+                <a:cs typeface="Trade Gothic Next" pitchFamily="34" charset="-120"/>
+              </a:rPr>
+              <a:t> J photon. Find its wavelength and color.</a:t>
             </a:r>
             <a:endParaRPr lang="en-US" sz="1600" dirty="0"/>
           </a:p>
@@ -14064,7 +14092,35 @@
                 <a:ea typeface="Trade Gothic Next" pitchFamily="34" charset="-122"/>
                 <a:cs typeface="Trade Gothic Next" pitchFamily="34" charset="-120"/>
               </a:rPr>
-              <a:t>E = 3.03e-19 J</a:t>
+              <a:t>E = 3.03 × 10</a:t>
+            </a:r>
+            <a:pPr indent="0" marL="0">
+              <a:buNone/>
+            </a:pPr>
+            <a:r>
+              <a:rPr lang="en-US" sz="1600" baseline="30000" dirty="0">
+                <a:solidFill>
+                  <a:srgbClr val="14161B"/>
+                </a:solidFill>
+                <a:latin typeface="Trade Gothic Next" pitchFamily="34" charset="0"/>
+                <a:ea typeface="Trade Gothic Next" pitchFamily="34" charset="-122"/>
+                <a:cs typeface="Trade Gothic Next" pitchFamily="34" charset="-120"/>
+              </a:rPr>
+              <a:t>−19</a:t>
+            </a:r>
+            <a:pPr indent="0" marL="0">
+              <a:buNone/>
+            </a:pPr>
+            <a:r>
+              <a:rPr lang="en-US" sz="1600" dirty="0">
+                <a:solidFill>
+                  <a:srgbClr val="14161B"/>
+                </a:solidFill>
+                <a:latin typeface="Trade Gothic Next" pitchFamily="34" charset="0"/>
+                <a:ea typeface="Trade Gothic Next" pitchFamily="34" charset="-122"/>
+                <a:cs typeface="Trade Gothic Next" pitchFamily="34" charset="-120"/>
+              </a:rPr>
+              <a:t> J</a:t>
             </a:r>
             <a:endParaRPr lang="en-US" sz="1600" dirty="0"/>
           </a:p>
@@ -14081,7 +14137,35 @@
                 <a:ea typeface="Trade Gothic Next" pitchFamily="34" charset="-122"/>
                 <a:cs typeface="Trade Gothic Next" pitchFamily="34" charset="-120"/>
               </a:rPr>
-              <a:t>h = 6.626e-34 J·s</a:t>
+              <a:t>h = 6.626 × 10</a:t>
+            </a:r>
+            <a:pPr indent="0" marL="0">
+              <a:buNone/>
+            </a:pPr>
+            <a:r>
+              <a:rPr lang="en-US" sz="1600" baseline="30000" dirty="0">
+                <a:solidFill>
+                  <a:srgbClr val="14161B"/>
+                </a:solidFill>
+                <a:latin typeface="Trade Gothic Next" pitchFamily="34" charset="0"/>
+                <a:ea typeface="Trade Gothic Next" pitchFamily="34" charset="-122"/>
+                <a:cs typeface="Trade Gothic Next" pitchFamily="34" charset="-120"/>
+              </a:rPr>
+              <a:t>−34</a:t>
+            </a:r>
+            <a:pPr indent="0" marL="0">
+              <a:buNone/>
+            </a:pPr>
+            <a:r>
+              <a:rPr lang="en-US" sz="1600" dirty="0">
+                <a:solidFill>
+                  <a:srgbClr val="14161B"/>
+                </a:solidFill>
+                <a:latin typeface="Trade Gothic Next" pitchFamily="34" charset="0"/>
+                <a:ea typeface="Trade Gothic Next" pitchFamily="34" charset="-122"/>
+                <a:cs typeface="Trade Gothic Next" pitchFamily="34" charset="-120"/>
+              </a:rPr>
+              <a:t> J·s</a:t>
             </a:r>
             <a:endParaRPr lang="en-US" sz="1600" dirty="0"/>
           </a:p>
@@ -14098,7 +14182,35 @@
                 <a:ea typeface="Trade Gothic Next" pitchFamily="34" charset="-122"/>
                 <a:cs typeface="Trade Gothic Next" pitchFamily="34" charset="-120"/>
               </a:rPr>
-              <a:t>c = 3.00e8 m/s</a:t>
+              <a:t>c = 3.00 × 10</a:t>
+            </a:r>
+            <a:pPr indent="0" marL="0">
+              <a:buNone/>
+            </a:pPr>
+            <a:r>
+              <a:rPr lang="en-US" sz="1600" baseline="30000" dirty="0">
+                <a:solidFill>
+                  <a:srgbClr val="14161B"/>
+                </a:solidFill>
+                <a:latin typeface="Trade Gothic Next" pitchFamily="34" charset="0"/>
+                <a:ea typeface="Trade Gothic Next" pitchFamily="34" charset="-122"/>
+                <a:cs typeface="Trade Gothic Next" pitchFamily="34" charset="-120"/>
+              </a:rPr>
+              <a:t>8</a:t>
+            </a:r>
+            <a:pPr indent="0" marL="0">
+              <a:buNone/>
+            </a:pPr>
+            <a:r>
+              <a:rPr lang="en-US" sz="1600" dirty="0">
+                <a:solidFill>
+                  <a:srgbClr val="14161B"/>
+                </a:solidFill>
+                <a:latin typeface="Trade Gothic Next" pitchFamily="34" charset="0"/>
+                <a:ea typeface="Trade Gothic Next" pitchFamily="34" charset="-122"/>
+                <a:cs typeface="Trade Gothic Next" pitchFamily="34" charset="-120"/>
+              </a:rPr>
+              <a:t> m/s</a:t>
             </a:r>
             <a:endParaRPr lang="en-US" sz="1600" dirty="0"/>
           </a:p>
@@ -14358,7 +14470,7 @@
       </p:sp>
       <p:sp>
         <p:nvSpPr>
-          <p:cNvPr id="13" name="Text 4"/>
+          <p:cNvPr id="14" name="Text 4"/>
           <p:cNvSpPr txBox="1"/>
           <p:nvPr>
             <p:ph idx="107" hasCustomPrompt="1"/>
@@ -14487,7 +14599,7 @@
                 <a:ea typeface="Trade Gothic Next" pitchFamily="34" charset="-122"/>
                 <a:cs typeface="Trade Gothic Next" pitchFamily="34" charset="-120"/>
               </a:rPr>
-              <a:t>Accept 656 or 657 nm, depending on rounding.</a:t>
+              <a:t>Rearrange, divide, then convert meters to nanometers.</a:t>
             </a:r>
             <a:endParaRPr lang="en-US" sz="1700" dirty="0"/>
           </a:p>
@@ -14586,7 +14698,49 @@
                 <a:ea typeface="Trade Gothic Next" pitchFamily="34" charset="-122"/>
                 <a:cs typeface="Trade Gothic Next" pitchFamily="34" charset="-120"/>
               </a:rPr>
-              <a:t>h × c = 6.626e-34 × 3.00e8</a:t>
+              <a:t>hc = 6.626 × 10</a:t>
+            </a:r>
+            <a:pPr indent="0" marL="0">
+              <a:buNone/>
+            </a:pPr>
+            <a:r>
+              <a:rPr lang="en-US" sz="1600" baseline="30000" dirty="0">
+                <a:solidFill>
+                  <a:srgbClr val="14161B"/>
+                </a:solidFill>
+                <a:latin typeface="Trade Gothic Next" pitchFamily="34" charset="0"/>
+                <a:ea typeface="Trade Gothic Next" pitchFamily="34" charset="-122"/>
+                <a:cs typeface="Trade Gothic Next" pitchFamily="34" charset="-120"/>
+              </a:rPr>
+              <a:t>−34</a:t>
+            </a:r>
+            <a:pPr indent="0" marL="0">
+              <a:buNone/>
+            </a:pPr>
+            <a:r>
+              <a:rPr lang="en-US" sz="1600" dirty="0">
+                <a:solidFill>
+                  <a:srgbClr val="14161B"/>
+                </a:solidFill>
+                <a:latin typeface="Trade Gothic Next" pitchFamily="34" charset="0"/>
+                <a:ea typeface="Trade Gothic Next" pitchFamily="34" charset="-122"/>
+                <a:cs typeface="Trade Gothic Next" pitchFamily="34" charset="-120"/>
+              </a:rPr>
+              <a:t> × 3.00 × 10</a:t>
+            </a:r>
+            <a:pPr indent="0" marL="0">
+              <a:buNone/>
+            </a:pPr>
+            <a:r>
+              <a:rPr lang="en-US" sz="1600" baseline="30000" dirty="0">
+                <a:solidFill>
+                  <a:srgbClr val="14161B"/>
+                </a:solidFill>
+                <a:latin typeface="Trade Gothic Next" pitchFamily="34" charset="0"/>
+                <a:ea typeface="Trade Gothic Next" pitchFamily="34" charset="-122"/>
+                <a:cs typeface="Trade Gothic Next" pitchFamily="34" charset="-120"/>
+              </a:rPr>
+              <a:t>8</a:t>
             </a:r>
             <a:endParaRPr lang="en-US" sz="1600" dirty="0"/>
           </a:p>
@@ -14603,7 +14757,35 @@
                 <a:ea typeface="Trade Gothic Next" pitchFamily="34" charset="-122"/>
                 <a:cs typeface="Trade Gothic Next" pitchFamily="34" charset="-120"/>
               </a:rPr>
-              <a:t>h × c = 1.988e-25 J·m</a:t>
+              <a:t>hc = 1.988 × 10</a:t>
+            </a:r>
+            <a:pPr indent="0" marL="0">
+              <a:buNone/>
+            </a:pPr>
+            <a:r>
+              <a:rPr lang="en-US" sz="1600" baseline="30000" dirty="0">
+                <a:solidFill>
+                  <a:srgbClr val="14161B"/>
+                </a:solidFill>
+                <a:latin typeface="Trade Gothic Next" pitchFamily="34" charset="0"/>
+                <a:ea typeface="Trade Gothic Next" pitchFamily="34" charset="-122"/>
+                <a:cs typeface="Trade Gothic Next" pitchFamily="34" charset="-120"/>
+              </a:rPr>
+              <a:t>−25</a:t>
+            </a:r>
+            <a:pPr indent="0" marL="0">
+              <a:buNone/>
+            </a:pPr>
+            <a:r>
+              <a:rPr lang="en-US" sz="1600" dirty="0">
+                <a:solidFill>
+                  <a:srgbClr val="14161B"/>
+                </a:solidFill>
+                <a:latin typeface="Trade Gothic Next" pitchFamily="34" charset="0"/>
+                <a:ea typeface="Trade Gothic Next" pitchFamily="34" charset="-122"/>
+                <a:cs typeface="Trade Gothic Next" pitchFamily="34" charset="-120"/>
+              </a:rPr>
+              <a:t> J·m</a:t>
             </a:r>
             <a:endParaRPr lang="en-US" sz="1600" dirty="0"/>
           </a:p>
@@ -14644,7 +14826,49 @@
                 <a:ea typeface="Trade Gothic Next" pitchFamily="34" charset="-122"/>
                 <a:cs typeface="Trade Gothic Next" pitchFamily="34" charset="-120"/>
               </a:rPr>
-              <a:t>1.988e-25 ÷ 3.03e-19</a:t>
+              <a:t>1.988 × 10</a:t>
+            </a:r>
+            <a:pPr indent="0" marL="0">
+              <a:buNone/>
+            </a:pPr>
+            <a:r>
+              <a:rPr lang="en-US" sz="1900" baseline="30000" dirty="0">
+                <a:solidFill>
+                  <a:srgbClr val="14161B"/>
+                </a:solidFill>
+                <a:latin typeface="Trade Gothic Next" pitchFamily="34" charset="0"/>
+                <a:ea typeface="Trade Gothic Next" pitchFamily="34" charset="-122"/>
+                <a:cs typeface="Trade Gothic Next" pitchFamily="34" charset="-120"/>
+              </a:rPr>
+              <a:t>−25</a:t>
+            </a:r>
+            <a:pPr indent="0" marL="0">
+              <a:buNone/>
+            </a:pPr>
+            <a:r>
+              <a:rPr lang="en-US" sz="1900" dirty="0">
+                <a:solidFill>
+                  <a:srgbClr val="14161B"/>
+                </a:solidFill>
+                <a:latin typeface="Trade Gothic Next" pitchFamily="34" charset="0"/>
+                <a:ea typeface="Trade Gothic Next" pitchFamily="34" charset="-122"/>
+                <a:cs typeface="Trade Gothic Next" pitchFamily="34" charset="-120"/>
+              </a:rPr>
+              <a:t> ÷ 3.03 × 10</a:t>
+            </a:r>
+            <a:pPr indent="0" marL="0">
+              <a:buNone/>
+            </a:pPr>
+            <a:r>
+              <a:rPr lang="en-US" sz="1900" baseline="30000" dirty="0">
+                <a:solidFill>
+                  <a:srgbClr val="14161B"/>
+                </a:solidFill>
+                <a:latin typeface="Trade Gothic Next" pitchFamily="34" charset="0"/>
+                <a:ea typeface="Trade Gothic Next" pitchFamily="34" charset="-122"/>
+                <a:cs typeface="Trade Gothic Next" pitchFamily="34" charset="-120"/>
+              </a:rPr>
+              <a:t>−19</a:t>
             </a:r>
             <a:endParaRPr lang="en-US" sz="1900" dirty="0"/>
           </a:p>
@@ -14661,7 +14885,35 @@
                 <a:ea typeface="Trade Gothic Next" pitchFamily="34" charset="-122"/>
                 <a:cs typeface="Trade Gothic Next" pitchFamily="34" charset="-120"/>
               </a:rPr>
-              <a:t>= 6.56e-7 m</a:t>
+              <a:t>= 6.56 × 10</a:t>
+            </a:r>
+            <a:pPr indent="0" marL="0">
+              <a:buNone/>
+            </a:pPr>
+            <a:r>
+              <a:rPr lang="en-US" sz="1900" baseline="30000" dirty="0">
+                <a:solidFill>
+                  <a:srgbClr val="14161B"/>
+                </a:solidFill>
+                <a:latin typeface="Trade Gothic Next" pitchFamily="34" charset="0"/>
+                <a:ea typeface="Trade Gothic Next" pitchFamily="34" charset="-122"/>
+                <a:cs typeface="Trade Gothic Next" pitchFamily="34" charset="-120"/>
+              </a:rPr>
+              <a:t>−7</a:t>
+            </a:r>
+            <a:pPr indent="0" marL="0">
+              <a:buNone/>
+            </a:pPr>
+            <a:r>
+              <a:rPr lang="en-US" sz="1900" dirty="0">
+                <a:solidFill>
+                  <a:srgbClr val="14161B"/>
+                </a:solidFill>
+                <a:latin typeface="Trade Gothic Next" pitchFamily="34" charset="0"/>
+                <a:ea typeface="Trade Gothic Next" pitchFamily="34" charset="-122"/>
+                <a:cs typeface="Trade Gothic Next" pitchFamily="34" charset="-120"/>
+              </a:rPr>
+              <a:t> m</a:t>
             </a:r>
             <a:endParaRPr lang="en-US" sz="1900" dirty="0"/>
           </a:p>
@@ -14678,7 +14930,35 @@
                 <a:ea typeface="Trade Gothic Next" pitchFamily="34" charset="-122"/>
                 <a:cs typeface="Trade Gothic Next" pitchFamily="34" charset="-120"/>
               </a:rPr>
-              <a:t>= 656 nm</a:t>
+              <a:t>× 10</a:t>
+            </a:r>
+            <a:pPr indent="0" marL="0">
+              <a:buNone/>
+            </a:pPr>
+            <a:r>
+              <a:rPr lang="en-US" sz="1900" baseline="30000" dirty="0">
+                <a:solidFill>
+                  <a:srgbClr val="14161B"/>
+                </a:solidFill>
+                <a:latin typeface="Trade Gothic Next" pitchFamily="34" charset="0"/>
+                <a:ea typeface="Trade Gothic Next" pitchFamily="34" charset="-122"/>
+                <a:cs typeface="Trade Gothic Next" pitchFamily="34" charset="-120"/>
+              </a:rPr>
+              <a:t>9</a:t>
+            </a:r>
+            <a:pPr indent="0" marL="0">
+              <a:buNone/>
+            </a:pPr>
+            <a:r>
+              <a:rPr lang="en-US" sz="1900" dirty="0">
+                <a:solidFill>
+                  <a:srgbClr val="14161B"/>
+                </a:solidFill>
+                <a:latin typeface="Trade Gothic Next" pitchFamily="34" charset="0"/>
+                <a:ea typeface="Trade Gothic Next" pitchFamily="34" charset="-122"/>
+                <a:cs typeface="Trade Gothic Next" pitchFamily="34" charset="-120"/>
+              </a:rPr>
+              <a:t> nm per m = 656 nm</a:t>
             </a:r>
             <a:endParaRPr lang="en-US" sz="1900" dirty="0"/>
           </a:p>
@@ -14826,7 +15106,7 @@
       </p:sp>
       <p:sp>
         <p:nvSpPr>
-          <p:cNvPr id="10" name="Text 4"/>
+          <p:cNvPr id="11" name="Text 4"/>
           <p:cNvSpPr txBox="1"/>
           <p:nvPr>
             <p:ph idx="107" hasCustomPrompt="1"/>
@@ -15315,7 +15595,7 @@
       </p:sp>
       <p:sp>
         <p:nvSpPr>
-          <p:cNvPr id="13" name="Text 3"/>
+          <p:cNvPr id="14" name="Text 3"/>
           <p:cNvSpPr txBox="1"/>
           <p:nvPr>
             <p:ph idx="106" type="body" hasCustomPrompt="1"/>
@@ -15785,7 +16065,7 @@
       </p:sp>
       <p:sp>
         <p:nvSpPr>
-          <p:cNvPr id="11" name="Text 3"/>
+          <p:cNvPr id="12" name="Text 3"/>
           <p:cNvSpPr txBox="1"/>
           <p:nvPr>
             <p:ph idx="106" hasCustomPrompt="1"/>
@@ -15978,7 +16258,7 @@
                 <a:ea typeface="Trade Gothic Next" pitchFamily="34" charset="-122"/>
                 <a:cs typeface="Trade Gothic Next" pitchFamily="34" charset="-120"/>
               </a:rPr>
-              <a:t>Metal ions in a flame emit light too. The color tells you which metal.</a:t>
+              <a:t>Metal ions in a flame emit light too. The color helps you identify the metal.</a:t>
             </a:r>
             <a:endParaRPr lang="en-US" sz="1600" dirty="0"/>
           </a:p>
@@ -16027,7 +16307,7 @@
       </p:sp>
       <p:sp>
         <p:nvSpPr>
-          <p:cNvPr id="6" name="Text 2"/>
+          <p:cNvPr id="7" name="Text 2"/>
           <p:cNvSpPr txBox="1"/>
           <p:nvPr>
             <p:ph idx="102" hasCustomPrompt="1"/>
@@ -16320,7 +16600,7 @@
                 <a:ea typeface="Trade Gothic Next" pitchFamily="34" charset="-122"/>
                 <a:cs typeface="Trade Gothic Next" pitchFamily="34" charset="-120"/>
               </a:rPr>
-              <a:t>They release photons of visible light. The color names the metal.</a:t>
+              <a:t>They release photons of visible light. The color helps identify the metal.</a:t>
             </a:r>
             <a:endParaRPr lang="en-US" sz="1600" dirty="0"/>
           </a:p>
@@ -16361,7 +16641,7 @@
                 <a:ea typeface="Trade Gothic Next" pitchFamily="34" charset="-122"/>
                 <a:cs typeface="Trade Gothic Next" pitchFamily="34" charset="-120"/>
               </a:rPr>
-              <a:t>The color of the emitted light identifies the metal ion.</a:t>
+              <a:t>The color of the emitted light helps identify the metal ion.</a:t>
             </a:r>
             <a:endParaRPr lang="en-US" sz="1600" dirty="0"/>
           </a:p>
@@ -16451,7 +16731,7 @@
       </p:sp>
       <p:sp>
         <p:nvSpPr>
-          <p:cNvPr id="11" name="Text 3"/>
+          <p:cNvPr id="12" name="Text 3"/>
           <p:cNvSpPr txBox="1"/>
           <p:nvPr>
             <p:ph idx="106" hasCustomPrompt="1"/>
@@ -16604,7 +16884,7 @@
                 <a:ea typeface="Trade Gothic Next" pitchFamily="34" charset="-122"/>
                 <a:cs typeface="Trade Gothic Next" pitchFamily="34" charset="-120"/>
               </a:rPr>
-              <a:t>Match the color you see to the metal ion.</a:t>
+              <a:t>Compare the color you see to the table.</a:t>
             </a:r>
             <a:endParaRPr lang="en-US" sz="1700" dirty="0"/>
           </a:p>
@@ -16686,7 +16966,7 @@
                 <a:ea typeface="Trade Gothic Next" pitchFamily="34" charset="-122"/>
                 <a:cs typeface="Trade Gothic Next" pitchFamily="34" charset="-120"/>
               </a:rPr>
-              <a:t>Each metal ion gives its own flame color.</a:t>
+              <a:t>Each metal ion has a typical flame color.</a:t>
             </a:r>
             <a:endParaRPr lang="en-US" sz="1600" dirty="0"/>
           </a:p>
@@ -16727,7 +17007,7 @@
                 <a:ea typeface="Trade Gothic Next" pitchFamily="34" charset="-122"/>
                 <a:cs typeface="Trade Gothic Next" pitchFamily="34" charset="-120"/>
               </a:rPr>
-              <a:t>SODIUM IS EVERYWHERE</a:t>
+              <a:t>A COMMON CONTAMINANT</a:t>
             </a:r>
             <a:endParaRPr lang="en-US" sz="1200" dirty="0"/>
           </a:p>
@@ -16768,7 +17048,35 @@
                 <a:ea typeface="Trade Gothic Next" pitchFamily="34" charset="-122"/>
                 <a:cs typeface="Trade Gothic Next" pitchFamily="34" charset="-120"/>
               </a:rPr>
-              <a:t>A little Na+ turns many flames yellow.</a:t>
+              <a:t>A little Na</a:t>
+            </a:r>
+            <a:pPr indent="0" marL="0">
+              <a:buNone/>
+            </a:pPr>
+            <a:r>
+              <a:rPr lang="en-US" sz="1600" baseline="30000" dirty="0">
+                <a:solidFill>
+                  <a:srgbClr val="14161B"/>
+                </a:solidFill>
+                <a:latin typeface="Trade Gothic Next" pitchFamily="34" charset="0"/>
+                <a:ea typeface="Trade Gothic Next" pitchFamily="34" charset="-122"/>
+                <a:cs typeface="Trade Gothic Next" pitchFamily="34" charset="-120"/>
+              </a:rPr>
+              <a:t>+</a:t>
+            </a:r>
+            <a:pPr indent="0" marL="0">
+              <a:buNone/>
+            </a:pPr>
+            <a:r>
+              <a:rPr lang="en-US" sz="1600" dirty="0">
+                <a:solidFill>
+                  <a:srgbClr val="14161B"/>
+                </a:solidFill>
+                <a:latin typeface="Trade Gothic Next" pitchFamily="34" charset="0"/>
+                <a:ea typeface="Trade Gothic Next" pitchFamily="34" charset="-122"/>
+                <a:cs typeface="Trade Gothic Next" pitchFamily="34" charset="-120"/>
+              </a:rPr>
+              <a:t> can turn a flame yellow.</a:t>
             </a:r>
             <a:endParaRPr lang="en-US" sz="1600" dirty="0"/>
           </a:p>
@@ -16940,7 +17248,7 @@
       </p:sp>
       <p:sp>
         <p:nvSpPr>
-          <p:cNvPr id="13" name="Text 3"/>
+          <p:cNvPr id="14" name="Text 3"/>
           <p:cNvSpPr txBox="1"/>
           <p:nvPr>
             <p:ph idx="106" type="body" hasCustomPrompt="1"/>
@@ -17175,7 +17483,63 @@
                 <a:ea typeface="Trade Gothic Next" pitchFamily="34" charset="-122"/>
                 <a:cs typeface="Trade Gothic Next" pitchFamily="34" charset="-120"/>
               </a:rPr>
-              <a:t>Sr2+ red and Ca2+ orange-red are easy to confuse.</a:t>
+              <a:t>Sr</a:t>
+            </a:r>
+            <a:pPr indent="0" marL="0">
+              <a:buNone/>
+            </a:pPr>
+            <a:r>
+              <a:rPr lang="en-US" sz="1600" baseline="30000" dirty="0">
+                <a:solidFill>
+                  <a:srgbClr val="14161B"/>
+                </a:solidFill>
+                <a:latin typeface="Trade Gothic Next" pitchFamily="34" charset="0"/>
+                <a:ea typeface="Trade Gothic Next" pitchFamily="34" charset="-122"/>
+                <a:cs typeface="Trade Gothic Next" pitchFamily="34" charset="-120"/>
+              </a:rPr>
+              <a:t>2+</a:t>
+            </a:r>
+            <a:pPr indent="0" marL="0">
+              <a:buNone/>
+            </a:pPr>
+            <a:r>
+              <a:rPr lang="en-US" sz="1600" dirty="0">
+                <a:solidFill>
+                  <a:srgbClr val="14161B"/>
+                </a:solidFill>
+                <a:latin typeface="Trade Gothic Next" pitchFamily="34" charset="0"/>
+                <a:ea typeface="Trade Gothic Next" pitchFamily="34" charset="-122"/>
+                <a:cs typeface="Trade Gothic Next" pitchFamily="34" charset="-120"/>
+              </a:rPr>
+              <a:t> red and Ca</a:t>
+            </a:r>
+            <a:pPr indent="0" marL="0">
+              <a:buNone/>
+            </a:pPr>
+            <a:r>
+              <a:rPr lang="en-US" sz="1600" baseline="30000" dirty="0">
+                <a:solidFill>
+                  <a:srgbClr val="14161B"/>
+                </a:solidFill>
+                <a:latin typeface="Trade Gothic Next" pitchFamily="34" charset="0"/>
+                <a:ea typeface="Trade Gothic Next" pitchFamily="34" charset="-122"/>
+                <a:cs typeface="Trade Gothic Next" pitchFamily="34" charset="-120"/>
+              </a:rPr>
+              <a:t>2+</a:t>
+            </a:r>
+            <a:pPr indent="0" marL="0">
+              <a:buNone/>
+            </a:pPr>
+            <a:r>
+              <a:rPr lang="en-US" sz="1600" dirty="0">
+                <a:solidFill>
+                  <a:srgbClr val="14161B"/>
+                </a:solidFill>
+                <a:latin typeface="Trade Gothic Next" pitchFamily="34" charset="0"/>
+                <a:ea typeface="Trade Gothic Next" pitchFamily="34" charset="-122"/>
+                <a:cs typeface="Trade Gothic Next" pitchFamily="34" charset="-120"/>
+              </a:rPr>
+              <a:t> orange-red are easy to confuse.</a:t>
             </a:r>
             <a:endParaRPr lang="en-US" sz="1600" dirty="0"/>
           </a:p>
@@ -17429,7 +17793,7 @@
       </p:sp>
       <p:sp>
         <p:nvSpPr>
-          <p:cNvPr id="13" name="Text 3"/>
+          <p:cNvPr id="14" name="Text 3"/>
           <p:cNvSpPr txBox="1"/>
           <p:nvPr>
             <p:ph idx="106" type="body" hasCustomPrompt="1"/>
@@ -17941,7 +18305,7 @@
       </p:sp>
       <p:sp>
         <p:nvSpPr>
-          <p:cNvPr id="13" name="Text 4"/>
+          <p:cNvPr id="14" name="Text 4"/>
           <p:cNvSpPr txBox="1"/>
           <p:nvPr>
             <p:ph idx="107" hasCustomPrompt="1"/>
@@ -18218,7 +18582,7 @@
       </p:sp>
       <p:sp>
         <p:nvSpPr>
-          <p:cNvPr id="7" name="Text 4"/>
+          <p:cNvPr id="8" name="Text 4"/>
           <p:cNvSpPr txBox="1"/>
           <p:nvPr>
             <p:ph idx="104" hasCustomPrompt="1"/>
@@ -18347,7 +18711,7 @@
                 <a:ea typeface="Trade Gothic Next" pitchFamily="34" charset="-122"/>
                 <a:cs typeface="Trade Gothic Next" pitchFamily="34" charset="-120"/>
               </a:rPr>
-              <a:t>Sodium contaminates almost every flame.</a:t>
+              <a:t>Sodium is a common contaminant.</a:t>
             </a:r>
             <a:endParaRPr lang="en-US" sz="1700" dirty="0"/>
           </a:p>
@@ -18463,7 +18827,35 @@
                 <a:ea typeface="Trade Gothic Next" pitchFamily="34" charset="-122"/>
                 <a:cs typeface="Trade Gothic Next" pitchFamily="34" charset="-120"/>
               </a:rPr>
-              <a:t>Na+ gives yellow.</a:t>
+              <a:t>Na</a:t>
+            </a:r>
+            <a:pPr indent="0" marL="0">
+              <a:buNone/>
+            </a:pPr>
+            <a:r>
+              <a:rPr lang="en-US" sz="1600" baseline="30000" dirty="0">
+                <a:solidFill>
+                  <a:srgbClr val="14161B"/>
+                </a:solidFill>
+                <a:latin typeface="Trade Gothic Next" pitchFamily="34" charset="0"/>
+                <a:ea typeface="Trade Gothic Next" pitchFamily="34" charset="-122"/>
+                <a:cs typeface="Trade Gothic Next" pitchFamily="34" charset="-120"/>
+              </a:rPr>
+              <a:t>+</a:t>
+            </a:r>
+            <a:pPr indent="0" marL="0">
+              <a:buNone/>
+            </a:pPr>
+            <a:r>
+              <a:rPr lang="en-US" sz="1600" dirty="0">
+                <a:solidFill>
+                  <a:srgbClr val="14161B"/>
+                </a:solidFill>
+                <a:latin typeface="Trade Gothic Next" pitchFamily="34" charset="0"/>
+                <a:ea typeface="Trade Gothic Next" pitchFamily="34" charset="-122"/>
+                <a:cs typeface="Trade Gothic Next" pitchFamily="34" charset="-120"/>
+              </a:rPr>
+              <a:t> gives yellow.</a:t>
             </a:r>
             <a:endParaRPr lang="en-US" sz="1600" dirty="0"/>
           </a:p>
@@ -18504,7 +18896,35 @@
                 <a:ea typeface="Trade Gothic Next" pitchFamily="34" charset="-122"/>
                 <a:cs typeface="Trade Gothic Next" pitchFamily="34" charset="-120"/>
               </a:rPr>
-              <a:t>Salt A: K+ (lilac)</a:t>
+              <a:t>Salt A: K</a:t>
+            </a:r>
+            <a:pPr indent="0" marL="0">
+              <a:buNone/>
+            </a:pPr>
+            <a:r>
+              <a:rPr lang="en-US" sz="1900" baseline="30000" dirty="0">
+                <a:solidFill>
+                  <a:srgbClr val="14161B"/>
+                </a:solidFill>
+                <a:latin typeface="Trade Gothic Next" pitchFamily="34" charset="0"/>
+                <a:ea typeface="Trade Gothic Next" pitchFamily="34" charset="-122"/>
+                <a:cs typeface="Trade Gothic Next" pitchFamily="34" charset="-120"/>
+              </a:rPr>
+              <a:t>+</a:t>
+            </a:r>
+            <a:pPr indent="0" marL="0">
+              <a:buNone/>
+            </a:pPr>
+            <a:r>
+              <a:rPr lang="en-US" sz="1900" dirty="0">
+                <a:solidFill>
+                  <a:srgbClr val="14161B"/>
+                </a:solidFill>
+                <a:latin typeface="Trade Gothic Next" pitchFamily="34" charset="0"/>
+                <a:ea typeface="Trade Gothic Next" pitchFamily="34" charset="-122"/>
+                <a:cs typeface="Trade Gothic Next" pitchFamily="34" charset="-120"/>
+              </a:rPr>
+              <a:t> (lilac)</a:t>
             </a:r>
             <a:endParaRPr lang="en-US" sz="1900" dirty="0"/>
           </a:p>
@@ -18521,7 +18941,21 @@
                 <a:ea typeface="Trade Gothic Next" pitchFamily="34" charset="-122"/>
                 <a:cs typeface="Trade Gothic Next" pitchFamily="34" charset="-120"/>
               </a:rPr>
-              <a:t>Yellow trace: Na+</a:t>
+              <a:t>Yellow trace: Na</a:t>
+            </a:r>
+            <a:pPr indent="0" marL="0">
+              <a:buNone/>
+            </a:pPr>
+            <a:r>
+              <a:rPr lang="en-US" sz="1900" baseline="30000" dirty="0">
+                <a:solidFill>
+                  <a:srgbClr val="14161B"/>
+                </a:solidFill>
+                <a:latin typeface="Trade Gothic Next" pitchFamily="34" charset="0"/>
+                <a:ea typeface="Trade Gothic Next" pitchFamily="34" charset="-122"/>
+                <a:cs typeface="Trade Gothic Next" pitchFamily="34" charset="-120"/>
+              </a:rPr>
+              <a:t>+</a:t>
             </a:r>
             <a:endParaRPr lang="en-US" sz="1900" dirty="0"/>
           </a:p>
@@ -18538,7 +18972,35 @@
                 <a:ea typeface="Trade Gothic Next" pitchFamily="34" charset="-122"/>
                 <a:cs typeface="Trade Gothic Next" pitchFamily="34" charset="-120"/>
               </a:rPr>
-              <a:t>Salt B: Ca2+</a:t>
+              <a:t>Salt B: Ca</a:t>
+            </a:r>
+            <a:pPr indent="0" marL="0">
+              <a:buNone/>
+            </a:pPr>
+            <a:r>
+              <a:rPr lang="en-US" sz="1900" baseline="30000" dirty="0">
+                <a:solidFill>
+                  <a:srgbClr val="14161B"/>
+                </a:solidFill>
+                <a:latin typeface="Trade Gothic Next" pitchFamily="34" charset="0"/>
+                <a:ea typeface="Trade Gothic Next" pitchFamily="34" charset="-122"/>
+                <a:cs typeface="Trade Gothic Next" pitchFamily="34" charset="-120"/>
+              </a:rPr>
+              <a:t>2+</a:t>
+            </a:r>
+            <a:pPr indent="0" marL="0">
+              <a:buNone/>
+            </a:pPr>
+            <a:r>
+              <a:rPr lang="en-US" sz="1900" dirty="0">
+                <a:solidFill>
+                  <a:srgbClr val="14161B"/>
+                </a:solidFill>
+                <a:latin typeface="Trade Gothic Next" pitchFamily="34" charset="0"/>
+                <a:ea typeface="Trade Gothic Next" pitchFamily="34" charset="-122"/>
+                <a:cs typeface="Trade Gothic Next" pitchFamily="34" charset="-120"/>
+              </a:rPr>
+              <a:t> (orange-red)</a:t>
             </a:r>
             <a:endParaRPr lang="en-US" sz="1900" dirty="0"/>
           </a:p>
@@ -18555,7 +19017,35 @@
                 <a:ea typeface="Trade Gothic Next" pitchFamily="34" charset="-122"/>
                 <a:cs typeface="Trade Gothic Next" pitchFamily="34" charset="-120"/>
               </a:rPr>
-              <a:t>(orange-red)</a:t>
+              <a:t>Sr</a:t>
+            </a:r>
+            <a:pPr indent="0" marL="0">
+              <a:buNone/>
+            </a:pPr>
+            <a:r>
+              <a:rPr lang="en-US" sz="1900" baseline="30000" dirty="0">
+                <a:solidFill>
+                  <a:srgbClr val="14161B"/>
+                </a:solidFill>
+                <a:latin typeface="Trade Gothic Next" pitchFamily="34" charset="0"/>
+                <a:ea typeface="Trade Gothic Next" pitchFamily="34" charset="-122"/>
+                <a:cs typeface="Trade Gothic Next" pitchFamily="34" charset="-120"/>
+              </a:rPr>
+              <a:t>2+</a:t>
+            </a:r>
+            <a:pPr indent="0" marL="0">
+              <a:buNone/>
+            </a:pPr>
+            <a:r>
+              <a:rPr lang="en-US" sz="1900" dirty="0">
+                <a:solidFill>
+                  <a:srgbClr val="14161B"/>
+                </a:solidFill>
+                <a:latin typeface="Trade Gothic Next" pitchFamily="34" charset="0"/>
+                <a:ea typeface="Trade Gothic Next" pitchFamily="34" charset="-122"/>
+                <a:cs typeface="Trade Gothic Next" pitchFamily="34" charset="-120"/>
+              </a:rPr>
+              <a:t> looks similar</a:t>
             </a:r>
             <a:endParaRPr lang="en-US" sz="1900" dirty="0"/>
           </a:p>
@@ -18686,7 +19176,7 @@
       </p:sp>
       <p:sp>
         <p:nvSpPr>
-          <p:cNvPr id="10" name="Text 4"/>
+          <p:cNvPr id="11" name="Text 4"/>
           <p:cNvSpPr txBox="1"/>
           <p:nvPr>
             <p:ph idx="107" hasCustomPrompt="1"/>
@@ -18815,7 +19305,7 @@
                 <a:ea typeface="Trade Gothic Next" pitchFamily="34" charset="-122"/>
                 <a:cs typeface="Trade Gothic Next" pitchFamily="34" charset="-120"/>
               </a:rPr>
-              <a:t>Answer in your notes. Use the words photon and energy level.</a:t>
+              <a:t>Answer in your notes, in full sentences.</a:t>
             </a:r>
             <a:endParaRPr lang="en-US" sz="1700" dirty="0"/>
           </a:p>
@@ -19061,7 +19551,7 @@
                 <a:ea typeface="Trade Gothic Next" pitchFamily="34" charset="-122"/>
                 <a:cs typeface="Trade Gothic Next" pitchFamily="34" charset="-120"/>
               </a:rPr>
-              <a:t>A flame is lilac. Which ion? Explain the color with electrons.</a:t>
+              <a:t>A flame is lilac. Which ion is it likely to be? Explain the color with electrons.</a:t>
             </a:r>
             <a:endParaRPr lang="en-US" sz="1600" dirty="0"/>
           </a:p>
@@ -19102,7 +19592,7 @@
                 <a:ea typeface="Trade Gothic Next" pitchFamily="34" charset="-122"/>
                 <a:cs typeface="Trade Gothic Next" pitchFamily="34" charset="-120"/>
               </a:rPr>
-              <a:t>Answer in full sentences. Name the photon and the energy level.</a:t>
+              <a:t>Use the words photon and energy level.</a:t>
             </a:r>
             <a:endParaRPr lang="en-US" sz="1600" dirty="0"/>
           </a:p>
@@ -19192,7 +19682,7 @@
       </p:sp>
       <p:sp>
         <p:nvSpPr>
-          <p:cNvPr id="13" name="Text 4"/>
+          <p:cNvPr id="14" name="Text 4"/>
           <p:cNvSpPr txBox="1"/>
           <p:nvPr>
             <p:ph idx="107" hasCustomPrompt="1"/>
@@ -19698,7 +20188,7 @@
       </p:sp>
       <p:sp>
         <p:nvSpPr>
-          <p:cNvPr id="13" name="Text 4"/>
+          <p:cNvPr id="14" name="Text 4"/>
           <p:cNvSpPr txBox="1"/>
           <p:nvPr>
             <p:ph idx="107" hasCustomPrompt="1"/>
@@ -19933,7 +20423,35 @@
                 <a:ea typeface="Trade Gothic Next" pitchFamily="34" charset="-122"/>
                 <a:cs typeface="Trade Gothic Next" pitchFamily="34" charset="-120"/>
               </a:rPr>
-              <a:t>One nm is one billionth of a meter: 1e-9 m.</a:t>
+              <a:t>One nm is one billionth of a meter: 1 × 10</a:t>
+            </a:r>
+            <a:pPr indent="0" marL="0">
+              <a:buNone/>
+            </a:pPr>
+            <a:r>
+              <a:rPr lang="en-US" sz="1600" baseline="30000" dirty="0">
+                <a:solidFill>
+                  <a:srgbClr val="14161B"/>
+                </a:solidFill>
+                <a:latin typeface="Trade Gothic Next" pitchFamily="34" charset="0"/>
+                <a:ea typeface="Trade Gothic Next" pitchFamily="34" charset="-122"/>
+                <a:cs typeface="Trade Gothic Next" pitchFamily="34" charset="-120"/>
+              </a:rPr>
+              <a:t>−9</a:t>
+            </a:r>
+            <a:pPr indent="0" marL="0">
+              <a:buNone/>
+            </a:pPr>
+            <a:r>
+              <a:rPr lang="en-US" sz="1600" dirty="0">
+                <a:solidFill>
+                  <a:srgbClr val="14161B"/>
+                </a:solidFill>
+                <a:latin typeface="Trade Gothic Next" pitchFamily="34" charset="0"/>
+                <a:ea typeface="Trade Gothic Next" pitchFamily="34" charset="-122"/>
+                <a:cs typeface="Trade Gothic Next" pitchFamily="34" charset="-120"/>
+              </a:rPr>
+              <a:t> m.</a:t>
             </a:r>
             <a:endParaRPr lang="en-US" sz="1600" dirty="0"/>
           </a:p>
@@ -20187,7 +20705,7 @@
       </p:sp>
       <p:sp>
         <p:nvSpPr>
-          <p:cNvPr id="13" name="Text 3"/>
+          <p:cNvPr id="14" name="Text 3"/>
           <p:cNvSpPr txBox="1"/>
           <p:nvPr>
             <p:ph idx="106" type="body" hasCustomPrompt="1"/>
@@ -20316,7 +20834,7 @@
                 <a:ea typeface="Trade Gothic Next" pitchFamily="34" charset="-122"/>
                 <a:cs typeface="Trade Gothic Next" pitchFamily="34" charset="-120"/>
               </a:rPr>
-              <a:t>Shorter wavelength means higher frequency and more energy per photon.</a:t>
+              <a:t>Shorter wavelength means higher frequency (more waves per second) and more energy per photon.</a:t>
             </a:r>
             <a:endParaRPr lang="en-US" sz="1700" dirty="0"/>
           </a:p>
@@ -20679,7 +21197,7 @@
       </p:sp>
       <p:sp>
         <p:nvSpPr>
-          <p:cNvPr id="11" name="Text 3"/>
+          <p:cNvPr id="12" name="Text 3"/>
           <p:cNvSpPr txBox="1"/>
           <p:nvPr>
             <p:ph idx="106" hasCustomPrompt="1"/>
@@ -20931,7 +21449,35 @@
                 <a:ea typeface="Trade Gothic Next" pitchFamily="34" charset="-122"/>
                 <a:cs typeface="Trade Gothic Next" pitchFamily="34" charset="-120"/>
               </a:rPr>
-              <a:t>h = 6.626e-34 J·s</a:t>
+              <a:t>h = 6.626 × 10</a:t>
+            </a:r>
+            <a:pPr indent="0" marL="0">
+              <a:buNone/>
+            </a:pPr>
+            <a:r>
+              <a:rPr lang="en-US" sz="1600" baseline="30000" dirty="0">
+                <a:solidFill>
+                  <a:srgbClr val="14161B"/>
+                </a:solidFill>
+                <a:latin typeface="Trade Gothic Next" pitchFamily="34" charset="0"/>
+                <a:ea typeface="Trade Gothic Next" pitchFamily="34" charset="-122"/>
+                <a:cs typeface="Trade Gothic Next" pitchFamily="34" charset="-120"/>
+              </a:rPr>
+              <a:t>−34</a:t>
+            </a:r>
+            <a:pPr indent="0" marL="0">
+              <a:buNone/>
+            </a:pPr>
+            <a:r>
+              <a:rPr lang="en-US" sz="1600" dirty="0">
+                <a:solidFill>
+                  <a:srgbClr val="14161B"/>
+                </a:solidFill>
+                <a:latin typeface="Trade Gothic Next" pitchFamily="34" charset="0"/>
+                <a:ea typeface="Trade Gothic Next" pitchFamily="34" charset="-122"/>
+                <a:cs typeface="Trade Gothic Next" pitchFamily="34" charset="-120"/>
+              </a:rPr>
+              <a:t> J·s</a:t>
             </a:r>
             <a:endParaRPr lang="en-US" sz="1600" dirty="0"/>
           </a:p>
@@ -20948,7 +21494,35 @@
                 <a:ea typeface="Trade Gothic Next" pitchFamily="34" charset="-122"/>
                 <a:cs typeface="Trade Gothic Next" pitchFamily="34" charset="-120"/>
               </a:rPr>
-              <a:t>c = 3.00e8 m/s</a:t>
+              <a:t>c = 3.00 × 10</a:t>
+            </a:r>
+            <a:pPr indent="0" marL="0">
+              <a:buNone/>
+            </a:pPr>
+            <a:r>
+              <a:rPr lang="en-US" sz="1600" baseline="30000" dirty="0">
+                <a:solidFill>
+                  <a:srgbClr val="14161B"/>
+                </a:solidFill>
+                <a:latin typeface="Trade Gothic Next" pitchFamily="34" charset="0"/>
+                <a:ea typeface="Trade Gothic Next" pitchFamily="34" charset="-122"/>
+                <a:cs typeface="Trade Gothic Next" pitchFamily="34" charset="-120"/>
+              </a:rPr>
+              <a:t>8</a:t>
+            </a:r>
+            <a:pPr indent="0" marL="0">
+              <a:buNone/>
+            </a:pPr>
+            <a:r>
+              <a:rPr lang="en-US" sz="1600" dirty="0">
+                <a:solidFill>
+                  <a:srgbClr val="14161B"/>
+                </a:solidFill>
+                <a:latin typeface="Trade Gothic Next" pitchFamily="34" charset="0"/>
+                <a:ea typeface="Trade Gothic Next" pitchFamily="34" charset="-122"/>
+                <a:cs typeface="Trade Gothic Next" pitchFamily="34" charset="-120"/>
+              </a:rPr>
+              <a:t> m/s</a:t>
             </a:r>
             <a:endParaRPr lang="en-US" sz="1600" dirty="0"/>
           </a:p>
@@ -20965,7 +21539,35 @@
                 <a:ea typeface="Trade Gothic Next" pitchFamily="34" charset="-122"/>
                 <a:cs typeface="Trade Gothic Next" pitchFamily="34" charset="-120"/>
               </a:rPr>
-              <a:t>1 nm = 1e-9 m</a:t>
+              <a:t>1 nm = 1 × 10</a:t>
+            </a:r>
+            <a:pPr indent="0" marL="0">
+              <a:buNone/>
+            </a:pPr>
+            <a:r>
+              <a:rPr lang="en-US" sz="1600" baseline="30000" dirty="0">
+                <a:solidFill>
+                  <a:srgbClr val="14161B"/>
+                </a:solidFill>
+                <a:latin typeface="Trade Gothic Next" pitchFamily="34" charset="0"/>
+                <a:ea typeface="Trade Gothic Next" pitchFamily="34" charset="-122"/>
+                <a:cs typeface="Trade Gothic Next" pitchFamily="34" charset="-120"/>
+              </a:rPr>
+              <a:t>−9</a:t>
+            </a:r>
+            <a:pPr indent="0" marL="0">
+              <a:buNone/>
+            </a:pPr>
+            <a:r>
+              <a:rPr lang="en-US" sz="1600" dirty="0">
+                <a:solidFill>
+                  <a:srgbClr val="14161B"/>
+                </a:solidFill>
+                <a:latin typeface="Trade Gothic Next" pitchFamily="34" charset="0"/>
+                <a:ea typeface="Trade Gothic Next" pitchFamily="34" charset="-122"/>
+                <a:cs typeface="Trade Gothic Next" pitchFamily="34" charset="-120"/>
+              </a:rPr>
+              <a:t> m</a:t>
             </a:r>
             <a:endParaRPr lang="en-US" sz="1600" dirty="0"/>
           </a:p>
@@ -21212,7 +21814,7 @@
       </p:sp>
       <p:sp>
         <p:nvSpPr>
-          <p:cNvPr id="12" name="Text 4"/>
+          <p:cNvPr id="13" name="Text 4"/>
           <p:cNvSpPr txBox="1"/>
           <p:nvPr>
             <p:ph idx="107" hasCustomPrompt="1"/>
@@ -21682,7 +22284,7 @@
       </p:sp>
       <p:sp>
         <p:nvSpPr>
-          <p:cNvPr id="11" name="Text 3"/>
+          <p:cNvPr id="12" name="Text 3"/>
           <p:cNvSpPr txBox="1"/>
           <p:nvPr>
             <p:ph idx="106" hasCustomPrompt="1"/>
@@ -22171,7 +22773,7 @@
       </p:sp>
       <p:sp>
         <p:nvSpPr>
-          <p:cNvPr id="13" name="Text 3"/>
+          <p:cNvPr id="14" name="Text 3"/>
           <p:cNvSpPr txBox="1"/>
           <p:nvPr>
             <p:ph idx="106" type="body" hasCustomPrompt="1"/>
@@ -22570,7 +23172,7 @@
                 <a:ea typeface="Trade Gothic Next" pitchFamily="34" charset="-122"/>
                 <a:cs typeface="Trade Gothic Next" pitchFamily="34" charset="-120"/>
               </a:rPr>
-              <a:t>More sit in the UV and IR. Your eyes miss them.</a:t>
+              <a:t>More sit in the ultraviolet (UV) and infrared (IR). Your eyes miss them.</a:t>
             </a:r>
             <a:endParaRPr lang="en-US" sz="1600" dirty="0"/>
           </a:p>
@@ -22660,7 +23262,7 @@
       </p:sp>
       <p:sp>
         <p:nvSpPr>
-          <p:cNvPr id="13" name="Text 3"/>
+          <p:cNvPr id="14" name="Text 3"/>
           <p:cNvSpPr txBox="1"/>
           <p:nvPr>
             <p:ph idx="106" type="body" hasCustomPrompt="1"/>

--- a/deliverables/chem-u02/SHULL_CHEM_Slides_U02_S02.5.pptx
+++ b/deliverables/chem-u02/SHULL_CHEM_Slides_U02_S02.5.pptx
@@ -14826,7 +14826,7 @@
                 <a:ea typeface="Trade Gothic Next" pitchFamily="34" charset="-122"/>
                 <a:cs typeface="Trade Gothic Next" pitchFamily="34" charset="-120"/>
               </a:rPr>
-              <a:t>1.988 × 10</a:t>
+              <a:t>(1.988 × 10</a:t>
             </a:r>
             <a:pPr indent="0" marL="0">
               <a:buNone/>
@@ -14854,7 +14854,24 @@
                 <a:ea typeface="Trade Gothic Next" pitchFamily="34" charset="-122"/>
                 <a:cs typeface="Trade Gothic Next" pitchFamily="34" charset="-120"/>
               </a:rPr>
-              <a:t> ÷ 3.03 × 10</a:t>
+              <a:t>)</a:t>
+            </a:r>
+            <a:endParaRPr lang="en-US" sz="1900" dirty="0"/>
+          </a:p>
+          <a:p>
+            <a:pPr indent="0" marL="0">
+              <a:buNone/>
+            </a:pPr>
+            <a:r>
+              <a:rPr lang="en-US" sz="1900" dirty="0">
+                <a:solidFill>
+                  <a:srgbClr val="14161B"/>
+                </a:solidFill>
+                <a:latin typeface="Trade Gothic Next" pitchFamily="34" charset="0"/>
+                <a:ea typeface="Trade Gothic Next" pitchFamily="34" charset="-122"/>
+                <a:cs typeface="Trade Gothic Next" pitchFamily="34" charset="-120"/>
+              </a:rPr>
+              <a:t>÷ (3.03 × 10</a:t>
             </a:r>
             <a:pPr indent="0" marL="0">
               <a:buNone/>
@@ -14870,6 +14887,20 @@
               </a:rPr>
               <a:t>−19</a:t>
             </a:r>
+            <a:pPr indent="0" marL="0">
+              <a:buNone/>
+            </a:pPr>
+            <a:r>
+              <a:rPr lang="en-US" sz="1900" dirty="0">
+                <a:solidFill>
+                  <a:srgbClr val="14161B"/>
+                </a:solidFill>
+                <a:latin typeface="Trade Gothic Next" pitchFamily="34" charset="0"/>
+                <a:ea typeface="Trade Gothic Next" pitchFamily="34" charset="-122"/>
+                <a:cs typeface="Trade Gothic Next" pitchFamily="34" charset="-120"/>
+              </a:rPr>
+              <a:t>)</a:t>
+            </a:r>
             <a:endParaRPr lang="en-US" sz="1900" dirty="0"/>
           </a:p>
           <a:p>
@@ -14958,24 +14989,7 @@
                 <a:ea typeface="Trade Gothic Next" pitchFamily="34" charset="-122"/>
                 <a:cs typeface="Trade Gothic Next" pitchFamily="34" charset="-120"/>
               </a:rPr>
-              <a:t> nm per m = 656 nm</a:t>
-            </a:r>
-            <a:endParaRPr lang="en-US" sz="1900" dirty="0"/>
-          </a:p>
-          <a:p>
-            <a:pPr indent="0" marL="0">
-              <a:buNone/>
-            </a:pPr>
-            <a:r>
-              <a:rPr lang="en-US" sz="1900" dirty="0">
-                <a:solidFill>
-                  <a:srgbClr val="14161B"/>
-                </a:solidFill>
-                <a:latin typeface="Trade Gothic Next" pitchFamily="34" charset="0"/>
-                <a:ea typeface="Trade Gothic Next" pitchFamily="34" charset="-122"/>
-                <a:cs typeface="Trade Gothic Next" pitchFamily="34" charset="-120"/>
-              </a:rPr>
-              <a:t>Red light</a:t>
+              <a:t> = 656 nm (red)</a:t>
             </a:r>
             <a:endParaRPr lang="en-US" sz="1900" dirty="0"/>
           </a:p>
@@ -23172,7 +23186,7 @@
                 <a:ea typeface="Trade Gothic Next" pitchFamily="34" charset="-122"/>
                 <a:cs typeface="Trade Gothic Next" pitchFamily="34" charset="-120"/>
               </a:rPr>
-              <a:t>More sit in the ultraviolet (UV) and infrared (IR). Your eyes miss them.</a:t>
+              <a:t>More are in ultraviolet (UV) and infrared (IR).</a:t>
             </a:r>
             <a:endParaRPr lang="en-US" sz="1600" dirty="0"/>
           </a:p>

--- a/deliverables/chem-u02/SHULL_CHEM_Slides_U02_S02.5.pptx
+++ b/deliverables/chem-u02/SHULL_CHEM_Slides_U02_S02.5.pptx
@@ -25,10 +25,9 @@
     <p:sldId id="273" r:id="rId19"/>
     <p:sldId id="274" r:id="rId20"/>
     <p:sldId id="275" r:id="rId21"/>
-    <p:sldId id="276" r:id="rId22"/>
   </p:sldIdLst>
   <p:notesMasterIdLst>
-    <p:notesMasterId r:id="rId23"/>
+    <p:notesMasterId r:id="rId22"/>
   </p:notesMasterIdLst>
   <p:sldSz cx="12192000" cy="6858000"/>
   <p:notesSz cx="6858000" cy="12192000"/>
@@ -610,7 +609,7 @@
           <a:p>
             <a:r>
               <a:rPr lang="en-US" dirty="0"/>
-              <a:t>Each line is one drop to n = 2. Electrons drop to lower levels; they do not fall into the nucleus.</a:t>
+              <a:t>Pre-built table, read-only. 3 to 2: 656 nm (6.56 × 10^-7 m), red; 4 to 2: 486 nm (4.86 × 10^-7 m), blue-green; 5 to 2: 434 nm (4.34 × 10^-7 m), blue-violet; 6 to 2: 410 nm (4.10 × 10^-7 m), violet. Scientific notation shown per Matt. Students match drop to color by comparing drop size on the previous slide's figure; no calculation.</a:t>
             </a:r>
             <a:endParaRPr lang="en-US" dirty="0"/>
           </a:p>
@@ -698,7 +697,7 @@
           <a:p>
             <a:r>
               <a:rPr lang="en-US" dirty="0"/>
-              <a:t>FLAG, Matt to confirm: the course sequencing rule delays scientific notation and heavy math (courses/chemistry/DECISIONS.md, Course sequencing rules). This deck holds to ONE student calculation, calculator provided, 3 sig figs. If you prefer S2.5 conceptual only, defer the calculation. Delta E for 3 to 2 comes from S2.1 (3.03e-19 J). OPTIONAL Example 2 (dropped from this deck): the 486 nm line is the 4 to 2 drop. Check: delta E = 2.18e-18 x (1/4 - 1/16) = 4.09e-19 J; wavelength = 1.988e-25 / 4.09e-19 = 4.86e-7 m = 486 nm, blue-green. Re-derived for this revision. IMAGE SLOT EMPTY, photo to shoot or generate: a hydrogen discharge tube glowing pink-magenta.</a:t>
+              <a:t>The energy and wavelength calculations were removed on Matt's instruction; wavelengths stay in nm and scientific notation per Matt. Students reason from the table instead. OPTIONAL Example 2 (not on a slide): the 486 nm blue-green line is a bigger or smaller drop than the red line? Answer: bigger (4 to 2 versus 3 to 2), because 486 nm is a shorter wavelength than 656 nm; but smaller than the 5 to 2 drop, which makes the 434 nm line. IMAGE SLOT EMPTY, photo to shoot or generate: a hydrogen discharge tube glowing pink-magenta.</a:t>
             </a:r>
             <a:endParaRPr lang="en-US" dirty="0"/>
           </a:p>
@@ -786,7 +785,7 @@
           <a:p>
             <a:r>
               <a:rPr lang="en-US" dirty="0"/>
-              <a:t>FLAG, Matt to confirm: the course sequencing rule delays scientific notation and heavy math (courses/chemistry/DECISIONS.md, Course sequencing rules). This deck holds to ONE student calculation, calculator provided, 3 sig figs. If you prefer S2.5 conceptual only, defer the calculation. Accept 656 or 657 nm: the unrounded energy 3.025e-19 J gives 657. Frequency check (optional): 3.00e8 / 6.56e-7 = 4.57e14 Hz. IMAGE SLOT EMPTY, photo to shoot or generate: a calculator beside handwritten wavelength work.</a:t>
+              <a:t>Answers. (a) Red, 656 nm, the 3 to 2 drop. It is the smallest of the four (one step down from n = 3 to n = 2), so it releases the least energy, gives the longest wavelength, and looks red. (b) Violet, 410 nm, the 6 to 2 drop: the biggest drop of the four, the most energy, the shortest wavelength. IMAGE SLOT EMPTY, photo to shoot or generate: a notebook page with the table of four drops and pencil marks beside each color.</a:t>
             </a:r>
             <a:endParaRPr lang="en-US" dirty="0"/>
           </a:p>
@@ -874,7 +873,7 @@
           <a:p>
             <a:r>
               <a:rPr lang="en-US" dirty="0"/>
-              <a:t>Pre-built table, read-only; check values against the example. 3 to 2: 3.03e-19 J, 656 nm; 4 to 2: 4.09e-19 J, 486 nm; 5 to 2: 4.58e-19 J, 434 nm; 6 to 2: 4.84e-19 J, 410 nm. Scientific-notation flag applies here too (see slide 6).</a:t>
+              <a:t>Helium was first detected in the Sun's spectrum, 1868 (Janssen/Lockyer observations). Line positions identify an element. IMAGE SLOT EMPTY, photo to shoot or generate: line spectra of several gas discharge tubes side by side, photographed through a spectroscope.</a:t>
             </a:r>
             <a:endParaRPr lang="en-US" dirty="0"/>
           </a:p>
@@ -962,7 +961,7 @@
           <a:p>
             <a:r>
               <a:rPr lang="en-US" dirty="0"/>
-              <a:t>Helium was first detected in the Sun's spectrum, 1868 (Janssen and Lockyer). Line positions identify an element. IMAGE SLOT EMPTY, photo to shoot or generate: line spectra of several gas discharge tubes side by side, photographed through a spectroscope.</a:t>
+              <a:t>PROVISIONAL (flame section): flame tests are not a confirmed U2 lab (DECISIONS.md open question 4), so this is science only, no procedure. Divider into flame tests. Flame photos are still to be shot. IMAGE SLOT EMPTY, photo to shoot or generate: a lab burner flame with a wire loop of metal salt, shot in a darkened room.</a:t>
             </a:r>
             <a:endParaRPr lang="en-US" dirty="0"/>
           </a:p>
@@ -1050,7 +1049,7 @@
           <a:p>
             <a:r>
               <a:rPr lang="en-US" dirty="0"/>
-              <a:t>PROVISIONAL (flame section): flame tests are not a confirmed U2 lab (DECISIONS.md open question 4), so this is science only, no procedure. Divider into flame tests. Flame photos are still to be shot. IMAGE SLOT EMPTY, photo to shoot or generate: a lab burner flame with a wire loop of metal salt, shot in a darkened room.</a:t>
+              <a:t>PROVISIONAL (flame section): flame tests are not a confirmed U2 lab (DECISIONS.md open question 4), so this is science only, no procedure. PROVISIONAL: Ca, Sr, Ba and Cu flame colors come largely from molecular emitters (such as CaOH, SrOH, BaOH, CuCl), not single atomic lines; the electron-drop explanation is a valid HS simplification. Flame photos still to be shot. Color claims checked against textbook convention only. The color suggests the ion; it does not prove it. IMAGE SLOT EMPTY, photo to shoot or generate: a flame test photograph, a bright lilac flame from a wire loop.</a:t>
             </a:r>
             <a:endParaRPr lang="en-US" dirty="0"/>
           </a:p>
@@ -1138,7 +1137,7 @@
           <a:p>
             <a:r>
               <a:rPr lang="en-US" dirty="0"/>
-              <a:t>PROVISIONAL (flame section): flame tests are not a confirmed U2 lab (DECISIONS.md open question 4), so this is science only, no procedure. PROVISIONAL: Ca, Sr, Ba and Cu flame colors come largely from molecular emitters (such as CaOH, SrOH, BaOH, CuCl), not single atomic lines; the electron-drop explanation is a valid HS simplification. Flame photos still to be shot. Color claims checked against textbook convention only. The color suggests the ion; it does not prove it. IMAGE SLOT EMPTY, photo to shoot or generate: a flame test photograph, a bright lilac flame from a wire loop.</a:t>
+              <a:t>PROVISIONAL (flame section): flame tests are not a confirmed U2 lab (DECISIONS.md open question 4), so this is science only, no procedure. PROVISIONAL: colors are textbook convention only; swatches are illustrations, not photographs, and flame photos are still to be shot. Do not state a color is one exact wavelength. K lilac is often masked by sodium; the cobalt-glass technique is lab procedure and is not in scope.</a:t>
             </a:r>
             <a:endParaRPr lang="en-US" dirty="0"/>
           </a:p>
@@ -1226,7 +1225,7 @@
           <a:p>
             <a:r>
               <a:rPr lang="en-US" dirty="0"/>
-              <a:t>PROVISIONAL (flame section): flame tests are not a confirmed U2 lab (DECISIONS.md open question 4), so this is science only, no procedure. PROVISIONAL: colors are textbook convention only; swatches are illustrations, not photographs, and flame photos are still to be shot. Do not state a color is one exact wavelength. K lilac is often masked by sodium; the cobalt-glass technique is lab procedure and is not in scope.</a:t>
+              <a:t>PROVISIONAL (flame section): flame tests are not a confirmed U2 lab (DECISIONS.md open question 4), so this is science only, no procedure. PROVISIONAL: textbook colors only, Ca, Sr, Ba, Cu largely molecular emitters; photos still to be shot. Many elements give no visible flame color.</a:t>
             </a:r>
             <a:endParaRPr lang="en-US" dirty="0"/>
           </a:p>
@@ -1314,7 +1313,7 @@
           <a:p>
             <a:r>
               <a:rPr lang="en-US" dirty="0"/>
-              <a:t>PROVISIONAL (flame section): flame tests are not a confirmed U2 lab (DECISIONS.md open question 4), so this is science only, no procedure. PROVISIONAL: textbook colors only, Ca, Sr, Ba, Cu largely molecular emitters; photos still to be shot. Many elements give no visible flame color.</a:t>
+              <a:t>PROVISIONAL (flame section): flame tests are not a confirmed U2 lab (DECISIONS.md open question 4), so this is science only, no procedure. Textbook colors only; photos still to be shot. Intended answer: K+ (lilac) with a Na+ yellow trace; Ca2+ orange-red. IMAGE SLOT EMPTY, photo to shoot or generate: two wire loops of metal salt in a flame, one lilac and one orange-red, shot side by side.</a:t>
             </a:r>
             <a:endParaRPr lang="en-US" dirty="0"/>
           </a:p>
@@ -1402,7 +1401,7 @@
           <a:p>
             <a:r>
               <a:rPr lang="en-US" dirty="0"/>
-              <a:t>PROVISIONAL (flame section): flame tests are not a confirmed U2 lab (DECISIONS.md open question 4), so this is science only, no procedure. Textbook colors only; photos still to be shot. Intended answer: K+ (lilac) with a Na+ yellow trace; Ca2+ orange-red. IMAGE SLOT EMPTY, photo to shoot or generate: two wire loops of metal salt in a flame, one lilac and one orange-red, shot side by side.</a:t>
+              <a:t>PROVISIONAL (flame section): flame tests are not a confirmed U2 lab (DECISIONS.md open question 4), so this is science only, no procedure. Ca2+ is the likely answer for orange-red, but Sr2+ looks similar, so a flame test alone cannot settle it. Textbook colors only; photos still to be shot. IMAGE SLOT EMPTY, photo to shoot or generate: a notebook page with a flame color table and pencil check marks.</a:t>
             </a:r>
             <a:endParaRPr lang="en-US" dirty="0"/>
           </a:p>
@@ -1578,7 +1577,7 @@
           <a:p>
             <a:r>
               <a:rPr lang="en-US" dirty="0"/>
-              <a:t>PROVISIONAL (flame section): flame tests are not a confirmed U2 lab (DECISIONS.md open question 4), so this is science only, no procedure. Ca2+ is the likely answer for orange-red, but Sr2+ looks similar, so a flame test alone cannot settle it. Textbook colors only; photos still to be shot. IMAGE SLOT EMPTY, photo to shoot or generate: a notebook page with a flame color table and pencil check marks.</a:t>
+              <a:t>Formative check. OPTIONAL extra item 3 (replaces a calculation item): a hydrogen line looks blue-violet at 434 nm. Is it the 4 to 2 drop or the 5 to 2 drop? Answer: 5 to 2. The 4 to 2 drop makes the 486 nm blue-green line; 434 nm is a shorter wavelength, so it is the bigger drop. Answers to the three on-slide items: blue (shorter wavelength, more energy); each element has unique energy levels so unique photon energies; lilac suggests K+ (heat lifts electrons, they drop, photons of visible light). IMAGE SLOT EMPTY, photo to shoot or generate: a student's notebook with a half-finished answer.</a:t>
             </a:r>
             <a:endParaRPr lang="en-US" dirty="0"/>
           </a:p>
@@ -1602,94 +1601,6 @@
             <a:fld id="{F7021451-1387-4CA6-816F-3879F97B5CBC}" type="slidenum">
               <a:rPr lang="en-US"/>
               <a:t>20</a:t>
-            </a:fld>
-            <a:endParaRPr lang="en-US"/>
-          </a:p>
-        </p:txBody>
-      </p:sp>
-    </p:spTree>
-    <p:extLst>
-      <p:ext uri="{BB962C8B-B14F-4D97-AF65-F5344CB8AC3E}">
-        <p14:creationId xmlns:p14="http://schemas.microsoft.com/office/powerpoint/2010/main" val="1024086991"/>
-      </p:ext>
-    </p:extLst>
-  </p:cSld>
-  <p:clrMapOvr>
-    <a:masterClrMapping/>
-  </p:clrMapOvr>
-</p:notes>
-</file>
-
-<file path=ppt/notesSlides/notesSlide21.xml><?xml version="1.0" encoding="utf-8"?>
-<p:notes xmlns:a="http://schemas.openxmlformats.org/drawingml/2006/main" xmlns:r="http://schemas.openxmlformats.org/officeDocument/2006/relationships" xmlns:p="http://schemas.openxmlformats.org/presentationml/2006/main">
-  <p:cSld>
-    <p:spTree>
-      <p:nvGrpSpPr>
-        <p:cNvPr id="1" name=""/>
-        <p:cNvGrpSpPr/>
-        <p:nvPr/>
-      </p:nvGrpSpPr>
-      <p:grpSpPr>
-        <a:xfrm>
-          <a:off x="0" y="0"/>
-          <a:ext cx="0" cy="0"/>
-          <a:chOff x="0" y="0"/>
-          <a:chExt cx="0" cy="0"/>
-        </a:xfrm>
-      </p:grpSpPr>
-      <p:sp>
-        <p:nvSpPr>
-          <p:cNvPr id="2" name="Slide Image Placeholder 1"/>
-          <p:cNvSpPr>
-            <a:spLocks noGrp="1" noRot="1" noChangeAspect="1"/>
-          </p:cNvSpPr>
-          <p:nvPr>
-            <p:ph type="sldImg"/>
-          </p:nvPr>
-        </p:nvSpPr>
-        <p:spPr/>
-      </p:sp>
-      <p:sp>
-        <p:nvSpPr>
-          <p:cNvPr id="3" name="Notes Placeholder 2"/>
-          <p:cNvSpPr>
-            <a:spLocks noGrp="1"/>
-          </p:cNvSpPr>
-          <p:nvPr>
-            <p:ph type="body" idx="1"/>
-          </p:nvPr>
-        </p:nvSpPr>
-        <p:spPr/>
-        <p:txBody>
-          <a:bodyPr/>
-          <a:lstStyle/>
-          <a:p>
-            <a:r>
-              <a:rPr lang="en-US" dirty="0"/>
-              <a:t>Formative check. OPTIONAL extra item 3 (dropped from this deck): calculate the wavelength of a 4.58e-19 J photon (5 to 2 in hydrogen) and state the color. Answer: wavelength = 1.988e-25 / 4.58e-19 = 4.34e-7 m = 434 nm, blue-violet. Check: delta E = 2.18e-18 x (1/4 - 1/25) = 4.58e-19 J. Re-derived for this revision. Answers to the three on-slide items: blue (shorter wavelength, more energy); each element has unique energy levels so unique photon energies; lilac suggests K+ (heat lifts electrons, they drop, photons of visible light). IMAGE SLOT EMPTY, photo to shoot or generate: a student's notebook with a half-finished answer.</a:t>
-            </a:r>
-            <a:endParaRPr lang="en-US" dirty="0"/>
-          </a:p>
-        </p:txBody>
-      </p:sp>
-      <p:sp>
-        <p:nvSpPr>
-          <p:cNvPr id="4" name="Slide Number Placeholder 3"/>
-          <p:cNvSpPr>
-            <a:spLocks noGrp="1"/>
-          </p:cNvSpPr>
-          <p:nvPr>
-            <p:ph type="sldNum" sz="quarter" idx="10"/>
-          </p:nvPr>
-        </p:nvSpPr>
-        <p:spPr/>
-        <p:txBody>
-          <a:bodyPr/>
-          <a:lstStyle/>
-          <a:p>
-            <a:fld id="{F7021451-1387-4CA6-816F-3879F97B5CBC}" type="slidenum">
-              <a:rPr lang="en-US"/>
-              <a:t>21</a:t>
             </a:fld>
             <a:endParaRPr lang="en-US"/>
           </a:p>
@@ -1842,7 +1753,7 @@
           <a:p>
             <a:r>
               <a:rPr lang="en-US" dirty="0"/>
-              <a:t>Ranges: violet 400-450, blue 450-495, green 495-570, yellow 570-590, orange 590-620, red 620-700 nm (approximate).</a:t>
+              <a:t>Ranges: violet 400-450, blue 450-495, green 495-570, yellow 570-590, orange 590-620, red 620-700 nm (approximate). The arrows under the bar show the rule: shorter wavelength, more energy; longer wavelength, less energy. Per Matt, the range is shown in nm and in scientific notation (meters): 400 nm is 4.00 × 10^-7 m, 700 nm is 7.00 × 10^-7 m.</a:t>
             </a:r>
             <a:endParaRPr lang="en-US" dirty="0"/>
           </a:p>
@@ -1930,7 +1841,7 @@
           <a:p>
             <a:r>
               <a:rPr lang="en-US" dirty="0"/>
-              <a:t>Defines frequency here: how many waves pass per second. Short wavelength, high frequency, high energy. IMAGE SLOT EMPTY, photo to shoot or generate: a red and a violet laser pointer beam crossing in haze.</a:t>
+              <a:t>Defines frequency here: how many waves pass per second. Short wavelength, high frequency, high energy. State the rule in words only: more energy released means shorter wavelength and bluer light. No numbers needed. IMAGE SLOT EMPTY, photo to shoot or generate: a red and a violet laser pointer beam crossing in haze.</a:t>
             </a:r>
             <a:endParaRPr lang="en-US" dirty="0"/>
           </a:p>
@@ -2018,7 +1929,7 @@
           <a:p>
             <a:r>
               <a:rPr lang="en-US" dirty="0"/>
-              <a:t>FLAG, Matt to confirm: the course sequencing rule delays scientific notation and heavy math (courses/chemistry/DECISIONS.md, Course sequencing rules). This deck holds to ONE student calculation, calculator provided, 3 sig figs. If you prefer S2.5 conceptual only, defer the calculation. Constants: h = 6.626e-34 J s, c = 3.00e8 m/s. Equations are for reference; students use only E = hc / wavelength today. IMAGE SLOT EMPTY, photo to shoot or generate: a handheld spectroscope resting on a notebook page.</a:t>
+              <a:t>Hot solid gives all colors; hot gas gives separate lines. LED and fluorescence are out of scope. IMAGE SLOT EMPTY, photo to shoot or generate: an incandescent bulb filament beside a lit neon tube.</a:t>
             </a:r>
             <a:endParaRPr lang="en-US" dirty="0"/>
           </a:p>
@@ -2106,7 +2017,7 @@
           <a:p>
             <a:r>
               <a:rPr lang="en-US" dirty="0"/>
-              <a:t>Hot solid gives all colors; hot gas gives separate lines. LED and fluorescence are out of scope. IMAGE SLOT EMPTY, photo to shoot or generate: an incandescent bulb filament beside a lit neon tube.</a:t>
+              <a:t>Absorption lines sit at the same wavelengths as the element's emission lines. Absorption in starlight reveals composition.</a:t>
             </a:r>
             <a:endParaRPr lang="en-US" dirty="0"/>
           </a:p>
@@ -2194,7 +2105,7 @@
           <a:p>
             <a:r>
               <a:rPr lang="en-US" dirty="0"/>
-              <a:t>Absorption lines sit at the same wavelengths as the element's emission lines. Absorption in starlight reveals composition.</a:t>
+              <a:t>Lines are 656, 486, 434, 410 nm, all ending at n = 2. Hydrogen has more lines in the UV (2 to 1 is about 122 nm) and IR (4 to 3 is about 1876 nm). Misconception: 'hydrogen has only four lines'.</a:t>
             </a:r>
             <a:endParaRPr lang="en-US" dirty="0"/>
           </a:p>
@@ -2282,7 +2193,7 @@
           <a:p>
             <a:r>
               <a:rPr lang="en-US" dirty="0"/>
-              <a:t>Lines are 656, 486, 434, 410 nm, all ending at n = 2. Hydrogen has more lines in the UV (2 to 1 is about 122 nm) and IR (4 to 3 is about 1876 nm). Misconception: 'hydrogen has only four lines'.</a:t>
+              <a:t>Each line is one drop to n = 2. Electrons drop to lower levels; they do not fall into the nucleus. The levels are drawn to scale from the 1/n^2 pattern, so students can SEE that 6 to 2 is the longest arrow and 3 to 2 the shortest. Bigger drop, more energy, shorter wavelength, bluer light. Wavelengths in meters (scientific notation, per Matt) are on the table slide: 6.56, 4.86, 4.34, 4.10 × 10^-7 m.</a:t>
             </a:r>
             <a:endParaRPr lang="en-US" dirty="0"/>
           </a:p>
@@ -13378,7 +13289,7 @@
       </p:grpSpPr>
       <p:pic>
         <p:nvPicPr>
-          <p:cNvPr id="2" name="Image 0" descr="/home/user/WorkWork/templates/slide/assets/chem_u02_s2.5_energy_transitions.png">    </p:cNvPr>
+          <p:cNvPr id="2" name="Image 0" descr="/home/user/WorkWork/templates/slide/assets/chem_u02_s2.5_balmer_table.png">    </p:cNvPr>
           <p:cNvPicPr>
             <a:picLocks noChangeAspect="1"/>
           </p:cNvPicPr>
@@ -13435,7 +13346,7 @@
                 <a:ea typeface="Trade Gothic Next" pitchFamily="34" charset="-122"/>
                 <a:cs typeface="Trade Gothic Next" pitchFamily="34" charset="-120"/>
               </a:rPr>
-              <a:t>Which Drop Makes Which Line</a:t>
+              <a:t>Four Drops to n = 2</a:t>
             </a:r>
             <a:endParaRPr lang="en-US" sz="2800" dirty="0"/>
           </a:p>
@@ -13476,7 +13387,7 @@
                 <a:ea typeface="Trade Gothic Next" pitchFamily="34" charset="-122"/>
                 <a:cs typeface="Trade Gothic Next" pitchFamily="34" charset="-120"/>
               </a:rPr>
-              <a:t>Each line is one electron dropping to n = 2.</a:t>
+              <a:t>A pre-built table in nm and meters. Match each drop to its color.</a:t>
             </a:r>
             <a:endParaRPr lang="en-US" sz="1700" dirty="0"/>
           </a:p>
@@ -13517,7 +13428,7 @@
                 <a:ea typeface="Trade Gothic Next" pitchFamily="34" charset="-122"/>
                 <a:cs typeface="Trade Gothic Next" pitchFamily="34" charset="-120"/>
               </a:rPr>
-              <a:t>EXCITED STATE</a:t>
+              <a:t>SMALLEST DROP</a:t>
             </a:r>
             <a:endParaRPr lang="en-US" sz="1200" dirty="0"/>
           </a:p>
@@ -13558,7 +13469,7 @@
                 <a:ea typeface="Trade Gothic Next" pitchFamily="34" charset="-122"/>
                 <a:cs typeface="Trade Gothic Next" pitchFamily="34" charset="-120"/>
               </a:rPr>
-              <a:t>Heat or electricity lifts an electron up a level.</a:t>
+              <a:t>3 to 2: the longest wavelength, red.</a:t>
             </a:r>
             <a:endParaRPr lang="en-US" sz="1600" dirty="0"/>
           </a:p>
@@ -13599,7 +13510,7 @@
                 <a:ea typeface="Trade Gothic Next" pitchFamily="34" charset="-122"/>
                 <a:cs typeface="Trade Gothic Next" pitchFamily="34" charset="-120"/>
               </a:rPr>
-              <a:t>EMISSION</a:t>
+              <a:t>BIGGEST DROP</a:t>
             </a:r>
             <a:endParaRPr lang="en-US" sz="1200" dirty="0"/>
           </a:p>
@@ -13640,7 +13551,7 @@
                 <a:ea typeface="Trade Gothic Next" pitchFamily="34" charset="-122"/>
                 <a:cs typeface="Trade Gothic Next" pitchFamily="34" charset="-120"/>
               </a:rPr>
-              <a:t>The drop releases one photon with energy ΔE.</a:t>
+              <a:t>6 to 2: the shortest wavelength, violet.</a:t>
             </a:r>
             <a:endParaRPr lang="en-US" sz="1600" dirty="0"/>
           </a:p>
@@ -13681,7 +13592,7 @@
                 <a:ea typeface="Trade Gothic Next" pitchFamily="34" charset="-122"/>
                 <a:cs typeface="Trade Gothic Next" pitchFamily="34" charset="-120"/>
               </a:rPr>
-              <a:t>BIGGER DROP</a:t>
+              <a:t>THE PATTERN</a:t>
             </a:r>
             <a:endParaRPr lang="en-US" sz="1200" dirty="0"/>
           </a:p>
@@ -13722,7 +13633,7 @@
                 <a:ea typeface="Trade Gothic Next" pitchFamily="34" charset="-122"/>
                 <a:cs typeface="Trade Gothic Next" pitchFamily="34" charset="-120"/>
               </a:rPr>
-              <a:t>More energy, shorter wavelength, bluer light.</a:t>
+              <a:t>Bigger drop, shorter wavelength, bluer light.</a:t>
             </a:r>
             <a:endParaRPr lang="en-US" sz="1600" dirty="0"/>
           </a:p>
@@ -13900,7 +13811,7 @@
                 <a:ea typeface="Trade Gothic Next" pitchFamily="34" charset="-122"/>
                 <a:cs typeface="Trade Gothic Next" pitchFamily="34" charset="-120"/>
               </a:rPr>
-              <a:t>Example: Color of the 3 to 2 Drop</a:t>
+              <a:t>Example: Match the Drop to the Line</a:t>
             </a:r>
             <a:endParaRPr lang="en-US" sz="2800" dirty="0"/>
           </a:p>
@@ -13941,7 +13852,7 @@
                 <a:ea typeface="Trade Gothic Next" pitchFamily="34" charset="-122"/>
                 <a:cs typeface="Trade Gothic Next" pitchFamily="34" charset="-120"/>
               </a:rPr>
-              <a:t>Calculator provided. Copy the setup, not just the answer.</a:t>
+              <a:t>Use the table. Give a reason, not just an answer.</a:t>
             </a:r>
             <a:endParaRPr lang="en-US" sz="1700" dirty="0"/>
           </a:p>
@@ -13982,35 +13893,7 @@
                 <a:ea typeface="Trade Gothic Next" pitchFamily="34" charset="-122"/>
                 <a:cs typeface="Trade Gothic Next" pitchFamily="34" charset="-120"/>
               </a:rPr>
-              <a:t>Hydrogen's 3 to 2 drop emits a 3.03 × 10</a:t>
-            </a:r>
-            <a:pPr indent="0" marL="0">
-              <a:buNone/>
-            </a:pPr>
-            <a:r>
-              <a:rPr lang="en-US" sz="1600" baseline="30000" dirty="0">
-                <a:solidFill>
-                  <a:srgbClr val="EDF0E5"/>
-                </a:solidFill>
-                <a:latin typeface="Trade Gothic Next" pitchFamily="34" charset="0"/>
-                <a:ea typeface="Trade Gothic Next" pitchFamily="34" charset="-122"/>
-                <a:cs typeface="Trade Gothic Next" pitchFamily="34" charset="-120"/>
-              </a:rPr>
-              <a:t>−19</a:t>
-            </a:r>
-            <a:pPr indent="0" marL="0">
-              <a:buNone/>
-            </a:pPr>
-            <a:r>
-              <a:rPr lang="en-US" sz="1600" dirty="0">
-                <a:solidFill>
-                  <a:srgbClr val="EDF0E5"/>
-                </a:solidFill>
-                <a:latin typeface="Trade Gothic Next" pitchFamily="34" charset="0"/>
-                <a:ea typeface="Trade Gothic Next" pitchFamily="34" charset="-122"/>
-                <a:cs typeface="Trade Gothic Next" pitchFamily="34" charset="-120"/>
-              </a:rPr>
-              <a:t> J photon. Find its wavelength and color.</a:t>
+              <a:t>(a) Which drop made the red line? Why is it the smallest? (b) Which made the violet line?</a:t>
             </a:r>
             <a:endParaRPr lang="en-US" sz="1600" dirty="0"/>
           </a:p>
@@ -14092,13 +13975,16 @@
                 <a:ea typeface="Trade Gothic Next" pitchFamily="34" charset="-122"/>
                 <a:cs typeface="Trade Gothic Next" pitchFamily="34" charset="-120"/>
               </a:rPr>
-              <a:t>E = 3.03 × 10</a:t>
-            </a:r>
-            <a:pPr indent="0" marL="0">
-              <a:buNone/>
-            </a:pPr>
-            <a:r>
-              <a:rPr lang="en-US" sz="1600" baseline="30000" dirty="0">
+              <a:t>The table of four drops</a:t>
+            </a:r>
+            <a:endParaRPr lang="en-US" sz="1600" dirty="0"/>
+          </a:p>
+          <a:p>
+            <a:pPr indent="0" marL="0">
+              <a:buNone/>
+            </a:pPr>
+            <a:r>
+              <a:rPr lang="en-US" sz="1600" dirty="0">
                 <a:solidFill>
                   <a:srgbClr val="14161B"/>
                 </a:solidFill>
@@ -14106,8 +13992,11 @@
                 <a:ea typeface="Trade Gothic Next" pitchFamily="34" charset="-122"/>
                 <a:cs typeface="Trade Gothic Next" pitchFamily="34" charset="-120"/>
               </a:rPr>
-              <a:t>−19</a:t>
-            </a:r>
+              <a:t>Red line: 656 nm</a:t>
+            </a:r>
+            <a:endParaRPr lang="en-US" sz="1600" dirty="0"/>
+          </a:p>
+          <a:p>
             <a:pPr indent="0" marL="0">
               <a:buNone/>
             </a:pPr>
@@ -14120,97 +14009,7 @@
                 <a:ea typeface="Trade Gothic Next" pitchFamily="34" charset="-122"/>
                 <a:cs typeface="Trade Gothic Next" pitchFamily="34" charset="-120"/>
               </a:rPr>
-              <a:t> J</a:t>
-            </a:r>
-            <a:endParaRPr lang="en-US" sz="1600" dirty="0"/>
-          </a:p>
-          <a:p>
-            <a:pPr indent="0" marL="0">
-              <a:buNone/>
-            </a:pPr>
-            <a:r>
-              <a:rPr lang="en-US" sz="1600" dirty="0">
-                <a:solidFill>
-                  <a:srgbClr val="14161B"/>
-                </a:solidFill>
-                <a:latin typeface="Trade Gothic Next" pitchFamily="34" charset="0"/>
-                <a:ea typeface="Trade Gothic Next" pitchFamily="34" charset="-122"/>
-                <a:cs typeface="Trade Gothic Next" pitchFamily="34" charset="-120"/>
-              </a:rPr>
-              <a:t>h = 6.626 × 10</a:t>
-            </a:r>
-            <a:pPr indent="0" marL="0">
-              <a:buNone/>
-            </a:pPr>
-            <a:r>
-              <a:rPr lang="en-US" sz="1600" baseline="30000" dirty="0">
-                <a:solidFill>
-                  <a:srgbClr val="14161B"/>
-                </a:solidFill>
-                <a:latin typeface="Trade Gothic Next" pitchFamily="34" charset="0"/>
-                <a:ea typeface="Trade Gothic Next" pitchFamily="34" charset="-122"/>
-                <a:cs typeface="Trade Gothic Next" pitchFamily="34" charset="-120"/>
-              </a:rPr>
-              <a:t>−34</a:t>
-            </a:r>
-            <a:pPr indent="0" marL="0">
-              <a:buNone/>
-            </a:pPr>
-            <a:r>
-              <a:rPr lang="en-US" sz="1600" dirty="0">
-                <a:solidFill>
-                  <a:srgbClr val="14161B"/>
-                </a:solidFill>
-                <a:latin typeface="Trade Gothic Next" pitchFamily="34" charset="0"/>
-                <a:ea typeface="Trade Gothic Next" pitchFamily="34" charset="-122"/>
-                <a:cs typeface="Trade Gothic Next" pitchFamily="34" charset="-120"/>
-              </a:rPr>
-              <a:t> J·s</a:t>
-            </a:r>
-            <a:endParaRPr lang="en-US" sz="1600" dirty="0"/>
-          </a:p>
-          <a:p>
-            <a:pPr indent="0" marL="0">
-              <a:buNone/>
-            </a:pPr>
-            <a:r>
-              <a:rPr lang="en-US" sz="1600" dirty="0">
-                <a:solidFill>
-                  <a:srgbClr val="14161B"/>
-                </a:solidFill>
-                <a:latin typeface="Trade Gothic Next" pitchFamily="34" charset="0"/>
-                <a:ea typeface="Trade Gothic Next" pitchFamily="34" charset="-122"/>
-                <a:cs typeface="Trade Gothic Next" pitchFamily="34" charset="-120"/>
-              </a:rPr>
-              <a:t>c = 3.00 × 10</a:t>
-            </a:r>
-            <a:pPr indent="0" marL="0">
-              <a:buNone/>
-            </a:pPr>
-            <a:r>
-              <a:rPr lang="en-US" sz="1600" baseline="30000" dirty="0">
-                <a:solidFill>
-                  <a:srgbClr val="14161B"/>
-                </a:solidFill>
-                <a:latin typeface="Trade Gothic Next" pitchFamily="34" charset="0"/>
-                <a:ea typeface="Trade Gothic Next" pitchFamily="34" charset="-122"/>
-                <a:cs typeface="Trade Gothic Next" pitchFamily="34" charset="-120"/>
-              </a:rPr>
-              <a:t>8</a:t>
-            </a:r>
-            <a:pPr indent="0" marL="0">
-              <a:buNone/>
-            </a:pPr>
-            <a:r>
-              <a:rPr lang="en-US" sz="1600" dirty="0">
-                <a:solidFill>
-                  <a:srgbClr val="14161B"/>
-                </a:solidFill>
-                <a:latin typeface="Trade Gothic Next" pitchFamily="34" charset="0"/>
-                <a:ea typeface="Trade Gothic Next" pitchFamily="34" charset="-122"/>
-                <a:cs typeface="Trade Gothic Next" pitchFamily="34" charset="-120"/>
-              </a:rPr>
-              <a:t> m/s</a:t>
+              <a:t>Violet line: 410 nm</a:t>
             </a:r>
             <a:endParaRPr lang="en-US" sz="1600" dirty="0"/>
           </a:p>
@@ -14292,7 +14091,7 @@
                 <a:ea typeface="Trade Gothic Next" pitchFamily="34" charset="-122"/>
                 <a:cs typeface="Trade Gothic Next" pitchFamily="34" charset="-120"/>
               </a:rPr>
-              <a:t>Wavelength in nm</a:t>
+              <a:t>(a) A drop and a reason</a:t>
             </a:r>
             <a:endParaRPr lang="en-US" sz="1600" dirty="0"/>
           </a:p>
@@ -14309,7 +14108,7 @@
                 <a:ea typeface="Trade Gothic Next" pitchFamily="34" charset="-122"/>
                 <a:cs typeface="Trade Gothic Next" pitchFamily="34" charset="-120"/>
               </a:rPr>
-              <a:t>Color</a:t>
+              <a:t>(b) A drop</a:t>
             </a:r>
             <a:endParaRPr lang="en-US" sz="1600" dirty="0"/>
           </a:p>
@@ -14380,7 +14179,7 @@
                 <a:ea typeface="Trade Gothic Next" pitchFamily="34" charset="-122"/>
                 <a:cs typeface="Trade Gothic Next" pitchFamily="34" charset="-120"/>
               </a:rPr>
-              <a:t>Rearrange first: wavelength = hc ÷ E.</a:t>
+              <a:t>Bigger drop means shorter wavelength and bluer light.</a:t>
             </a:r>
             <a:endParaRPr lang="en-US" sz="1600" dirty="0"/>
           </a:p>
@@ -14558,7 +14357,7 @@
                 <a:ea typeface="Trade Gothic Next" pitchFamily="34" charset="-122"/>
                 <a:cs typeface="Trade Gothic Next" pitchFamily="34" charset="-120"/>
               </a:rPr>
-              <a:t>The 3 to 2 Drop, Worked</a:t>
+              <a:t>Match the Drop, Worked</a:t>
             </a:r>
             <a:endParaRPr lang="en-US" sz="2800" dirty="0"/>
           </a:p>
@@ -14599,7 +14398,7 @@
                 <a:ea typeface="Trade Gothic Next" pitchFamily="34" charset="-122"/>
                 <a:cs typeface="Trade Gothic Next" pitchFamily="34" charset="-120"/>
               </a:rPr>
-              <a:t>Rearrange, divide, then convert meters to nanometers.</a:t>
+              <a:t>Read the color, then compare the size of the drop.</a:t>
             </a:r>
             <a:endParaRPr lang="en-US" sz="1700" dirty="0"/>
           </a:p>
@@ -14681,7 +14480,7 @@
                 <a:ea typeface="Trade Gothic Next" pitchFamily="34" charset="-122"/>
                 <a:cs typeface="Trade Gothic Next" pitchFamily="34" charset="-120"/>
               </a:rPr>
-              <a:t>wavelength = hc ÷ E</a:t>
+              <a:t>Bigger drop:</a:t>
             </a:r>
             <a:endParaRPr lang="en-US" sz="1600" dirty="0"/>
           </a:p>
@@ -14698,13 +14497,16 @@
                 <a:ea typeface="Trade Gothic Next" pitchFamily="34" charset="-122"/>
                 <a:cs typeface="Trade Gothic Next" pitchFamily="34" charset="-120"/>
               </a:rPr>
-              <a:t>hc = 6.626 × 10</a:t>
-            </a:r>
-            <a:pPr indent="0" marL="0">
-              <a:buNone/>
-            </a:pPr>
-            <a:r>
-              <a:rPr lang="en-US" sz="1600" baseline="30000" dirty="0">
+              <a:t>more energy,</a:t>
+            </a:r>
+            <a:endParaRPr lang="en-US" sz="1600" dirty="0"/>
+          </a:p>
+          <a:p>
+            <a:pPr indent="0" marL="0">
+              <a:buNone/>
+            </a:pPr>
+            <a:r>
+              <a:rPr lang="en-US" sz="1600" dirty="0">
                 <a:solidFill>
                   <a:srgbClr val="14161B"/>
                 </a:solidFill>
@@ -14712,8 +14514,11 @@
                 <a:ea typeface="Trade Gothic Next" pitchFamily="34" charset="-122"/>
                 <a:cs typeface="Trade Gothic Next" pitchFamily="34" charset="-120"/>
               </a:rPr>
-              <a:t>−34</a:t>
-            </a:r>
+              <a:t>shorter wavelength,</a:t>
+            </a:r>
+            <a:endParaRPr lang="en-US" sz="1600" dirty="0"/>
+          </a:p>
+          <a:p>
             <a:pPr indent="0" marL="0">
               <a:buNone/>
             </a:pPr>
@@ -14726,66 +14531,7 @@
                 <a:ea typeface="Trade Gothic Next" pitchFamily="34" charset="-122"/>
                 <a:cs typeface="Trade Gothic Next" pitchFamily="34" charset="-120"/>
               </a:rPr>
-              <a:t> × 3.00 × 10</a:t>
-            </a:r>
-            <a:pPr indent="0" marL="0">
-              <a:buNone/>
-            </a:pPr>
-            <a:r>
-              <a:rPr lang="en-US" sz="1600" baseline="30000" dirty="0">
-                <a:solidFill>
-                  <a:srgbClr val="14161B"/>
-                </a:solidFill>
-                <a:latin typeface="Trade Gothic Next" pitchFamily="34" charset="0"/>
-                <a:ea typeface="Trade Gothic Next" pitchFamily="34" charset="-122"/>
-                <a:cs typeface="Trade Gothic Next" pitchFamily="34" charset="-120"/>
-              </a:rPr>
-              <a:t>8</a:t>
-            </a:r>
-            <a:endParaRPr lang="en-US" sz="1600" dirty="0"/>
-          </a:p>
-          <a:p>
-            <a:pPr indent="0" marL="0">
-              <a:buNone/>
-            </a:pPr>
-            <a:r>
-              <a:rPr lang="en-US" sz="1600" dirty="0">
-                <a:solidFill>
-                  <a:srgbClr val="14161B"/>
-                </a:solidFill>
-                <a:latin typeface="Trade Gothic Next" pitchFamily="34" charset="0"/>
-                <a:ea typeface="Trade Gothic Next" pitchFamily="34" charset="-122"/>
-                <a:cs typeface="Trade Gothic Next" pitchFamily="34" charset="-120"/>
-              </a:rPr>
-              <a:t>hc = 1.988 × 10</a:t>
-            </a:r>
-            <a:pPr indent="0" marL="0">
-              <a:buNone/>
-            </a:pPr>
-            <a:r>
-              <a:rPr lang="en-US" sz="1600" baseline="30000" dirty="0">
-                <a:solidFill>
-                  <a:srgbClr val="14161B"/>
-                </a:solidFill>
-                <a:latin typeface="Trade Gothic Next" pitchFamily="34" charset="0"/>
-                <a:ea typeface="Trade Gothic Next" pitchFamily="34" charset="-122"/>
-                <a:cs typeface="Trade Gothic Next" pitchFamily="34" charset="-120"/>
-              </a:rPr>
-              <a:t>−25</a:t>
-            </a:r>
-            <a:pPr indent="0" marL="0">
-              <a:buNone/>
-            </a:pPr>
-            <a:r>
-              <a:rPr lang="en-US" sz="1600" dirty="0">
-                <a:solidFill>
-                  <a:srgbClr val="14161B"/>
-                </a:solidFill>
-                <a:latin typeface="Trade Gothic Next" pitchFamily="34" charset="0"/>
-                <a:ea typeface="Trade Gothic Next" pitchFamily="34" charset="-122"/>
-                <a:cs typeface="Trade Gothic Next" pitchFamily="34" charset="-120"/>
-              </a:rPr>
-              <a:t> J·m</a:t>
+              <a:t>bluer light.</a:t>
             </a:r>
             <a:endParaRPr lang="en-US" sz="1600" dirty="0"/>
           </a:p>
@@ -14826,13 +14572,16 @@
                 <a:ea typeface="Trade Gothic Next" pitchFamily="34" charset="-122"/>
                 <a:cs typeface="Trade Gothic Next" pitchFamily="34" charset="-120"/>
               </a:rPr>
-              <a:t>(1.988 × 10</a:t>
-            </a:r>
-            <a:pPr indent="0" marL="0">
-              <a:buNone/>
-            </a:pPr>
-            <a:r>
-              <a:rPr lang="en-US" sz="1900" baseline="30000" dirty="0">
+              <a:t>(a) Red: 3 to 2</a:t>
+            </a:r>
+            <a:endParaRPr lang="en-US" sz="1900" dirty="0"/>
+          </a:p>
+          <a:p>
+            <a:pPr indent="0" marL="0">
+              <a:buNone/>
+            </a:pPr>
+            <a:r>
+              <a:rPr lang="en-US" sz="1900" dirty="0">
                 <a:solidFill>
                   <a:srgbClr val="14161B"/>
                 </a:solidFill>
@@ -14840,8 +14589,11 @@
                 <a:ea typeface="Trade Gothic Next" pitchFamily="34" charset="-122"/>
                 <a:cs typeface="Trade Gothic Next" pitchFamily="34" charset="-120"/>
               </a:rPr>
-              <a:t>−25</a:t>
-            </a:r>
+              <a:t>The smallest drop.</a:t>
+            </a:r>
+            <a:endParaRPr lang="en-US" sz="1900" dirty="0"/>
+          </a:p>
+          <a:p>
             <a:pPr indent="0" marL="0">
               <a:buNone/>
             </a:pPr>
@@ -14854,7 +14606,7 @@
                 <a:ea typeface="Trade Gothic Next" pitchFamily="34" charset="-122"/>
                 <a:cs typeface="Trade Gothic Next" pitchFamily="34" charset="-120"/>
               </a:rPr>
-              <a:t>)</a:t>
+              <a:t>(b) Violet: 6 to 2</a:t>
             </a:r>
             <a:endParaRPr lang="en-US" sz="1900" dirty="0"/>
           </a:p>
@@ -14871,125 +14623,7 @@
                 <a:ea typeface="Trade Gothic Next" pitchFamily="34" charset="-122"/>
                 <a:cs typeface="Trade Gothic Next" pitchFamily="34" charset="-120"/>
               </a:rPr>
-              <a:t>÷ (3.03 × 10</a:t>
-            </a:r>
-            <a:pPr indent="0" marL="0">
-              <a:buNone/>
-            </a:pPr>
-            <a:r>
-              <a:rPr lang="en-US" sz="1900" baseline="30000" dirty="0">
-                <a:solidFill>
-                  <a:srgbClr val="14161B"/>
-                </a:solidFill>
-                <a:latin typeface="Trade Gothic Next" pitchFamily="34" charset="0"/>
-                <a:ea typeface="Trade Gothic Next" pitchFamily="34" charset="-122"/>
-                <a:cs typeface="Trade Gothic Next" pitchFamily="34" charset="-120"/>
-              </a:rPr>
-              <a:t>−19</a:t>
-            </a:r>
-            <a:pPr indent="0" marL="0">
-              <a:buNone/>
-            </a:pPr>
-            <a:r>
-              <a:rPr lang="en-US" sz="1900" dirty="0">
-                <a:solidFill>
-                  <a:srgbClr val="14161B"/>
-                </a:solidFill>
-                <a:latin typeface="Trade Gothic Next" pitchFamily="34" charset="0"/>
-                <a:ea typeface="Trade Gothic Next" pitchFamily="34" charset="-122"/>
-                <a:cs typeface="Trade Gothic Next" pitchFamily="34" charset="-120"/>
-              </a:rPr>
-              <a:t>)</a:t>
-            </a:r>
-            <a:endParaRPr lang="en-US" sz="1900" dirty="0"/>
-          </a:p>
-          <a:p>
-            <a:pPr indent="0" marL="0">
-              <a:buNone/>
-            </a:pPr>
-            <a:r>
-              <a:rPr lang="en-US" sz="1900" dirty="0">
-                <a:solidFill>
-                  <a:srgbClr val="14161B"/>
-                </a:solidFill>
-                <a:latin typeface="Trade Gothic Next" pitchFamily="34" charset="0"/>
-                <a:ea typeface="Trade Gothic Next" pitchFamily="34" charset="-122"/>
-                <a:cs typeface="Trade Gothic Next" pitchFamily="34" charset="-120"/>
-              </a:rPr>
-              <a:t>= 6.56 × 10</a:t>
-            </a:r>
-            <a:pPr indent="0" marL="0">
-              <a:buNone/>
-            </a:pPr>
-            <a:r>
-              <a:rPr lang="en-US" sz="1900" baseline="30000" dirty="0">
-                <a:solidFill>
-                  <a:srgbClr val="14161B"/>
-                </a:solidFill>
-                <a:latin typeface="Trade Gothic Next" pitchFamily="34" charset="0"/>
-                <a:ea typeface="Trade Gothic Next" pitchFamily="34" charset="-122"/>
-                <a:cs typeface="Trade Gothic Next" pitchFamily="34" charset="-120"/>
-              </a:rPr>
-              <a:t>−7</a:t>
-            </a:r>
-            <a:pPr indent="0" marL="0">
-              <a:buNone/>
-            </a:pPr>
-            <a:r>
-              <a:rPr lang="en-US" sz="1900" dirty="0">
-                <a:solidFill>
-                  <a:srgbClr val="14161B"/>
-                </a:solidFill>
-                <a:latin typeface="Trade Gothic Next" pitchFamily="34" charset="0"/>
-                <a:ea typeface="Trade Gothic Next" pitchFamily="34" charset="-122"/>
-                <a:cs typeface="Trade Gothic Next" pitchFamily="34" charset="-120"/>
-              </a:rPr>
-              <a:t> m</a:t>
-            </a:r>
-            <a:endParaRPr lang="en-US" sz="1900" dirty="0"/>
-          </a:p>
-          <a:p>
-            <a:pPr indent="0" marL="0">
-              <a:buNone/>
-            </a:pPr>
-            <a:r>
-              <a:rPr lang="en-US" sz="1900" dirty="0">
-                <a:solidFill>
-                  <a:srgbClr val="14161B"/>
-                </a:solidFill>
-                <a:latin typeface="Trade Gothic Next" pitchFamily="34" charset="0"/>
-                <a:ea typeface="Trade Gothic Next" pitchFamily="34" charset="-122"/>
-                <a:cs typeface="Trade Gothic Next" pitchFamily="34" charset="-120"/>
-              </a:rPr>
-              <a:t>× 10</a:t>
-            </a:r>
-            <a:pPr indent="0" marL="0">
-              <a:buNone/>
-            </a:pPr>
-            <a:r>
-              <a:rPr lang="en-US" sz="1900" baseline="30000" dirty="0">
-                <a:solidFill>
-                  <a:srgbClr val="14161B"/>
-                </a:solidFill>
-                <a:latin typeface="Trade Gothic Next" pitchFamily="34" charset="0"/>
-                <a:ea typeface="Trade Gothic Next" pitchFamily="34" charset="-122"/>
-                <a:cs typeface="Trade Gothic Next" pitchFamily="34" charset="-120"/>
-              </a:rPr>
-              <a:t>9</a:t>
-            </a:r>
-            <a:pPr indent="0" marL="0">
-              <a:buNone/>
-            </a:pPr>
-            <a:r>
-              <a:rPr lang="en-US" sz="1900" dirty="0">
-                <a:solidFill>
-                  <a:srgbClr val="14161B"/>
-                </a:solidFill>
-                <a:latin typeface="Trade Gothic Next" pitchFamily="34" charset="0"/>
-                <a:ea typeface="Trade Gothic Next" pitchFamily="34" charset="-122"/>
-                <a:cs typeface="Trade Gothic Next" pitchFamily="34" charset="-120"/>
-              </a:rPr>
-              <a:t> = 656 nm (red)</a:t>
+              <a:t>The biggest drop.</a:t>
             </a:r>
             <a:endParaRPr lang="en-US" sz="1900" dirty="0"/>
           </a:p>
@@ -15030,7 +14664,7 @@
                 <a:ea typeface="Trade Gothic Next" pitchFamily="34" charset="-122"/>
                 <a:cs typeface="Trade Gothic Next" pitchFamily="34" charset="-120"/>
               </a:rPr>
-              <a:t>656 nm is red: the 3 to 2 drop makes hydrogen's red line.</a:t>
+              <a:t>Red is the smallest drop, 3 to 2. Violet is the biggest, 6 to 2.</a:t>
             </a:r>
             <a:endParaRPr lang="en-US" sz="1600" dirty="0"/>
           </a:p>
@@ -15173,33 +14807,9 @@
           <a:chExt cx="0" cy="0"/>
         </a:xfrm>
       </p:grpSpPr>
-      <p:pic>
-        <p:nvPicPr>
-          <p:cNvPr id="2" name="Image 0" descr="/home/user/WorkWork/templates/slide/assets/chem_u02_s2.5_balmer_table.png">    </p:cNvPr>
-          <p:cNvPicPr>
-            <a:picLocks noChangeAspect="1"/>
-          </p:cNvPicPr>
-          <p:nvPr/>
-        </p:nvPicPr>
-        <p:blipFill>
-          <a:blip r:embed="rId1"/>
-          <a:stretch>
-            <a:fillRect/>
-          </a:stretch>
-        </p:blipFill>
-        <p:spPr>
-          <a:xfrm>
-            <a:off x="914400" y="2651760"/>
-            <a:ext cx="4617720" cy="2743200"/>
-          </a:xfrm>
-          <a:prstGeom prst="rect">
-            <a:avLst/>
-          </a:prstGeom>
-        </p:spPr>
-      </p:pic>
-      <p:sp>
-        <p:nvSpPr>
-          <p:cNvPr id="3" name="Text 2"/>
+      <p:sp>
+        <p:nvSpPr>
+          <p:cNvPr id="2" name="Text 2"/>
           <p:cNvSpPr txBox="1"/>
           <p:nvPr>
             <p:ph idx="103" type="title" hasCustomPrompt="1"/>
@@ -15232,7 +14842,7 @@
                 <a:ea typeface="Trade Gothic Next" pitchFamily="34" charset="-122"/>
                 <a:cs typeface="Trade Gothic Next" pitchFamily="34" charset="-120"/>
               </a:rPr>
-              <a:t>Four Drops to n = 2</a:t>
+              <a:t>Every Element Has Its Own Lines</a:t>
             </a:r>
             <a:endParaRPr lang="en-US" sz="2800" dirty="0"/>
           </a:p>
@@ -15240,7 +14850,7 @@
       </p:sp>
       <p:sp>
         <p:nvSpPr>
-          <p:cNvPr id="4" name="Text 2"/>
+          <p:cNvPr id="3" name="Text 2"/>
           <p:cNvSpPr txBox="1"/>
           <p:nvPr>
             <p:ph idx="104" type="body" hasCustomPrompt="1"/>
@@ -15273,7 +14883,7 @@
                 <a:ea typeface="Trade Gothic Next" pitchFamily="34" charset="-122"/>
                 <a:cs typeface="Trade Gothic Next" pitchFamily="34" charset="-120"/>
               </a:rPr>
-              <a:t>A pre-built table. Read it, do not recalculate it.</a:t>
+              <a:t>Only certain energy drops exist, so only certain lines appear.</a:t>
             </a:r>
             <a:endParaRPr lang="en-US" sz="1700" dirty="0"/>
           </a:p>
@@ -15281,16 +14891,57 @@
       </p:sp>
       <p:sp>
         <p:nvSpPr>
+          <p:cNvPr id="4" name="Text 4"/>
+          <p:cNvSpPr txBox="1"/>
+          <p:nvPr>
+            <p:ph idx="108" type="body" hasCustomPrompt="1"/>
+          </p:nvPr>
+        </p:nvSpPr>
+        <p:spPr>
+          <a:xfrm>
+            <a:off x="5733288" y="2542032"/>
+            <a:ext cx="2752344" cy="219456"/>
+          </a:xfrm>
+          <a:prstGeom prst="rect">
+            <a:avLst/>
+          </a:prstGeom>
+          <a:noFill/>
+          <a:ln/>
+        </p:spPr>
+        <p:txBody>
+          <a:bodyPr wrap="square" lIns="0" tIns="0" rIns="0" bIns="0" rtlCol="0"/>
+          <a:lstStyle/>
+          <a:p>
+            <a:pPr indent="0" marL="0">
+              <a:buNone/>
+            </a:pPr>
+            <a:r>
+              <a:rPr lang="en-US" sz="1200" b="1" spc="120" kern="0" dirty="0">
+                <a:solidFill>
+                  <a:srgbClr val="2E3338"/>
+                </a:solidFill>
+                <a:latin typeface="Trade Gothic Next" pitchFamily="34" charset="0"/>
+                <a:ea typeface="Trade Gothic Next" pitchFamily="34" charset="-122"/>
+                <a:cs typeface="Trade Gothic Next" pitchFamily="34" charset="-120"/>
+              </a:rPr>
+              <a:t>UNIQUE LEVELS</a:t>
+            </a:r>
+            <a:endParaRPr lang="en-US" sz="1200" dirty="0"/>
+          </a:p>
+        </p:txBody>
+      </p:sp>
+      <p:sp>
+        <p:nvSpPr>
           <p:cNvPr id="5" name="Text 4"/>
           <p:cNvSpPr txBox="1"/>
           <p:nvPr>
-            <p:ph idx="108" type="body" hasCustomPrompt="1"/>
-          </p:nvPr>
-        </p:nvSpPr>
-        <p:spPr>
-          <a:xfrm>
-            <a:off x="6327648" y="2560320"/>
-            <a:ext cx="5129784" cy="219456"/>
+            <p:ph idx="109" type="body" hasCustomPrompt="1"/>
+          </p:nvPr>
+        </p:nvSpPr>
+        <p:spPr>
+          <a:xfrm>
+            <a:off x="5733288" y="2834640"/>
+            <a:ext cx="2752344" cy="1965960"/>
           </a:xfrm>
           <a:prstGeom prst="rect">
             <a:avLst/>
@@ -15306,15 +14957,79 @@
               <a:buNone/>
             </a:pPr>
             <a:r>
+              <a:rPr lang="en-US" sz="1600" dirty="0">
+                <a:solidFill>
+                  <a:srgbClr val="14161B"/>
+                </a:solidFill>
+                <a:latin typeface="Trade Gothic Next" pitchFamily="34" charset="0"/>
+                <a:ea typeface="Trade Gothic Next" pitchFamily="34" charset="-122"/>
+                <a:cs typeface="Trade Gothic Next" pitchFamily="34" charset="-120"/>
+              </a:rPr>
+              <a:t>Each element has its own energy levels.</a:t>
+            </a:r>
+            <a:endParaRPr lang="en-US" sz="1600" dirty="0"/>
+          </a:p>
+          <a:p>
+            <a:pPr indent="0" marL="0">
+              <a:buNone/>
+            </a:pPr>
+            <a:endParaRPr lang="en-US" sz="1600" dirty="0"/>
+          </a:p>
+          <a:p>
+            <a:pPr indent="0" marL="0">
+              <a:buNone/>
+            </a:pPr>
+            <a:r>
+              <a:rPr lang="en-US" sz="1600" dirty="0">
+                <a:solidFill>
+                  <a:srgbClr val="14161B"/>
+                </a:solidFill>
+                <a:latin typeface="Trade Gothic Next" pitchFamily="34" charset="0"/>
+                <a:ea typeface="Trade Gothic Next" pitchFamily="34" charset="-122"/>
+                <a:cs typeface="Trade Gothic Next" pitchFamily="34" charset="-120"/>
+              </a:rPr>
+              <a:t>So its drops, and its lines, are its own.</a:t>
+            </a:r>
+            <a:endParaRPr lang="en-US" sz="1600" dirty="0"/>
+          </a:p>
+        </p:txBody>
+      </p:sp>
+      <p:sp>
+        <p:nvSpPr>
+          <p:cNvPr id="6" name="Text 5"/>
+          <p:cNvSpPr txBox="1"/>
+          <p:nvPr>
+            <p:ph idx="111" type="body" hasCustomPrompt="1"/>
+          </p:nvPr>
+        </p:nvSpPr>
+        <p:spPr>
+          <a:xfrm>
+            <a:off x="9116568" y="2542032"/>
+            <a:ext cx="2752344" cy="219456"/>
+          </a:xfrm>
+          <a:prstGeom prst="rect">
+            <a:avLst/>
+          </a:prstGeom>
+          <a:noFill/>
+          <a:ln/>
+        </p:spPr>
+        <p:txBody>
+          <a:bodyPr wrap="square" lIns="0" tIns="0" rIns="0" bIns="0" rtlCol="0"/>
+          <a:lstStyle/>
+          <a:p>
+            <a:pPr indent="0" marL="0">
+              <a:buNone/>
+            </a:pPr>
+            <a:r>
               <a:rPr lang="en-US" sz="1200" b="1" spc="120" kern="0" dirty="0">
                 <a:solidFill>
-                  <a:srgbClr val="2E3338"/>
-                </a:solidFill>
-                <a:latin typeface="Trade Gothic Next" pitchFamily="34" charset="0"/>
-                <a:ea typeface="Trade Gothic Next" pitchFamily="34" charset="-122"/>
-                <a:cs typeface="Trade Gothic Next" pitchFamily="34" charset="-120"/>
-              </a:rPr>
-              <a:t>READ DOWN</a:t>
+                  <a:srgbClr val="BDB6AA"/>
+                </a:solidFill>
+                <a:latin typeface="Trade Gothic Next" pitchFamily="34" charset="0"/>
+                <a:ea typeface="Trade Gothic Next" pitchFamily="34" charset="-122"/>
+                <a:cs typeface="Trade Gothic Next" pitchFamily="34" charset="-120"/>
+              </a:rPr>
+              <a:t>A FINGERPRINT</a:t>
             </a:r>
             <a:endParaRPr lang="en-US" sz="1200" dirty="0"/>
           </a:p>
@@ -15322,16 +15037,16 @@
       </p:sp>
       <p:sp>
         <p:nvSpPr>
-          <p:cNvPr id="6" name="Text 4"/>
-          <p:cNvSpPr txBox="1"/>
-          <p:nvPr>
-            <p:ph idx="109" type="body" hasCustomPrompt="1"/>
-          </p:nvPr>
-        </p:nvSpPr>
-        <p:spPr>
-          <a:xfrm>
-            <a:off x="6327648" y="2852928"/>
-            <a:ext cx="5129784" cy="329184"/>
+          <p:cNvPr id="7" name="Text 5"/>
+          <p:cNvSpPr txBox="1"/>
+          <p:nvPr>
+            <p:ph idx="112" type="body" hasCustomPrompt="1"/>
+          </p:nvPr>
+        </p:nvSpPr>
+        <p:spPr>
+          <a:xfrm>
+            <a:off x="9116568" y="2834640"/>
+            <a:ext cx="2752344" cy="1965960"/>
           </a:xfrm>
           <a:prstGeom prst="rect">
             <a:avLst/>
@@ -15349,81 +15064,22 @@
             <a:r>
               <a:rPr lang="en-US" sz="1600" dirty="0">
                 <a:solidFill>
-                  <a:srgbClr val="14161B"/>
-                </a:solidFill>
-                <a:latin typeface="Trade Gothic Next" pitchFamily="34" charset="0"/>
-                <a:ea typeface="Trade Gothic Next" pitchFamily="34" charset="-122"/>
-                <a:cs typeface="Trade Gothic Next" pitchFamily="34" charset="-120"/>
-              </a:rPr>
-              <a:t>Bigger drop: more energy, shorter wavelength.</a:t>
+                  <a:srgbClr val="EDF0E5"/>
+                </a:solidFill>
+                <a:latin typeface="Trade Gothic Next" pitchFamily="34" charset="0"/>
+                <a:ea typeface="Trade Gothic Next" pitchFamily="34" charset="-122"/>
+                <a:cs typeface="Trade Gothic Next" pitchFamily="34" charset="-120"/>
+              </a:rPr>
+              <a:t>Line positions identify an element.</a:t>
             </a:r>
             <a:endParaRPr lang="en-US" sz="1600" dirty="0"/>
           </a:p>
-        </p:txBody>
-      </p:sp>
-      <p:sp>
-        <p:nvSpPr>
-          <p:cNvPr id="7" name="Text 5"/>
-          <p:cNvSpPr txBox="1"/>
-          <p:nvPr>
-            <p:ph idx="111" type="body" hasCustomPrompt="1"/>
-          </p:nvPr>
-        </p:nvSpPr>
-        <p:spPr>
-          <a:xfrm>
-            <a:off x="6327648" y="3694176"/>
-            <a:ext cx="5129784" cy="219456"/>
-          </a:xfrm>
-          <a:prstGeom prst="rect">
-            <a:avLst/>
-          </a:prstGeom>
-          <a:noFill/>
-          <a:ln/>
-        </p:spPr>
-        <p:txBody>
-          <a:bodyPr wrap="square" lIns="0" tIns="0" rIns="0" bIns="0" rtlCol="0"/>
-          <a:lstStyle/>
-          <a:p>
-            <a:pPr indent="0" marL="0">
-              <a:buNone/>
-            </a:pPr>
-            <a:r>
-              <a:rPr lang="en-US" sz="1200" b="1" spc="120" kern="0" dirty="0">
-                <a:solidFill>
-                  <a:srgbClr val="2E3338"/>
-                </a:solidFill>
-                <a:latin typeface="Trade Gothic Next" pitchFamily="34" charset="0"/>
-                <a:ea typeface="Trade Gothic Next" pitchFamily="34" charset="-122"/>
-                <a:cs typeface="Trade Gothic Next" pitchFamily="34" charset="-120"/>
-              </a:rPr>
-              <a:t>CHECK</a:t>
-            </a:r>
-            <a:endParaRPr lang="en-US" sz="1200" dirty="0"/>
-          </a:p>
-        </p:txBody>
-      </p:sp>
-      <p:sp>
-        <p:nvSpPr>
-          <p:cNvPr id="8" name="Text 5"/>
-          <p:cNvSpPr txBox="1"/>
-          <p:nvPr>
-            <p:ph idx="112" type="body" hasCustomPrompt="1"/>
-          </p:nvPr>
-        </p:nvSpPr>
-        <p:spPr>
-          <a:xfrm>
-            <a:off x="6327648" y="3986784"/>
-            <a:ext cx="5129784" cy="329184"/>
-          </a:xfrm>
-          <a:prstGeom prst="rect">
-            <a:avLst/>
-          </a:prstGeom>
-          <a:noFill/>
-          <a:ln/>
-        </p:spPr>
-        <p:txBody>
-          <a:bodyPr wrap="square" lIns="0" tIns="0" rIns="0" bIns="0" rtlCol="0"/>
-          <a:lstStyle/>
+          <a:p>
+            <a:pPr indent="0" marL="0">
+              <a:buNone/>
+            </a:pPr>
+            <a:endParaRPr lang="en-US" sz="1600" dirty="0"/>
+          </a:p>
           <a:p>
             <a:pPr indent="0" marL="0">
               <a:buNone/>
@@ -15431,13 +15087,13 @@
             <a:r>
               <a:rPr lang="en-US" sz="1600" dirty="0">
                 <a:solidFill>
-                  <a:srgbClr val="14161B"/>
-                </a:solidFill>
-                <a:latin typeface="Trade Gothic Next" pitchFamily="34" charset="0"/>
-                <a:ea typeface="Trade Gothic Next" pitchFamily="34" charset="-122"/>
-                <a:cs typeface="Trade Gothic Next" pitchFamily="34" charset="-120"/>
-              </a:rPr>
-              <a:t>The first row is the example you just solved.</a:t>
+                  <a:srgbClr val="EDF0E5"/>
+                </a:solidFill>
+                <a:latin typeface="Trade Gothic Next" pitchFamily="34" charset="0"/>
+                <a:ea typeface="Trade Gothic Next" pitchFamily="34" charset="-122"/>
+                <a:cs typeface="Trade Gothic Next" pitchFamily="34" charset="-120"/>
+              </a:rPr>
+              <a:t>Helium was first found in sunlight, 1868.</a:t>
             </a:r>
             <a:endParaRPr lang="en-US" sz="1600" dirty="0"/>
           </a:p>
@@ -15445,48 +15101,7 @@
       </p:sp>
       <p:sp>
         <p:nvSpPr>
-          <p:cNvPr id="9" name="Text 6"/>
-          <p:cNvSpPr txBox="1"/>
-          <p:nvPr>
-            <p:ph idx="114" type="body" hasCustomPrompt="1"/>
-          </p:nvPr>
-        </p:nvSpPr>
-        <p:spPr>
-          <a:xfrm>
-            <a:off x="6327648" y="4828032"/>
-            <a:ext cx="5129784" cy="219456"/>
-          </a:xfrm>
-          <a:prstGeom prst="rect">
-            <a:avLst/>
-          </a:prstGeom>
-          <a:noFill/>
-          <a:ln/>
-        </p:spPr>
-        <p:txBody>
-          <a:bodyPr wrap="square" lIns="0" tIns="0" rIns="0" bIns="0" rtlCol="0"/>
-          <a:lstStyle/>
-          <a:p>
-            <a:pPr indent="0" marL="0">
-              <a:buNone/>
-            </a:pPr>
-            <a:r>
-              <a:rPr lang="en-US" sz="1200" b="1" spc="120" kern="0" dirty="0">
-                <a:solidFill>
-                  <a:srgbClr val="2E3338"/>
-                </a:solidFill>
-                <a:latin typeface="Trade Gothic Next" pitchFamily="34" charset="0"/>
-                <a:ea typeface="Trade Gothic Next" pitchFamily="34" charset="-122"/>
-                <a:cs typeface="Trade Gothic Next" pitchFamily="34" charset="-120"/>
-              </a:rPr>
-              <a:t>ΔE UNITS</a:t>
-            </a:r>
-            <a:endParaRPr lang="en-US" sz="1200" dirty="0"/>
-          </a:p>
-        </p:txBody>
-      </p:sp>
-      <p:sp>
-        <p:nvSpPr>
-          <p:cNvPr id="10" name="Text 6"/>
+          <p:cNvPr id="8" name="Text 7"/>
           <p:cNvSpPr txBox="1"/>
           <p:nvPr>
             <p:ph idx="115" type="body" hasCustomPrompt="1"/>
@@ -15494,32 +15109,32 @@
         </p:nvSpPr>
         <p:spPr>
           <a:xfrm>
-            <a:off x="6327648" y="5120640"/>
-            <a:ext cx="5129784" cy="320040"/>
-          </a:xfrm>
-          <a:prstGeom prst="rect">
-            <a:avLst/>
-          </a:prstGeom>
-          <a:noFill/>
-          <a:ln/>
-        </p:spPr>
-        <p:txBody>
-          <a:bodyPr wrap="square" lIns="0" tIns="0" rIns="0" bIns="0" rtlCol="0"/>
-          <a:lstStyle/>
-          <a:p>
-            <a:pPr indent="0" marL="0">
-              <a:buNone/>
-            </a:pPr>
-            <a:r>
-              <a:rPr lang="en-US" sz="1600" dirty="0">
-                <a:solidFill>
-                  <a:srgbClr val="14161B"/>
-                </a:solidFill>
-                <a:latin typeface="Trade Gothic Next" pitchFamily="34" charset="0"/>
-                <a:ea typeface="Trade Gothic Next" pitchFamily="34" charset="-122"/>
-                <a:cs typeface="Trade Gothic Next" pitchFamily="34" charset="-120"/>
-              </a:rPr>
-              <a:t>Joules, for one photon from one atom.</a:t>
+            <a:off x="2240280" y="5394960"/>
+            <a:ext cx="8991295" cy="402336"/>
+          </a:xfrm>
+          <a:prstGeom prst="rect">
+            <a:avLst/>
+          </a:prstGeom>
+          <a:noFill/>
+          <a:ln/>
+        </p:spPr>
+        <p:txBody>
+          <a:bodyPr wrap="square" lIns="0" tIns="0" rIns="0" bIns="0" rtlCol="0" anchor="ctr"/>
+          <a:lstStyle/>
+          <a:p>
+            <a:pPr indent="0" marL="0">
+              <a:buNone/>
+            </a:pPr>
+            <a:r>
+              <a:rPr lang="en-US" sz="1600" b="1" dirty="0">
+                <a:solidFill>
+                  <a:srgbClr val="EDF0E5"/>
+                </a:solidFill>
+                <a:latin typeface="Trade Gothic Next" pitchFamily="34" charset="0"/>
+                <a:ea typeface="Trade Gothic Next" pitchFamily="34" charset="-122"/>
+                <a:cs typeface="Trade Gothic Next" pitchFamily="34" charset="-120"/>
+              </a:rPr>
+              <a:t>Each element has a unique line spectrum because its energy levels are unique.</a:t>
             </a:r>
             <a:endParaRPr lang="en-US" sz="1600" dirty="0"/>
           </a:p>
@@ -15527,7 +15142,7 @@
       </p:sp>
       <p:sp>
         <p:nvSpPr>
-          <p:cNvPr id="11" name="Text 1"/>
+          <p:cNvPr id="9" name="Text 1"/>
           <p:cNvSpPr txBox="1"/>
           <p:nvPr>
             <p:ph idx="101" type="body" hasCustomPrompt="1"/>
@@ -15568,7 +15183,7 @@
       </p:sp>
       <p:sp>
         <p:nvSpPr>
-          <p:cNvPr id="12" name="Text 7"/>
+          <p:cNvPr id="10" name="Text 8"/>
           <p:cNvSpPr txBox="1"/>
           <p:nvPr>
             <p:ph idx="117" type="body" hasCustomPrompt="1"/>
@@ -15609,16 +15224,16 @@
       </p:sp>
       <p:sp>
         <p:nvSpPr>
-          <p:cNvPr id="14" name="Text 3"/>
-          <p:cNvSpPr txBox="1"/>
-          <p:nvPr>
-            <p:ph idx="106" type="body" hasCustomPrompt="1"/>
-          </p:nvPr>
-        </p:nvSpPr>
-        <p:spPr>
-          <a:xfrm>
-            <a:off x="914400" y="2651760"/>
-            <a:ext cx="4617720" cy="2743200"/>
+          <p:cNvPr id="12" name="Text 3"/>
+          <p:cNvSpPr txBox="1"/>
+          <p:nvPr>
+            <p:ph idx="106" hasCustomPrompt="1"/>
+          </p:nvPr>
+        </p:nvSpPr>
+        <p:spPr>
+          <a:xfrm>
+            <a:off x="685800" y="2377440"/>
+            <a:ext cx="4663440" cy="2624328"/>
           </a:xfrm>
           <a:prstGeom prst="rect">
             <a:avLst/>
@@ -15633,7 +15248,7 @@
             <a:pPr algn="ctr" indent="0" marL="0">
               <a:buNone/>
             </a:pPr>
-            <a:endParaRPr lang="en-US" sz="2000" dirty="0"/>
+            <a:endParaRPr lang="en-US" sz="1200" dirty="0"/>
           </a:p>
         </p:txBody>
       </p:sp>
@@ -15664,57 +15279,121 @@
       </p:grpSpPr>
       <p:sp>
         <p:nvSpPr>
-          <p:cNvPr id="2" name="Text 2"/>
-          <p:cNvSpPr txBox="1"/>
-          <p:nvPr>
-            <p:ph idx="103" type="title" hasCustomPrompt="1"/>
-          </p:nvPr>
-        </p:nvSpPr>
-        <p:spPr>
-          <a:xfrm>
-            <a:off x="685800" y="932688"/>
-            <a:ext cx="10820095" cy="868680"/>
-          </a:xfrm>
-          <a:prstGeom prst="rect">
-            <a:avLst/>
-          </a:prstGeom>
-          <a:noFill/>
-          <a:ln/>
-        </p:spPr>
-        <p:txBody>
-          <a:bodyPr wrap="square" lIns="0" tIns="0" rIns="0" bIns="0" rtlCol="0" anchor="t"/>
+          <p:cNvPr id="2" name="Text 5"/>
+          <p:cNvSpPr txBox="1"/>
+          <p:nvPr>
+            <p:ph idx="106" type="body" hasCustomPrompt="1"/>
+          </p:nvPr>
+        </p:nvSpPr>
+        <p:spPr>
+          <a:xfrm>
+            <a:off x="841248" y="1755648"/>
+            <a:ext cx="3154680" cy="457200"/>
+          </a:xfrm>
+          <a:prstGeom prst="rect">
+            <a:avLst/>
+          </a:prstGeom>
+          <a:noFill/>
+          <a:ln/>
+        </p:spPr>
+        <p:txBody>
+          <a:bodyPr wrap="square" lIns="0" tIns="0" rIns="0" bIns="0" rtlCol="0"/>
+          <a:lstStyle/>
+          <a:p>
+            <a:pPr indent="0" marL="0">
+              <a:buNone/>
+            </a:pPr>
+            <a:r>
+              <a:rPr lang="en-US" sz="1100" b="1" spc="150" kern="0" dirty="0">
+                <a:solidFill>
+                  <a:srgbClr val="A3E635"/>
+                </a:solidFill>
+                <a:latin typeface="Trade Gothic Next" pitchFamily="34" charset="0"/>
+                <a:ea typeface="Trade Gothic Next" pitchFamily="34" charset="-122"/>
+                <a:cs typeface="Trade Gothic Next" pitchFamily="34" charset="-120"/>
+              </a:rPr>
+              <a:t>FLAME TESTS</a:t>
+            </a:r>
+            <a:endParaRPr lang="en-US" sz="1100" dirty="0"/>
+          </a:p>
+        </p:txBody>
+      </p:sp>
+      <p:sp>
+        <p:nvSpPr>
+          <p:cNvPr id="3" name="Text 5"/>
+          <p:cNvSpPr txBox="1"/>
+          <p:nvPr>
+            <p:ph idx="107" type="title" hasCustomPrompt="1"/>
+          </p:nvPr>
+        </p:nvSpPr>
+        <p:spPr>
+          <a:xfrm>
+            <a:off x="841248" y="2304288"/>
+            <a:ext cx="3154680" cy="1417320"/>
+          </a:xfrm>
+          <a:prstGeom prst="rect">
+            <a:avLst/>
+          </a:prstGeom>
+          <a:noFill/>
+          <a:ln/>
+        </p:spPr>
+        <p:txBody>
+          <a:bodyPr wrap="square" lIns="0" tIns="0" rIns="0" bIns="0" rtlCol="0"/>
           <a:lstStyle/>
           <a:p>
             <a:pPr algn="l" indent="0" marL="0">
-              <a:buNone/>
-            </a:pPr>
-            <a:r>
-              <a:rPr lang="en-US" sz="2800" b="1" dirty="0">
-                <a:solidFill>
-                  <a:srgbClr val="14161B"/>
-                </a:solidFill>
-                <a:latin typeface="Trade Gothic Next" pitchFamily="34" charset="0"/>
-                <a:ea typeface="Trade Gothic Next" pitchFamily="34" charset="-122"/>
-                <a:cs typeface="Trade Gothic Next" pitchFamily="34" charset="-120"/>
-              </a:rPr>
-              <a:t>Every Element Has Its Own Lines</a:t>
-            </a:r>
-            <a:endParaRPr lang="en-US" sz="2800" dirty="0"/>
-          </a:p>
-        </p:txBody>
-      </p:sp>
-      <p:sp>
-        <p:nvSpPr>
-          <p:cNvPr id="3" name="Text 2"/>
-          <p:cNvSpPr txBox="1"/>
-          <p:nvPr>
-            <p:ph idx="104" type="body" hasCustomPrompt="1"/>
-          </p:nvPr>
-        </p:nvSpPr>
-        <p:spPr>
-          <a:xfrm>
-            <a:off x="685800" y="1847088"/>
-            <a:ext cx="10820095" cy="384048"/>
+              <a:lnSpc>
+                <a:spcPct val="108000"/>
+              </a:lnSpc>
+              <a:buNone/>
+            </a:pPr>
+            <a:r>
+              <a:rPr lang="en-US" sz="2600" b="1" dirty="0">
+                <a:solidFill>
+                  <a:srgbClr val="EDF0E5"/>
+                </a:solidFill>
+                <a:latin typeface="Trade Gothic Next" pitchFamily="34" charset="0"/>
+                <a:ea typeface="Trade Gothic Next" pitchFamily="34" charset="-122"/>
+                <a:cs typeface="Trade Gothic Next" pitchFamily="34" charset="-120"/>
+              </a:rPr>
+              <a:t>Same Idea,</a:t>
+            </a:r>
+            <a:endParaRPr lang="en-US" sz="2600" dirty="0"/>
+          </a:p>
+          <a:p>
+            <a:pPr algn="l" indent="0" marL="0">
+              <a:lnSpc>
+                <a:spcPct val="108000"/>
+              </a:lnSpc>
+              <a:buNone/>
+            </a:pPr>
+            <a:r>
+              <a:rPr lang="en-US" sz="2600" b="1" dirty="0">
+                <a:solidFill>
+                  <a:srgbClr val="EDF0E5"/>
+                </a:solidFill>
+                <a:latin typeface="Trade Gothic Next" pitchFamily="34" charset="0"/>
+                <a:ea typeface="Trade Gothic Next" pitchFamily="34" charset="-122"/>
+                <a:cs typeface="Trade Gothic Next" pitchFamily="34" charset="-120"/>
+              </a:rPr>
+              <a:t>In a Flame</a:t>
+            </a:r>
+            <a:endParaRPr lang="en-US" sz="2600" dirty="0"/>
+          </a:p>
+        </p:txBody>
+      </p:sp>
+      <p:sp>
+        <p:nvSpPr>
+          <p:cNvPr id="4" name="Text 5"/>
+          <p:cNvSpPr txBox="1"/>
+          <p:nvPr>
+            <p:ph idx="108" type="body" hasCustomPrompt="1"/>
+          </p:nvPr>
+        </p:nvSpPr>
+        <p:spPr>
+          <a:xfrm>
+            <a:off x="841248" y="3858768"/>
+            <a:ext cx="3154680" cy="1097280"/>
           </a:xfrm>
           <a:prstGeom prst="rect">
             <a:avLst/>
@@ -15730,318 +15409,26 @@
               <a:buNone/>
             </a:pPr>
             <a:r>
-              <a:rPr lang="en-US" sz="1700" dirty="0">
-                <a:solidFill>
-                  <a:srgbClr val="2E3338"/>
-                </a:solidFill>
-                <a:latin typeface="Trade Gothic Next" pitchFamily="34" charset="0"/>
-                <a:ea typeface="Trade Gothic Next" pitchFamily="34" charset="-122"/>
-                <a:cs typeface="Trade Gothic Next" pitchFamily="34" charset="-120"/>
-              </a:rPr>
-              <a:t>Only certain energy drops exist, so only certain lines appear.</a:t>
-            </a:r>
-            <a:endParaRPr lang="en-US" sz="1700" dirty="0"/>
-          </a:p>
-        </p:txBody>
-      </p:sp>
-      <p:sp>
-        <p:nvSpPr>
-          <p:cNvPr id="4" name="Text 4"/>
-          <p:cNvSpPr txBox="1"/>
-          <p:nvPr>
-            <p:ph idx="108" type="body" hasCustomPrompt="1"/>
-          </p:nvPr>
-        </p:nvSpPr>
-        <p:spPr>
-          <a:xfrm>
-            <a:off x="5733288" y="2542032"/>
-            <a:ext cx="2752344" cy="219456"/>
-          </a:xfrm>
-          <a:prstGeom prst="rect">
-            <a:avLst/>
-          </a:prstGeom>
-          <a:noFill/>
-          <a:ln/>
-        </p:spPr>
-        <p:txBody>
-          <a:bodyPr wrap="square" lIns="0" tIns="0" rIns="0" bIns="0" rtlCol="0"/>
-          <a:lstStyle/>
-          <a:p>
-            <a:pPr indent="0" marL="0">
-              <a:buNone/>
-            </a:pPr>
-            <a:r>
-              <a:rPr lang="en-US" sz="1200" b="1" spc="120" kern="0" dirty="0">
-                <a:solidFill>
-                  <a:srgbClr val="2E3338"/>
-                </a:solidFill>
-                <a:latin typeface="Trade Gothic Next" pitchFamily="34" charset="0"/>
-                <a:ea typeface="Trade Gothic Next" pitchFamily="34" charset="-122"/>
-                <a:cs typeface="Trade Gothic Next" pitchFamily="34" charset="-120"/>
-              </a:rPr>
-              <a:t>UNIQUE LEVELS</a:t>
-            </a:r>
-            <a:endParaRPr lang="en-US" sz="1200" dirty="0"/>
-          </a:p>
-        </p:txBody>
-      </p:sp>
-      <p:sp>
-        <p:nvSpPr>
-          <p:cNvPr id="5" name="Text 4"/>
-          <p:cNvSpPr txBox="1"/>
-          <p:nvPr>
-            <p:ph idx="109" type="body" hasCustomPrompt="1"/>
-          </p:nvPr>
-        </p:nvSpPr>
-        <p:spPr>
-          <a:xfrm>
-            <a:off x="5733288" y="2834640"/>
-            <a:ext cx="2752344" cy="1965960"/>
-          </a:xfrm>
-          <a:prstGeom prst="rect">
-            <a:avLst/>
-          </a:prstGeom>
-          <a:noFill/>
-          <a:ln/>
-        </p:spPr>
-        <p:txBody>
-          <a:bodyPr wrap="square" lIns="0" tIns="0" rIns="0" bIns="0" rtlCol="0"/>
-          <a:lstStyle/>
-          <a:p>
-            <a:pPr indent="0" marL="0">
-              <a:buNone/>
-            </a:pPr>
-            <a:r>
               <a:rPr lang="en-US" sz="1600" dirty="0">
                 <a:solidFill>
-                  <a:srgbClr val="14161B"/>
-                </a:solidFill>
-                <a:latin typeface="Trade Gothic Next" pitchFamily="34" charset="0"/>
-                <a:ea typeface="Trade Gothic Next" pitchFamily="34" charset="-122"/>
-                <a:cs typeface="Trade Gothic Next" pitchFamily="34" charset="-120"/>
-              </a:rPr>
-              <a:t>Each element has its own energy levels.</a:t>
+                  <a:srgbClr val="BDB6AA"/>
+                </a:solidFill>
+                <a:latin typeface="Trade Gothic Next" pitchFamily="34" charset="0"/>
+                <a:ea typeface="Trade Gothic Next" pitchFamily="34" charset="-122"/>
+                <a:cs typeface="Trade Gothic Next" pitchFamily="34" charset="-120"/>
+              </a:rPr>
+              <a:t>Metal ions in a flame emit light too. The color helps you identify the metal.</a:t>
             </a:r>
             <a:endParaRPr lang="en-US" sz="1600" dirty="0"/>
           </a:p>
-          <a:p>
-            <a:pPr indent="0" marL="0">
-              <a:buNone/>
-            </a:pPr>
-            <a:endParaRPr lang="en-US" sz="1600" dirty="0"/>
-          </a:p>
-          <a:p>
-            <a:pPr indent="0" marL="0">
-              <a:buNone/>
-            </a:pPr>
-            <a:r>
-              <a:rPr lang="en-US" sz="1600" dirty="0">
-                <a:solidFill>
-                  <a:srgbClr val="14161B"/>
-                </a:solidFill>
-                <a:latin typeface="Trade Gothic Next" pitchFamily="34" charset="0"/>
-                <a:ea typeface="Trade Gothic Next" pitchFamily="34" charset="-122"/>
-                <a:cs typeface="Trade Gothic Next" pitchFamily="34" charset="-120"/>
-              </a:rPr>
-              <a:t>So its drops, and its lines, are its own.</a:t>
-            </a:r>
-            <a:endParaRPr lang="en-US" sz="1600" dirty="0"/>
-          </a:p>
-        </p:txBody>
-      </p:sp>
-      <p:sp>
-        <p:nvSpPr>
-          <p:cNvPr id="6" name="Text 5"/>
-          <p:cNvSpPr txBox="1"/>
-          <p:nvPr>
-            <p:ph idx="111" type="body" hasCustomPrompt="1"/>
-          </p:nvPr>
-        </p:nvSpPr>
-        <p:spPr>
-          <a:xfrm>
-            <a:off x="9116568" y="2542032"/>
-            <a:ext cx="2752344" cy="219456"/>
-          </a:xfrm>
-          <a:prstGeom prst="rect">
-            <a:avLst/>
-          </a:prstGeom>
-          <a:noFill/>
-          <a:ln/>
-        </p:spPr>
-        <p:txBody>
-          <a:bodyPr wrap="square" lIns="0" tIns="0" rIns="0" bIns="0" rtlCol="0"/>
-          <a:lstStyle/>
-          <a:p>
-            <a:pPr indent="0" marL="0">
-              <a:buNone/>
-            </a:pPr>
-            <a:r>
-              <a:rPr lang="en-US" sz="1200" b="1" spc="120" kern="0" dirty="0">
-                <a:solidFill>
-                  <a:srgbClr val="BDB6AA"/>
-                </a:solidFill>
-                <a:latin typeface="Trade Gothic Next" pitchFamily="34" charset="0"/>
-                <a:ea typeface="Trade Gothic Next" pitchFamily="34" charset="-122"/>
-                <a:cs typeface="Trade Gothic Next" pitchFamily="34" charset="-120"/>
-              </a:rPr>
-              <a:t>A FINGERPRINT</a:t>
-            </a:r>
-            <a:endParaRPr lang="en-US" sz="1200" dirty="0"/>
-          </a:p>
-        </p:txBody>
-      </p:sp>
-      <p:sp>
-        <p:nvSpPr>
-          <p:cNvPr id="7" name="Text 5"/>
-          <p:cNvSpPr txBox="1"/>
-          <p:nvPr>
-            <p:ph idx="112" type="body" hasCustomPrompt="1"/>
-          </p:nvPr>
-        </p:nvSpPr>
-        <p:spPr>
-          <a:xfrm>
-            <a:off x="9116568" y="2834640"/>
-            <a:ext cx="2752344" cy="1965960"/>
-          </a:xfrm>
-          <a:prstGeom prst="rect">
-            <a:avLst/>
-          </a:prstGeom>
-          <a:noFill/>
-          <a:ln/>
-        </p:spPr>
-        <p:txBody>
-          <a:bodyPr wrap="square" lIns="0" tIns="0" rIns="0" bIns="0" rtlCol="0"/>
-          <a:lstStyle/>
-          <a:p>
-            <a:pPr indent="0" marL="0">
-              <a:buNone/>
-            </a:pPr>
-            <a:r>
-              <a:rPr lang="en-US" sz="1600" dirty="0">
-                <a:solidFill>
-                  <a:srgbClr val="EDF0E5"/>
-                </a:solidFill>
-                <a:latin typeface="Trade Gothic Next" pitchFamily="34" charset="0"/>
-                <a:ea typeface="Trade Gothic Next" pitchFamily="34" charset="-122"/>
-                <a:cs typeface="Trade Gothic Next" pitchFamily="34" charset="-120"/>
-              </a:rPr>
-              <a:t>Line positions identify an element.</a:t>
-            </a:r>
-            <a:endParaRPr lang="en-US" sz="1600" dirty="0"/>
-          </a:p>
-          <a:p>
-            <a:pPr indent="0" marL="0">
-              <a:buNone/>
-            </a:pPr>
-            <a:endParaRPr lang="en-US" sz="1600" dirty="0"/>
-          </a:p>
-          <a:p>
-            <a:pPr indent="0" marL="0">
-              <a:buNone/>
-            </a:pPr>
-            <a:r>
-              <a:rPr lang="en-US" sz="1600" dirty="0">
-                <a:solidFill>
-                  <a:srgbClr val="EDF0E5"/>
-                </a:solidFill>
-                <a:latin typeface="Trade Gothic Next" pitchFamily="34" charset="0"/>
-                <a:ea typeface="Trade Gothic Next" pitchFamily="34" charset="-122"/>
-                <a:cs typeface="Trade Gothic Next" pitchFamily="34" charset="-120"/>
-              </a:rPr>
-              <a:t>Helium was first found in sunlight, 1868.</a:t>
-            </a:r>
-            <a:endParaRPr lang="en-US" sz="1600" dirty="0"/>
-          </a:p>
-        </p:txBody>
-      </p:sp>
-      <p:sp>
-        <p:nvSpPr>
-          <p:cNvPr id="8" name="Text 7"/>
-          <p:cNvSpPr txBox="1"/>
-          <p:nvPr>
-            <p:ph idx="115" type="body" hasCustomPrompt="1"/>
-          </p:nvPr>
-        </p:nvSpPr>
-        <p:spPr>
-          <a:xfrm>
-            <a:off x="2240280" y="5394960"/>
-            <a:ext cx="8991295" cy="402336"/>
-          </a:xfrm>
-          <a:prstGeom prst="rect">
-            <a:avLst/>
-          </a:prstGeom>
-          <a:noFill/>
-          <a:ln/>
-        </p:spPr>
-        <p:txBody>
-          <a:bodyPr wrap="square" lIns="0" tIns="0" rIns="0" bIns="0" rtlCol="0" anchor="ctr"/>
-          <a:lstStyle/>
-          <a:p>
-            <a:pPr indent="0" marL="0">
-              <a:buNone/>
-            </a:pPr>
-            <a:r>
-              <a:rPr lang="en-US" sz="1600" b="1" dirty="0">
-                <a:solidFill>
-                  <a:srgbClr val="EDF0E5"/>
-                </a:solidFill>
-                <a:latin typeface="Trade Gothic Next" pitchFamily="34" charset="0"/>
-                <a:ea typeface="Trade Gothic Next" pitchFamily="34" charset="-122"/>
-                <a:cs typeface="Trade Gothic Next" pitchFamily="34" charset="-120"/>
-              </a:rPr>
-              <a:t>Each element has a unique line spectrum because its energy levels are unique.</a:t>
-            </a:r>
-            <a:endParaRPr lang="en-US" sz="1600" dirty="0"/>
-          </a:p>
-        </p:txBody>
-      </p:sp>
-      <p:sp>
-        <p:nvSpPr>
-          <p:cNvPr id="9" name="Text 1"/>
-          <p:cNvSpPr txBox="1"/>
-          <p:nvPr>
-            <p:ph idx="101" type="body" hasCustomPrompt="1"/>
-          </p:nvPr>
-        </p:nvSpPr>
-        <p:spPr>
-          <a:xfrm>
-            <a:off x="685800" y="384048"/>
-            <a:ext cx="6400800" cy="237744"/>
-          </a:xfrm>
-          <a:prstGeom prst="rect">
-            <a:avLst/>
-          </a:prstGeom>
-          <a:noFill/>
-          <a:ln/>
-        </p:spPr>
-        <p:txBody>
-          <a:bodyPr wrap="square" lIns="0" tIns="0" rIns="0" bIns="0" rtlCol="0" anchor="ctr"/>
-          <a:lstStyle/>
-          <a:p>
-            <a:pPr indent="0" marL="0">
-              <a:buNone/>
-            </a:pPr>
-            <a:r>
-              <a:rPr lang="en-US" sz="1100" b="1" spc="160" kern="0" dirty="0">
-                <a:solidFill>
-                  <a:srgbClr val="14161B"/>
-                </a:solidFill>
-                <a:latin typeface="Trade Gothic Next" pitchFamily="34" charset="0"/>
-                <a:ea typeface="Trade Gothic Next" pitchFamily="34" charset="-122"/>
-                <a:cs typeface="Trade Gothic Next" pitchFamily="34" charset="-120"/>
-              </a:rPr>
-              <a:t>UNIT 02  •  CHEMISTRY</a:t>
-            </a:r>
-            <a:endParaRPr lang="en-US" sz="1100" dirty="0"/>
-          </a:p>
-        </p:txBody>
-      </p:sp>
-      <p:sp>
-        <p:nvSpPr>
-          <p:cNvPr id="10" name="Text 8"/>
-          <p:cNvSpPr txBox="1"/>
-          <p:nvPr>
-            <p:ph idx="117" type="body" hasCustomPrompt="1"/>
+        </p:txBody>
+      </p:sp>
+      <p:sp>
+        <p:nvSpPr>
+          <p:cNvPr id="5" name="Text 6"/>
+          <p:cNvSpPr txBox="1"/>
+          <p:nvPr>
+            <p:ph idx="110" type="body" hasCustomPrompt="1"/>
           </p:nvPr>
         </p:nvSpPr>
         <p:spPr>
@@ -16065,7 +15452,7 @@
             <a:r>
               <a:rPr lang="en-US" sz="1000" b="1" spc="140" kern="0" dirty="0">
                 <a:solidFill>
-                  <a:srgbClr val="2E3338"/>
+                  <a:srgbClr val="BDB6AA"/>
                 </a:solidFill>
                 <a:latin typeface="Trade Gothic Next" pitchFamily="34" charset="0"/>
                 <a:ea typeface="Trade Gothic Next" pitchFamily="34" charset="-122"/>
@@ -16079,16 +15466,16 @@
       </p:sp>
       <p:sp>
         <p:nvSpPr>
-          <p:cNvPr id="12" name="Text 3"/>
-          <p:cNvSpPr txBox="1"/>
-          <p:nvPr>
-            <p:ph idx="106" hasCustomPrompt="1"/>
-          </p:nvPr>
-        </p:nvSpPr>
-        <p:spPr>
-          <a:xfrm>
-            <a:off x="685800" y="2377440"/>
-            <a:ext cx="4663440" cy="2624328"/>
+          <p:cNvPr id="7" name="Text 2"/>
+          <p:cNvSpPr txBox="1"/>
+          <p:nvPr>
+            <p:ph idx="102" hasCustomPrompt="1"/>
+          </p:nvPr>
+        </p:nvSpPr>
+        <p:spPr>
+          <a:xfrm>
+            <a:off x="2926080" y="0"/>
+            <a:ext cx="9262872" cy="6858000"/>
           </a:xfrm>
           <a:prstGeom prst="rect">
             <a:avLst/>
@@ -16134,16 +15521,57 @@
       </p:grpSpPr>
       <p:sp>
         <p:nvSpPr>
-          <p:cNvPr id="2" name="Text 5"/>
-          <p:cNvSpPr txBox="1"/>
-          <p:nvPr>
-            <p:ph idx="106" type="body" hasCustomPrompt="1"/>
-          </p:nvPr>
-        </p:nvSpPr>
-        <p:spPr>
-          <a:xfrm>
-            <a:off x="841248" y="1755648"/>
-            <a:ext cx="3154680" cy="457200"/>
+          <p:cNvPr id="2" name="Text 2"/>
+          <p:cNvSpPr txBox="1"/>
+          <p:nvPr>
+            <p:ph idx="103" type="title" hasCustomPrompt="1"/>
+          </p:nvPr>
+        </p:nvSpPr>
+        <p:spPr>
+          <a:xfrm>
+            <a:off x="685800" y="932688"/>
+            <a:ext cx="10820095" cy="868680"/>
+          </a:xfrm>
+          <a:prstGeom prst="rect">
+            <a:avLst/>
+          </a:prstGeom>
+          <a:noFill/>
+          <a:ln/>
+        </p:spPr>
+        <p:txBody>
+          <a:bodyPr wrap="square" lIns="0" tIns="0" rIns="0" bIns="0" rtlCol="0" anchor="t"/>
+          <a:lstStyle/>
+          <a:p>
+            <a:pPr algn="l" indent="0" marL="0">
+              <a:buNone/>
+            </a:pPr>
+            <a:r>
+              <a:rPr lang="en-US" sz="2800" b="1" dirty="0">
+                <a:solidFill>
+                  <a:srgbClr val="14161B"/>
+                </a:solidFill>
+                <a:latin typeface="Trade Gothic Next" pitchFamily="34" charset="0"/>
+                <a:ea typeface="Trade Gothic Next" pitchFamily="34" charset="-122"/>
+                <a:cs typeface="Trade Gothic Next" pitchFamily="34" charset="-120"/>
+              </a:rPr>
+              <a:t>How a Flame Test Makes Color</a:t>
+            </a:r>
+            <a:endParaRPr lang="en-US" sz="2800" dirty="0"/>
+          </a:p>
+        </p:txBody>
+      </p:sp>
+      <p:sp>
+        <p:nvSpPr>
+          <p:cNvPr id="3" name="Text 2"/>
+          <p:cNvSpPr txBox="1"/>
+          <p:nvPr>
+            <p:ph idx="104" type="body" hasCustomPrompt="1"/>
+          </p:nvPr>
+        </p:nvSpPr>
+        <p:spPr>
+          <a:xfrm>
+            <a:off x="685800" y="1847088"/>
+            <a:ext cx="10820095" cy="384048"/>
           </a:xfrm>
           <a:prstGeom prst="rect">
             <a:avLst/>
@@ -16159,15 +15587,261 @@
               <a:buNone/>
             </a:pPr>
             <a:r>
-              <a:rPr lang="en-US" sz="1100" b="1" spc="150" kern="0" dirty="0">
-                <a:solidFill>
-                  <a:srgbClr val="A3E635"/>
-                </a:solidFill>
-                <a:latin typeface="Trade Gothic Next" pitchFamily="34" charset="0"/>
-                <a:ea typeface="Trade Gothic Next" pitchFamily="34" charset="-122"/>
-                <a:cs typeface="Trade Gothic Next" pitchFamily="34" charset="-120"/>
-              </a:rPr>
-              <a:t>FLAME TESTS</a:t>
+              <a:rPr lang="en-US" sz="1700" dirty="0">
+                <a:solidFill>
+                  <a:srgbClr val="2E3338"/>
+                </a:solidFill>
+                <a:latin typeface="Trade Gothic Next" pitchFamily="34" charset="0"/>
+                <a:ea typeface="Trade Gothic Next" pitchFamily="34" charset="-122"/>
+                <a:cs typeface="Trade Gothic Next" pitchFamily="34" charset="-120"/>
+              </a:rPr>
+              <a:t>The color is not the metal burning. It is electrons dropping levels.</a:t>
+            </a:r>
+            <a:endParaRPr lang="en-US" sz="1700" dirty="0"/>
+          </a:p>
+        </p:txBody>
+      </p:sp>
+      <p:sp>
+        <p:nvSpPr>
+          <p:cNvPr id="4" name="Text 4"/>
+          <p:cNvSpPr txBox="1"/>
+          <p:nvPr>
+            <p:ph idx="108" type="body" hasCustomPrompt="1"/>
+          </p:nvPr>
+        </p:nvSpPr>
+        <p:spPr>
+          <a:xfrm>
+            <a:off x="5733288" y="2542032"/>
+            <a:ext cx="2752344" cy="219456"/>
+          </a:xfrm>
+          <a:prstGeom prst="rect">
+            <a:avLst/>
+          </a:prstGeom>
+          <a:noFill/>
+          <a:ln/>
+        </p:spPr>
+        <p:txBody>
+          <a:bodyPr wrap="square" lIns="0" tIns="0" rIns="0" bIns="0" rtlCol="0"/>
+          <a:lstStyle/>
+          <a:p>
+            <a:pPr indent="0" marL="0">
+              <a:buNone/>
+            </a:pPr>
+            <a:r>
+              <a:rPr lang="en-US" sz="1200" b="1" spc="120" kern="0" dirty="0">
+                <a:solidFill>
+                  <a:srgbClr val="2E3338"/>
+                </a:solidFill>
+                <a:latin typeface="Trade Gothic Next" pitchFamily="34" charset="0"/>
+                <a:ea typeface="Trade Gothic Next" pitchFamily="34" charset="-122"/>
+                <a:cs typeface="Trade Gothic Next" pitchFamily="34" charset="-120"/>
+              </a:rPr>
+              <a:t>IN THE FLAME</a:t>
+            </a:r>
+            <a:endParaRPr lang="en-US" sz="1200" dirty="0"/>
+          </a:p>
+        </p:txBody>
+      </p:sp>
+      <p:sp>
+        <p:nvSpPr>
+          <p:cNvPr id="5" name="Text 4"/>
+          <p:cNvSpPr txBox="1"/>
+          <p:nvPr>
+            <p:ph idx="109" type="body" hasCustomPrompt="1"/>
+          </p:nvPr>
+        </p:nvSpPr>
+        <p:spPr>
+          <a:xfrm>
+            <a:off x="5733288" y="2834640"/>
+            <a:ext cx="2752344" cy="1965960"/>
+          </a:xfrm>
+          <a:prstGeom prst="rect">
+            <a:avLst/>
+          </a:prstGeom>
+          <a:noFill/>
+          <a:ln/>
+        </p:spPr>
+        <p:txBody>
+          <a:bodyPr wrap="square" lIns="0" tIns="0" rIns="0" bIns="0" rtlCol="0"/>
+          <a:lstStyle/>
+          <a:p>
+            <a:pPr indent="0" marL="0">
+              <a:buNone/>
+            </a:pPr>
+            <a:r>
+              <a:rPr lang="en-US" sz="1600" dirty="0">
+                <a:solidFill>
+                  <a:srgbClr val="14161B"/>
+                </a:solidFill>
+                <a:latin typeface="Trade Gothic Next" pitchFamily="34" charset="0"/>
+                <a:ea typeface="Trade Gothic Next" pitchFamily="34" charset="-122"/>
+                <a:cs typeface="Trade Gothic Next" pitchFamily="34" charset="-120"/>
+              </a:rPr>
+              <a:t>Heat lifts electrons in the metal ion to higher levels.</a:t>
+            </a:r>
+            <a:endParaRPr lang="en-US" sz="1600" dirty="0"/>
+          </a:p>
+        </p:txBody>
+      </p:sp>
+      <p:sp>
+        <p:nvSpPr>
+          <p:cNvPr id="6" name="Text 5"/>
+          <p:cNvSpPr txBox="1"/>
+          <p:nvPr>
+            <p:ph idx="111" type="body" hasCustomPrompt="1"/>
+          </p:nvPr>
+        </p:nvSpPr>
+        <p:spPr>
+          <a:xfrm>
+            <a:off x="9116568" y="2542032"/>
+            <a:ext cx="2752344" cy="219456"/>
+          </a:xfrm>
+          <a:prstGeom prst="rect">
+            <a:avLst/>
+          </a:prstGeom>
+          <a:noFill/>
+          <a:ln/>
+        </p:spPr>
+        <p:txBody>
+          <a:bodyPr wrap="square" lIns="0" tIns="0" rIns="0" bIns="0" rtlCol="0"/>
+          <a:lstStyle/>
+          <a:p>
+            <a:pPr indent="0" marL="0">
+              <a:buNone/>
+            </a:pPr>
+            <a:r>
+              <a:rPr lang="en-US" sz="1200" b="1" spc="120" kern="0" dirty="0">
+                <a:solidFill>
+                  <a:srgbClr val="BDB6AA"/>
+                </a:solidFill>
+                <a:latin typeface="Trade Gothic Next" pitchFamily="34" charset="0"/>
+                <a:ea typeface="Trade Gothic Next" pitchFamily="34" charset="-122"/>
+                <a:cs typeface="Trade Gothic Next" pitchFamily="34" charset="-120"/>
+              </a:rPr>
+              <a:t>AS THEY DROP</a:t>
+            </a:r>
+            <a:endParaRPr lang="en-US" sz="1200" dirty="0"/>
+          </a:p>
+        </p:txBody>
+      </p:sp>
+      <p:sp>
+        <p:nvSpPr>
+          <p:cNvPr id="7" name="Text 5"/>
+          <p:cNvSpPr txBox="1"/>
+          <p:nvPr>
+            <p:ph idx="112" type="body" hasCustomPrompt="1"/>
+          </p:nvPr>
+        </p:nvSpPr>
+        <p:spPr>
+          <a:xfrm>
+            <a:off x="9116568" y="2834640"/>
+            <a:ext cx="2752344" cy="1965960"/>
+          </a:xfrm>
+          <a:prstGeom prst="rect">
+            <a:avLst/>
+          </a:prstGeom>
+          <a:noFill/>
+          <a:ln/>
+        </p:spPr>
+        <p:txBody>
+          <a:bodyPr wrap="square" lIns="0" tIns="0" rIns="0" bIns="0" rtlCol="0"/>
+          <a:lstStyle/>
+          <a:p>
+            <a:pPr indent="0" marL="0">
+              <a:buNone/>
+            </a:pPr>
+            <a:r>
+              <a:rPr lang="en-US" sz="1600" dirty="0">
+                <a:solidFill>
+                  <a:srgbClr val="EDF0E5"/>
+                </a:solidFill>
+                <a:latin typeface="Trade Gothic Next" pitchFamily="34" charset="0"/>
+                <a:ea typeface="Trade Gothic Next" pitchFamily="34" charset="-122"/>
+                <a:cs typeface="Trade Gothic Next" pitchFamily="34" charset="-120"/>
+              </a:rPr>
+              <a:t>They release photons of visible light. The color helps identify the metal.</a:t>
+            </a:r>
+            <a:endParaRPr lang="en-US" sz="1600" dirty="0"/>
+          </a:p>
+        </p:txBody>
+      </p:sp>
+      <p:sp>
+        <p:nvSpPr>
+          <p:cNvPr id="8" name="Text 7"/>
+          <p:cNvSpPr txBox="1"/>
+          <p:nvPr>
+            <p:ph idx="115" type="body" hasCustomPrompt="1"/>
+          </p:nvPr>
+        </p:nvSpPr>
+        <p:spPr>
+          <a:xfrm>
+            <a:off x="2240280" y="5394960"/>
+            <a:ext cx="8991295" cy="402336"/>
+          </a:xfrm>
+          <a:prstGeom prst="rect">
+            <a:avLst/>
+          </a:prstGeom>
+          <a:noFill/>
+          <a:ln/>
+        </p:spPr>
+        <p:txBody>
+          <a:bodyPr wrap="square" lIns="0" tIns="0" rIns="0" bIns="0" rtlCol="0" anchor="ctr"/>
+          <a:lstStyle/>
+          <a:p>
+            <a:pPr indent="0" marL="0">
+              <a:buNone/>
+            </a:pPr>
+            <a:r>
+              <a:rPr lang="en-US" sz="1600" b="1" dirty="0">
+                <a:solidFill>
+                  <a:srgbClr val="EDF0E5"/>
+                </a:solidFill>
+                <a:latin typeface="Trade Gothic Next" pitchFamily="34" charset="0"/>
+                <a:ea typeface="Trade Gothic Next" pitchFamily="34" charset="-122"/>
+                <a:cs typeface="Trade Gothic Next" pitchFamily="34" charset="-120"/>
+              </a:rPr>
+              <a:t>The color of the emitted light helps identify the metal ion.</a:t>
+            </a:r>
+            <a:endParaRPr lang="en-US" sz="1600" dirty="0"/>
+          </a:p>
+        </p:txBody>
+      </p:sp>
+      <p:sp>
+        <p:nvSpPr>
+          <p:cNvPr id="9" name="Text 1"/>
+          <p:cNvSpPr txBox="1"/>
+          <p:nvPr>
+            <p:ph idx="101" type="body" hasCustomPrompt="1"/>
+          </p:nvPr>
+        </p:nvSpPr>
+        <p:spPr>
+          <a:xfrm>
+            <a:off x="685800" y="384048"/>
+            <a:ext cx="6400800" cy="237744"/>
+          </a:xfrm>
+          <a:prstGeom prst="rect">
+            <a:avLst/>
+          </a:prstGeom>
+          <a:noFill/>
+          <a:ln/>
+        </p:spPr>
+        <p:txBody>
+          <a:bodyPr wrap="square" lIns="0" tIns="0" rIns="0" bIns="0" rtlCol="0" anchor="ctr"/>
+          <a:lstStyle/>
+          <a:p>
+            <a:pPr indent="0" marL="0">
+              <a:buNone/>
+            </a:pPr>
+            <a:r>
+              <a:rPr lang="en-US" sz="1100" b="1" spc="160" kern="0" dirty="0">
+                <a:solidFill>
+                  <a:srgbClr val="14161B"/>
+                </a:solidFill>
+                <a:latin typeface="Trade Gothic Next" pitchFamily="34" charset="0"/>
+                <a:ea typeface="Trade Gothic Next" pitchFamily="34" charset="-122"/>
+                <a:cs typeface="Trade Gothic Next" pitchFamily="34" charset="-120"/>
+              </a:rPr>
+              <a:t>UNIT 02  •  CHEMISTRY</a:t>
             </a:r>
             <a:endParaRPr lang="en-US" sz="1100" dirty="0"/>
           </a:p>
@@ -16175,115 +15849,10 @@
       </p:sp>
       <p:sp>
         <p:nvSpPr>
-          <p:cNvPr id="3" name="Text 5"/>
-          <p:cNvSpPr txBox="1"/>
-          <p:nvPr>
-            <p:ph idx="107" type="title" hasCustomPrompt="1"/>
-          </p:nvPr>
-        </p:nvSpPr>
-        <p:spPr>
-          <a:xfrm>
-            <a:off x="841248" y="2304288"/>
-            <a:ext cx="3154680" cy="1417320"/>
-          </a:xfrm>
-          <a:prstGeom prst="rect">
-            <a:avLst/>
-          </a:prstGeom>
-          <a:noFill/>
-          <a:ln/>
-        </p:spPr>
-        <p:txBody>
-          <a:bodyPr wrap="square" lIns="0" tIns="0" rIns="0" bIns="0" rtlCol="0"/>
-          <a:lstStyle/>
-          <a:p>
-            <a:pPr algn="l" indent="0" marL="0">
-              <a:lnSpc>
-                <a:spcPct val="108000"/>
-              </a:lnSpc>
-              <a:buNone/>
-            </a:pPr>
-            <a:r>
-              <a:rPr lang="en-US" sz="2600" b="1" dirty="0">
-                <a:solidFill>
-                  <a:srgbClr val="EDF0E5"/>
-                </a:solidFill>
-                <a:latin typeface="Trade Gothic Next" pitchFamily="34" charset="0"/>
-                <a:ea typeface="Trade Gothic Next" pitchFamily="34" charset="-122"/>
-                <a:cs typeface="Trade Gothic Next" pitchFamily="34" charset="-120"/>
-              </a:rPr>
-              <a:t>Same Idea,</a:t>
-            </a:r>
-            <a:endParaRPr lang="en-US" sz="2600" dirty="0"/>
-          </a:p>
-          <a:p>
-            <a:pPr algn="l" indent="0" marL="0">
-              <a:lnSpc>
-                <a:spcPct val="108000"/>
-              </a:lnSpc>
-              <a:buNone/>
-            </a:pPr>
-            <a:r>
-              <a:rPr lang="en-US" sz="2600" b="1" dirty="0">
-                <a:solidFill>
-                  <a:srgbClr val="EDF0E5"/>
-                </a:solidFill>
-                <a:latin typeface="Trade Gothic Next" pitchFamily="34" charset="0"/>
-                <a:ea typeface="Trade Gothic Next" pitchFamily="34" charset="-122"/>
-                <a:cs typeface="Trade Gothic Next" pitchFamily="34" charset="-120"/>
-              </a:rPr>
-              <a:t>In a Flame</a:t>
-            </a:r>
-            <a:endParaRPr lang="en-US" sz="2600" dirty="0"/>
-          </a:p>
-        </p:txBody>
-      </p:sp>
-      <p:sp>
-        <p:nvSpPr>
-          <p:cNvPr id="4" name="Text 5"/>
-          <p:cNvSpPr txBox="1"/>
-          <p:nvPr>
-            <p:ph idx="108" type="body" hasCustomPrompt="1"/>
-          </p:nvPr>
-        </p:nvSpPr>
-        <p:spPr>
-          <a:xfrm>
-            <a:off x="841248" y="3858768"/>
-            <a:ext cx="3154680" cy="1097280"/>
-          </a:xfrm>
-          <a:prstGeom prst="rect">
-            <a:avLst/>
-          </a:prstGeom>
-          <a:noFill/>
-          <a:ln/>
-        </p:spPr>
-        <p:txBody>
-          <a:bodyPr wrap="square" lIns="0" tIns="0" rIns="0" bIns="0" rtlCol="0"/>
-          <a:lstStyle/>
-          <a:p>
-            <a:pPr indent="0" marL="0">
-              <a:buNone/>
-            </a:pPr>
-            <a:r>
-              <a:rPr lang="en-US" sz="1600" dirty="0">
-                <a:solidFill>
-                  <a:srgbClr val="BDB6AA"/>
-                </a:solidFill>
-                <a:latin typeface="Trade Gothic Next" pitchFamily="34" charset="0"/>
-                <a:ea typeface="Trade Gothic Next" pitchFamily="34" charset="-122"/>
-                <a:cs typeface="Trade Gothic Next" pitchFamily="34" charset="-120"/>
-              </a:rPr>
-              <a:t>Metal ions in a flame emit light too. The color helps you identify the metal.</a:t>
-            </a:r>
-            <a:endParaRPr lang="en-US" sz="1600" dirty="0"/>
-          </a:p>
-        </p:txBody>
-      </p:sp>
-      <p:sp>
-        <p:nvSpPr>
-          <p:cNvPr id="5" name="Text 6"/>
-          <p:cNvSpPr txBox="1"/>
-          <p:nvPr>
-            <p:ph idx="110" type="body" hasCustomPrompt="1"/>
+          <p:cNvPr id="10" name="Text 8"/>
+          <p:cNvSpPr txBox="1"/>
+          <p:nvPr>
+            <p:ph idx="117" type="body" hasCustomPrompt="1"/>
           </p:nvPr>
         </p:nvSpPr>
         <p:spPr>
@@ -16307,7 +15876,7 @@
             <a:r>
               <a:rPr lang="en-US" sz="1000" b="1" spc="140" kern="0" dirty="0">
                 <a:solidFill>
-                  <a:srgbClr val="BDB6AA"/>
+                  <a:srgbClr val="2E3338"/>
                 </a:solidFill>
                 <a:latin typeface="Trade Gothic Next" pitchFamily="34" charset="0"/>
                 <a:ea typeface="Trade Gothic Next" pitchFamily="34" charset="-122"/>
@@ -16321,16 +15890,16 @@
       </p:sp>
       <p:sp>
         <p:nvSpPr>
-          <p:cNvPr id="7" name="Text 2"/>
-          <p:cNvSpPr txBox="1"/>
-          <p:nvPr>
-            <p:ph idx="102" hasCustomPrompt="1"/>
-          </p:nvPr>
-        </p:nvSpPr>
-        <p:spPr>
-          <a:xfrm>
-            <a:off x="2926080" y="0"/>
-            <a:ext cx="9262872" cy="6858000"/>
+          <p:cNvPr id="12" name="Text 3"/>
+          <p:cNvSpPr txBox="1"/>
+          <p:nvPr>
+            <p:ph idx="106" hasCustomPrompt="1"/>
+          </p:nvPr>
+        </p:nvSpPr>
+        <p:spPr>
+          <a:xfrm>
+            <a:off x="685800" y="2377440"/>
+            <a:ext cx="4663440" cy="2624328"/>
           </a:xfrm>
           <a:prstGeom prst="rect">
             <a:avLst/>
@@ -16360,430 +15929,6 @@
 <file path=ppt/slides/slide16.xml><?xml version="1.0" encoding="utf-8"?>
 <p:sld xmlns:a="http://schemas.openxmlformats.org/drawingml/2006/main" xmlns:r="http://schemas.openxmlformats.org/officeDocument/2006/relationships" xmlns:p="http://schemas.openxmlformats.org/presentationml/2006/main">
   <p:cSld name="Slide 16">
-    <p:spTree>
-      <p:nvGrpSpPr>
-        <p:cNvPr id="1" name=""/>
-        <p:cNvGrpSpPr/>
-        <p:nvPr/>
-      </p:nvGrpSpPr>
-      <p:grpSpPr>
-        <a:xfrm>
-          <a:off x="0" y="0"/>
-          <a:ext cx="0" cy="0"/>
-          <a:chOff x="0" y="0"/>
-          <a:chExt cx="0" cy="0"/>
-        </a:xfrm>
-      </p:grpSpPr>
-      <p:sp>
-        <p:nvSpPr>
-          <p:cNvPr id="2" name="Text 2"/>
-          <p:cNvSpPr txBox="1"/>
-          <p:nvPr>
-            <p:ph idx="103" type="title" hasCustomPrompt="1"/>
-          </p:nvPr>
-        </p:nvSpPr>
-        <p:spPr>
-          <a:xfrm>
-            <a:off x="685800" y="932688"/>
-            <a:ext cx="10820095" cy="868680"/>
-          </a:xfrm>
-          <a:prstGeom prst="rect">
-            <a:avLst/>
-          </a:prstGeom>
-          <a:noFill/>
-          <a:ln/>
-        </p:spPr>
-        <p:txBody>
-          <a:bodyPr wrap="square" lIns="0" tIns="0" rIns="0" bIns="0" rtlCol="0" anchor="t"/>
-          <a:lstStyle/>
-          <a:p>
-            <a:pPr algn="l" indent="0" marL="0">
-              <a:buNone/>
-            </a:pPr>
-            <a:r>
-              <a:rPr lang="en-US" sz="2800" b="1" dirty="0">
-                <a:solidFill>
-                  <a:srgbClr val="14161B"/>
-                </a:solidFill>
-                <a:latin typeface="Trade Gothic Next" pitchFamily="34" charset="0"/>
-                <a:ea typeface="Trade Gothic Next" pitchFamily="34" charset="-122"/>
-                <a:cs typeface="Trade Gothic Next" pitchFamily="34" charset="-120"/>
-              </a:rPr>
-              <a:t>How a Flame Test Makes Color</a:t>
-            </a:r>
-            <a:endParaRPr lang="en-US" sz="2800" dirty="0"/>
-          </a:p>
-        </p:txBody>
-      </p:sp>
-      <p:sp>
-        <p:nvSpPr>
-          <p:cNvPr id="3" name="Text 2"/>
-          <p:cNvSpPr txBox="1"/>
-          <p:nvPr>
-            <p:ph idx="104" type="body" hasCustomPrompt="1"/>
-          </p:nvPr>
-        </p:nvSpPr>
-        <p:spPr>
-          <a:xfrm>
-            <a:off x="685800" y="1847088"/>
-            <a:ext cx="10820095" cy="384048"/>
-          </a:xfrm>
-          <a:prstGeom prst="rect">
-            <a:avLst/>
-          </a:prstGeom>
-          <a:noFill/>
-          <a:ln/>
-        </p:spPr>
-        <p:txBody>
-          <a:bodyPr wrap="square" lIns="0" tIns="0" rIns="0" bIns="0" rtlCol="0"/>
-          <a:lstStyle/>
-          <a:p>
-            <a:pPr indent="0" marL="0">
-              <a:buNone/>
-            </a:pPr>
-            <a:r>
-              <a:rPr lang="en-US" sz="1700" dirty="0">
-                <a:solidFill>
-                  <a:srgbClr val="2E3338"/>
-                </a:solidFill>
-                <a:latin typeface="Trade Gothic Next" pitchFamily="34" charset="0"/>
-                <a:ea typeface="Trade Gothic Next" pitchFamily="34" charset="-122"/>
-                <a:cs typeface="Trade Gothic Next" pitchFamily="34" charset="-120"/>
-              </a:rPr>
-              <a:t>The color is not the metal burning. It is electrons dropping levels.</a:t>
-            </a:r>
-            <a:endParaRPr lang="en-US" sz="1700" dirty="0"/>
-          </a:p>
-        </p:txBody>
-      </p:sp>
-      <p:sp>
-        <p:nvSpPr>
-          <p:cNvPr id="4" name="Text 4"/>
-          <p:cNvSpPr txBox="1"/>
-          <p:nvPr>
-            <p:ph idx="108" type="body" hasCustomPrompt="1"/>
-          </p:nvPr>
-        </p:nvSpPr>
-        <p:spPr>
-          <a:xfrm>
-            <a:off x="5733288" y="2542032"/>
-            <a:ext cx="2752344" cy="219456"/>
-          </a:xfrm>
-          <a:prstGeom prst="rect">
-            <a:avLst/>
-          </a:prstGeom>
-          <a:noFill/>
-          <a:ln/>
-        </p:spPr>
-        <p:txBody>
-          <a:bodyPr wrap="square" lIns="0" tIns="0" rIns="0" bIns="0" rtlCol="0"/>
-          <a:lstStyle/>
-          <a:p>
-            <a:pPr indent="0" marL="0">
-              <a:buNone/>
-            </a:pPr>
-            <a:r>
-              <a:rPr lang="en-US" sz="1200" b="1" spc="120" kern="0" dirty="0">
-                <a:solidFill>
-                  <a:srgbClr val="2E3338"/>
-                </a:solidFill>
-                <a:latin typeface="Trade Gothic Next" pitchFamily="34" charset="0"/>
-                <a:ea typeface="Trade Gothic Next" pitchFamily="34" charset="-122"/>
-                <a:cs typeface="Trade Gothic Next" pitchFamily="34" charset="-120"/>
-              </a:rPr>
-              <a:t>IN THE FLAME</a:t>
-            </a:r>
-            <a:endParaRPr lang="en-US" sz="1200" dirty="0"/>
-          </a:p>
-        </p:txBody>
-      </p:sp>
-      <p:sp>
-        <p:nvSpPr>
-          <p:cNvPr id="5" name="Text 4"/>
-          <p:cNvSpPr txBox="1"/>
-          <p:nvPr>
-            <p:ph idx="109" type="body" hasCustomPrompt="1"/>
-          </p:nvPr>
-        </p:nvSpPr>
-        <p:spPr>
-          <a:xfrm>
-            <a:off x="5733288" y="2834640"/>
-            <a:ext cx="2752344" cy="1965960"/>
-          </a:xfrm>
-          <a:prstGeom prst="rect">
-            <a:avLst/>
-          </a:prstGeom>
-          <a:noFill/>
-          <a:ln/>
-        </p:spPr>
-        <p:txBody>
-          <a:bodyPr wrap="square" lIns="0" tIns="0" rIns="0" bIns="0" rtlCol="0"/>
-          <a:lstStyle/>
-          <a:p>
-            <a:pPr indent="0" marL="0">
-              <a:buNone/>
-            </a:pPr>
-            <a:r>
-              <a:rPr lang="en-US" sz="1600" dirty="0">
-                <a:solidFill>
-                  <a:srgbClr val="14161B"/>
-                </a:solidFill>
-                <a:latin typeface="Trade Gothic Next" pitchFamily="34" charset="0"/>
-                <a:ea typeface="Trade Gothic Next" pitchFamily="34" charset="-122"/>
-                <a:cs typeface="Trade Gothic Next" pitchFamily="34" charset="-120"/>
-              </a:rPr>
-              <a:t>Heat lifts electrons in the metal ion to higher levels.</a:t>
-            </a:r>
-            <a:endParaRPr lang="en-US" sz="1600" dirty="0"/>
-          </a:p>
-        </p:txBody>
-      </p:sp>
-      <p:sp>
-        <p:nvSpPr>
-          <p:cNvPr id="6" name="Text 5"/>
-          <p:cNvSpPr txBox="1"/>
-          <p:nvPr>
-            <p:ph idx="111" type="body" hasCustomPrompt="1"/>
-          </p:nvPr>
-        </p:nvSpPr>
-        <p:spPr>
-          <a:xfrm>
-            <a:off x="9116568" y="2542032"/>
-            <a:ext cx="2752344" cy="219456"/>
-          </a:xfrm>
-          <a:prstGeom prst="rect">
-            <a:avLst/>
-          </a:prstGeom>
-          <a:noFill/>
-          <a:ln/>
-        </p:spPr>
-        <p:txBody>
-          <a:bodyPr wrap="square" lIns="0" tIns="0" rIns="0" bIns="0" rtlCol="0"/>
-          <a:lstStyle/>
-          <a:p>
-            <a:pPr indent="0" marL="0">
-              <a:buNone/>
-            </a:pPr>
-            <a:r>
-              <a:rPr lang="en-US" sz="1200" b="1" spc="120" kern="0" dirty="0">
-                <a:solidFill>
-                  <a:srgbClr val="BDB6AA"/>
-                </a:solidFill>
-                <a:latin typeface="Trade Gothic Next" pitchFamily="34" charset="0"/>
-                <a:ea typeface="Trade Gothic Next" pitchFamily="34" charset="-122"/>
-                <a:cs typeface="Trade Gothic Next" pitchFamily="34" charset="-120"/>
-              </a:rPr>
-              <a:t>AS THEY DROP</a:t>
-            </a:r>
-            <a:endParaRPr lang="en-US" sz="1200" dirty="0"/>
-          </a:p>
-        </p:txBody>
-      </p:sp>
-      <p:sp>
-        <p:nvSpPr>
-          <p:cNvPr id="7" name="Text 5"/>
-          <p:cNvSpPr txBox="1"/>
-          <p:nvPr>
-            <p:ph idx="112" type="body" hasCustomPrompt="1"/>
-          </p:nvPr>
-        </p:nvSpPr>
-        <p:spPr>
-          <a:xfrm>
-            <a:off x="9116568" y="2834640"/>
-            <a:ext cx="2752344" cy="1965960"/>
-          </a:xfrm>
-          <a:prstGeom prst="rect">
-            <a:avLst/>
-          </a:prstGeom>
-          <a:noFill/>
-          <a:ln/>
-        </p:spPr>
-        <p:txBody>
-          <a:bodyPr wrap="square" lIns="0" tIns="0" rIns="0" bIns="0" rtlCol="0"/>
-          <a:lstStyle/>
-          <a:p>
-            <a:pPr indent="0" marL="0">
-              <a:buNone/>
-            </a:pPr>
-            <a:r>
-              <a:rPr lang="en-US" sz="1600" dirty="0">
-                <a:solidFill>
-                  <a:srgbClr val="EDF0E5"/>
-                </a:solidFill>
-                <a:latin typeface="Trade Gothic Next" pitchFamily="34" charset="0"/>
-                <a:ea typeface="Trade Gothic Next" pitchFamily="34" charset="-122"/>
-                <a:cs typeface="Trade Gothic Next" pitchFamily="34" charset="-120"/>
-              </a:rPr>
-              <a:t>They release photons of visible light. The color helps identify the metal.</a:t>
-            </a:r>
-            <a:endParaRPr lang="en-US" sz="1600" dirty="0"/>
-          </a:p>
-        </p:txBody>
-      </p:sp>
-      <p:sp>
-        <p:nvSpPr>
-          <p:cNvPr id="8" name="Text 7"/>
-          <p:cNvSpPr txBox="1"/>
-          <p:nvPr>
-            <p:ph idx="115" type="body" hasCustomPrompt="1"/>
-          </p:nvPr>
-        </p:nvSpPr>
-        <p:spPr>
-          <a:xfrm>
-            <a:off x="2240280" y="5394960"/>
-            <a:ext cx="8991295" cy="402336"/>
-          </a:xfrm>
-          <a:prstGeom prst="rect">
-            <a:avLst/>
-          </a:prstGeom>
-          <a:noFill/>
-          <a:ln/>
-        </p:spPr>
-        <p:txBody>
-          <a:bodyPr wrap="square" lIns="0" tIns="0" rIns="0" bIns="0" rtlCol="0" anchor="ctr"/>
-          <a:lstStyle/>
-          <a:p>
-            <a:pPr indent="0" marL="0">
-              <a:buNone/>
-            </a:pPr>
-            <a:r>
-              <a:rPr lang="en-US" sz="1600" b="1" dirty="0">
-                <a:solidFill>
-                  <a:srgbClr val="EDF0E5"/>
-                </a:solidFill>
-                <a:latin typeface="Trade Gothic Next" pitchFamily="34" charset="0"/>
-                <a:ea typeface="Trade Gothic Next" pitchFamily="34" charset="-122"/>
-                <a:cs typeface="Trade Gothic Next" pitchFamily="34" charset="-120"/>
-              </a:rPr>
-              <a:t>The color of the emitted light helps identify the metal ion.</a:t>
-            </a:r>
-            <a:endParaRPr lang="en-US" sz="1600" dirty="0"/>
-          </a:p>
-        </p:txBody>
-      </p:sp>
-      <p:sp>
-        <p:nvSpPr>
-          <p:cNvPr id="9" name="Text 1"/>
-          <p:cNvSpPr txBox="1"/>
-          <p:nvPr>
-            <p:ph idx="101" type="body" hasCustomPrompt="1"/>
-          </p:nvPr>
-        </p:nvSpPr>
-        <p:spPr>
-          <a:xfrm>
-            <a:off x="685800" y="384048"/>
-            <a:ext cx="6400800" cy="237744"/>
-          </a:xfrm>
-          <a:prstGeom prst="rect">
-            <a:avLst/>
-          </a:prstGeom>
-          <a:noFill/>
-          <a:ln/>
-        </p:spPr>
-        <p:txBody>
-          <a:bodyPr wrap="square" lIns="0" tIns="0" rIns="0" bIns="0" rtlCol="0" anchor="ctr"/>
-          <a:lstStyle/>
-          <a:p>
-            <a:pPr indent="0" marL="0">
-              <a:buNone/>
-            </a:pPr>
-            <a:r>
-              <a:rPr lang="en-US" sz="1100" b="1" spc="160" kern="0" dirty="0">
-                <a:solidFill>
-                  <a:srgbClr val="14161B"/>
-                </a:solidFill>
-                <a:latin typeface="Trade Gothic Next" pitchFamily="34" charset="0"/>
-                <a:ea typeface="Trade Gothic Next" pitchFamily="34" charset="-122"/>
-                <a:cs typeface="Trade Gothic Next" pitchFamily="34" charset="-120"/>
-              </a:rPr>
-              <a:t>UNIT 02  •  CHEMISTRY</a:t>
-            </a:r>
-            <a:endParaRPr lang="en-US" sz="1100" dirty="0"/>
-          </a:p>
-        </p:txBody>
-      </p:sp>
-      <p:sp>
-        <p:nvSpPr>
-          <p:cNvPr id="10" name="Text 8"/>
-          <p:cNvSpPr txBox="1"/>
-          <p:nvPr>
-            <p:ph idx="117" type="body" hasCustomPrompt="1"/>
-          </p:nvPr>
-        </p:nvSpPr>
-        <p:spPr>
-          <a:xfrm>
-            <a:off x="8762695" y="6382512"/>
-            <a:ext cx="2743200" cy="237744"/>
-          </a:xfrm>
-          <a:prstGeom prst="rect">
-            <a:avLst/>
-          </a:prstGeom>
-          <a:noFill/>
-          <a:ln/>
-        </p:spPr>
-        <p:txBody>
-          <a:bodyPr wrap="square" lIns="0" tIns="0" rIns="0" bIns="0" rtlCol="0" anchor="ctr"/>
-          <a:lstStyle/>
-          <a:p>
-            <a:pPr algn="r" indent="0" marL="0">
-              <a:buNone/>
-            </a:pPr>
-            <a:r>
-              <a:rPr lang="en-US" sz="1000" b="1" spc="140" kern="0" dirty="0">
-                <a:solidFill>
-                  <a:srgbClr val="2E3338"/>
-                </a:solidFill>
-                <a:latin typeface="Trade Gothic Next" pitchFamily="34" charset="0"/>
-                <a:ea typeface="Trade Gothic Next" pitchFamily="34" charset="-122"/>
-                <a:cs typeface="Trade Gothic Next" pitchFamily="34" charset="-120"/>
-              </a:rPr>
-              <a:t>U02 • S02.5</a:t>
-            </a:r>
-            <a:endParaRPr lang="en-US" sz="1000" dirty="0"/>
-          </a:p>
-        </p:txBody>
-      </p:sp>
-      <p:sp>
-        <p:nvSpPr>
-          <p:cNvPr id="12" name="Text 3"/>
-          <p:cNvSpPr txBox="1"/>
-          <p:nvPr>
-            <p:ph idx="106" hasCustomPrompt="1"/>
-          </p:nvPr>
-        </p:nvSpPr>
-        <p:spPr>
-          <a:xfrm>
-            <a:off x="685800" y="2377440"/>
-            <a:ext cx="4663440" cy="2624328"/>
-          </a:xfrm>
-          <a:prstGeom prst="rect">
-            <a:avLst/>
-          </a:prstGeom>
-          <a:noFill/>
-          <a:ln/>
-        </p:spPr>
-        <p:txBody>
-          <a:bodyPr wrap="square" lIns="0" tIns="0" rIns="0" bIns="0" rtlCol="0" anchor="ctr"/>
-          <a:lstStyle/>
-          <a:p>
-            <a:pPr algn="ctr" indent="0" marL="0">
-              <a:buNone/>
-            </a:pPr>
-            <a:endParaRPr lang="en-US" sz="1200" dirty="0"/>
-          </a:p>
-        </p:txBody>
-      </p:sp>
-    </p:spTree>
-  </p:cSld>
-  <p:clrMapOvr>
-    <a:masterClrMapping/>
-  </p:clrMapOvr>
-</p:sld>
-</file>
-
-<file path=ppt/slides/slide17.xml><?xml version="1.0" encoding="utf-8"?>
-<p:sld xmlns:a="http://schemas.openxmlformats.org/drawingml/2006/main" xmlns:r="http://schemas.openxmlformats.org/officeDocument/2006/relationships" xmlns:p="http://schemas.openxmlformats.org/presentationml/2006/main">
-  <p:cSld name="Slide 17">
     <p:spTree>
       <p:nvGrpSpPr>
         <p:cNvPr id="1" name=""/>
@@ -17298,9 +16443,9 @@
 </p:sld>
 </file>
 
-<file path=ppt/slides/slide18.xml><?xml version="1.0" encoding="utf-8"?>
+<file path=ppt/slides/slide17.xml><?xml version="1.0" encoding="utf-8"?>
 <p:sld xmlns:a="http://schemas.openxmlformats.org/drawingml/2006/main" xmlns:r="http://schemas.openxmlformats.org/officeDocument/2006/relationships" xmlns:p="http://schemas.openxmlformats.org/presentationml/2006/main">
-  <p:cSld name="Slide 18">
+  <p:cSld name="Slide 17">
     <p:spTree>
       <p:nvGrpSpPr>
         <p:cNvPr id="1" name=""/>
@@ -17843,6 +16988,518 @@
 </p:sld>
 </file>
 
+<file path=ppt/slides/slide18.xml><?xml version="1.0" encoding="utf-8"?>
+<p:sld xmlns:a="http://schemas.openxmlformats.org/drawingml/2006/main" xmlns:r="http://schemas.openxmlformats.org/officeDocument/2006/relationships" xmlns:p="http://schemas.openxmlformats.org/presentationml/2006/main">
+  <p:cSld name="Slide 18">
+    <p:spTree>
+      <p:nvGrpSpPr>
+        <p:cNvPr id="1" name=""/>
+        <p:cNvGrpSpPr/>
+        <p:nvPr/>
+      </p:nvGrpSpPr>
+      <p:grpSpPr>
+        <a:xfrm>
+          <a:off x="0" y="0"/>
+          <a:ext cx="0" cy="0"/>
+          <a:chOff x="0" y="0"/>
+          <a:chExt cx="0" cy="0"/>
+        </a:xfrm>
+      </p:grpSpPr>
+      <p:sp>
+        <p:nvSpPr>
+          <p:cNvPr id="2" name="Text 2"/>
+          <p:cNvSpPr txBox="1"/>
+          <p:nvPr>
+            <p:ph idx="103" type="title" hasCustomPrompt="1"/>
+          </p:nvPr>
+        </p:nvSpPr>
+        <p:spPr>
+          <a:xfrm>
+            <a:off x="685800" y="932688"/>
+            <a:ext cx="7863840" cy="868680"/>
+          </a:xfrm>
+          <a:prstGeom prst="rect">
+            <a:avLst/>
+          </a:prstGeom>
+          <a:noFill/>
+          <a:ln/>
+        </p:spPr>
+        <p:txBody>
+          <a:bodyPr wrap="square" lIns="0" tIns="0" rIns="0" bIns="0" rtlCol="0" anchor="t"/>
+          <a:lstStyle/>
+          <a:p>
+            <a:pPr algn="l" indent="0" marL="0">
+              <a:buNone/>
+            </a:pPr>
+            <a:r>
+              <a:rPr lang="en-US" sz="2800" b="1" dirty="0">
+                <a:solidFill>
+                  <a:srgbClr val="14161B"/>
+                </a:solidFill>
+                <a:latin typeface="Trade Gothic Next" pitchFamily="34" charset="0"/>
+                <a:ea typeface="Trade Gothic Next" pitchFamily="34" charset="-122"/>
+                <a:cs typeface="Trade Gothic Next" pitchFamily="34" charset="-120"/>
+              </a:rPr>
+              <a:t>Example: Identify the Metals</a:t>
+            </a:r>
+            <a:endParaRPr lang="en-US" sz="2800" dirty="0"/>
+          </a:p>
+        </p:txBody>
+      </p:sp>
+      <p:sp>
+        <p:nvSpPr>
+          <p:cNvPr id="3" name="Text 2"/>
+          <p:cNvSpPr txBox="1"/>
+          <p:nvPr>
+            <p:ph idx="104" type="body" hasCustomPrompt="1"/>
+          </p:nvPr>
+        </p:nvSpPr>
+        <p:spPr>
+          <a:xfrm>
+            <a:off x="685800" y="1847088"/>
+            <a:ext cx="7863840" cy="384048"/>
+          </a:xfrm>
+          <a:prstGeom prst="rect">
+            <a:avLst/>
+          </a:prstGeom>
+          <a:noFill/>
+          <a:ln/>
+        </p:spPr>
+        <p:txBody>
+          <a:bodyPr wrap="square" lIns="0" tIns="0" rIns="0" bIns="0" rtlCol="0"/>
+          <a:lstStyle/>
+          <a:p>
+            <a:pPr indent="0" marL="0">
+              <a:buNone/>
+            </a:pPr>
+            <a:r>
+              <a:rPr lang="en-US" sz="1700" dirty="0">
+                <a:solidFill>
+                  <a:srgbClr val="2E3338"/>
+                </a:solidFill>
+                <a:latin typeface="Trade Gothic Next" pitchFamily="34" charset="0"/>
+                <a:ea typeface="Trade Gothic Next" pitchFamily="34" charset="-122"/>
+                <a:cs typeface="Trade Gothic Next" pitchFamily="34" charset="-120"/>
+              </a:rPr>
+              <a:t>Use the flame color tables. Copy the reasoning.</a:t>
+            </a:r>
+            <a:endParaRPr lang="en-US" sz="1700" dirty="0"/>
+          </a:p>
+        </p:txBody>
+      </p:sp>
+      <p:sp>
+        <p:nvSpPr>
+          <p:cNvPr id="4" name="Text 6"/>
+          <p:cNvSpPr txBox="1"/>
+          <p:nvPr>
+            <p:ph idx="110" type="body" hasCustomPrompt="1"/>
+          </p:nvPr>
+        </p:nvSpPr>
+        <p:spPr>
+          <a:xfrm>
+            <a:off x="886968" y="2798064"/>
+            <a:ext cx="4992624" cy="548640"/>
+          </a:xfrm>
+          <a:prstGeom prst="rect">
+            <a:avLst/>
+          </a:prstGeom>
+          <a:noFill/>
+          <a:ln/>
+        </p:spPr>
+        <p:txBody>
+          <a:bodyPr wrap="square" lIns="0" tIns="0" rIns="0" bIns="0" rtlCol="0"/>
+          <a:lstStyle/>
+          <a:p>
+            <a:pPr indent="0" marL="0">
+              <a:buNone/>
+            </a:pPr>
+            <a:r>
+              <a:rPr lang="en-US" sz="1600" dirty="0">
+                <a:solidFill>
+                  <a:srgbClr val="EDF0E5"/>
+                </a:solidFill>
+                <a:latin typeface="Trade Gothic Next" pitchFamily="34" charset="0"/>
+                <a:ea typeface="Trade Gothic Next" pitchFamily="34" charset="-122"/>
+                <a:cs typeface="Trade Gothic Next" pitchFamily="34" charset="-120"/>
+              </a:rPr>
+              <a:t>One salt burns lilac with a trace of yellow. Another burns orange-red. Which metals?</a:t>
+            </a:r>
+            <a:endParaRPr lang="en-US" sz="1600" dirty="0"/>
+          </a:p>
+        </p:txBody>
+      </p:sp>
+      <p:sp>
+        <p:nvSpPr>
+          <p:cNvPr id="5" name="Text 7"/>
+          <p:cNvSpPr txBox="1"/>
+          <p:nvPr>
+            <p:ph idx="112" type="body" hasCustomPrompt="1"/>
+          </p:nvPr>
+        </p:nvSpPr>
+        <p:spPr>
+          <a:xfrm>
+            <a:off x="886968" y="3776472"/>
+            <a:ext cx="2203704" cy="219456"/>
+          </a:xfrm>
+          <a:prstGeom prst="rect">
+            <a:avLst/>
+          </a:prstGeom>
+          <a:noFill/>
+          <a:ln/>
+        </p:spPr>
+        <p:txBody>
+          <a:bodyPr wrap="square" lIns="0" tIns="0" rIns="0" bIns="0" rtlCol="0"/>
+          <a:lstStyle/>
+          <a:p>
+            <a:pPr indent="0" marL="0">
+              <a:buNone/>
+            </a:pPr>
+            <a:r>
+              <a:rPr lang="en-US" sz="1200" b="1" spc="120" kern="0" dirty="0">
+                <a:solidFill>
+                  <a:srgbClr val="2E3338"/>
+                </a:solidFill>
+                <a:latin typeface="Trade Gothic Next" pitchFamily="34" charset="0"/>
+                <a:ea typeface="Trade Gothic Next" pitchFamily="34" charset="-122"/>
+                <a:cs typeface="Trade Gothic Next" pitchFamily="34" charset="-120"/>
+              </a:rPr>
+              <a:t>GIVEN</a:t>
+            </a:r>
+            <a:endParaRPr lang="en-US" sz="1200" dirty="0"/>
+          </a:p>
+        </p:txBody>
+      </p:sp>
+      <p:sp>
+        <p:nvSpPr>
+          <p:cNvPr id="6" name="Text 7"/>
+          <p:cNvSpPr txBox="1"/>
+          <p:nvPr>
+            <p:ph idx="113" type="body" hasCustomPrompt="1"/>
+          </p:nvPr>
+        </p:nvSpPr>
+        <p:spPr>
+          <a:xfrm>
+            <a:off x="886968" y="4069080"/>
+            <a:ext cx="2203704" cy="1078992"/>
+          </a:xfrm>
+          <a:prstGeom prst="rect">
+            <a:avLst/>
+          </a:prstGeom>
+          <a:noFill/>
+          <a:ln/>
+        </p:spPr>
+        <p:txBody>
+          <a:bodyPr wrap="square" lIns="0" tIns="0" rIns="0" bIns="0" rtlCol="0"/>
+          <a:lstStyle/>
+          <a:p>
+            <a:pPr indent="0" marL="0">
+              <a:buNone/>
+            </a:pPr>
+            <a:r>
+              <a:rPr lang="en-US" sz="1600" dirty="0">
+                <a:solidFill>
+                  <a:srgbClr val="14161B"/>
+                </a:solidFill>
+                <a:latin typeface="Trade Gothic Next" pitchFamily="34" charset="0"/>
+                <a:ea typeface="Trade Gothic Next" pitchFamily="34" charset="-122"/>
+                <a:cs typeface="Trade Gothic Next" pitchFamily="34" charset="-120"/>
+              </a:rPr>
+              <a:t>Salt A: lilac, with some yellow</a:t>
+            </a:r>
+            <a:endParaRPr lang="en-US" sz="1600" dirty="0"/>
+          </a:p>
+          <a:p>
+            <a:pPr indent="0" marL="0">
+              <a:buNone/>
+            </a:pPr>
+            <a:r>
+              <a:rPr lang="en-US" sz="1600" dirty="0">
+                <a:solidFill>
+                  <a:srgbClr val="14161B"/>
+                </a:solidFill>
+                <a:latin typeface="Trade Gothic Next" pitchFamily="34" charset="0"/>
+                <a:ea typeface="Trade Gothic Next" pitchFamily="34" charset="-122"/>
+                <a:cs typeface="Trade Gothic Next" pitchFamily="34" charset="-120"/>
+              </a:rPr>
+              <a:t>Salt B: orange-red</a:t>
+            </a:r>
+            <a:endParaRPr lang="en-US" sz="1600" dirty="0"/>
+          </a:p>
+        </p:txBody>
+      </p:sp>
+      <p:sp>
+        <p:nvSpPr>
+          <p:cNvPr id="7" name="Text 8"/>
+          <p:cNvSpPr txBox="1"/>
+          <p:nvPr>
+            <p:ph idx="115" type="body" hasCustomPrompt="1"/>
+          </p:nvPr>
+        </p:nvSpPr>
+        <p:spPr>
+          <a:xfrm>
+            <a:off x="3675888" y="3776472"/>
+            <a:ext cx="2203704" cy="219456"/>
+          </a:xfrm>
+          <a:prstGeom prst="rect">
+            <a:avLst/>
+          </a:prstGeom>
+          <a:noFill/>
+          <a:ln/>
+        </p:spPr>
+        <p:txBody>
+          <a:bodyPr wrap="square" lIns="0" tIns="0" rIns="0" bIns="0" rtlCol="0"/>
+          <a:lstStyle/>
+          <a:p>
+            <a:pPr indent="0" marL="0">
+              <a:buNone/>
+            </a:pPr>
+            <a:r>
+              <a:rPr lang="en-US" sz="1200" b="1" spc="120" kern="0" dirty="0">
+                <a:solidFill>
+                  <a:srgbClr val="2E3338"/>
+                </a:solidFill>
+                <a:latin typeface="Trade Gothic Next" pitchFamily="34" charset="0"/>
+                <a:ea typeface="Trade Gothic Next" pitchFamily="34" charset="-122"/>
+                <a:cs typeface="Trade Gothic Next" pitchFamily="34" charset="-120"/>
+              </a:rPr>
+              <a:t>NEED</a:t>
+            </a:r>
+            <a:endParaRPr lang="en-US" sz="1200" dirty="0"/>
+          </a:p>
+        </p:txBody>
+      </p:sp>
+      <p:sp>
+        <p:nvSpPr>
+          <p:cNvPr id="8" name="Text 8"/>
+          <p:cNvSpPr txBox="1"/>
+          <p:nvPr>
+            <p:ph idx="116" type="body" hasCustomPrompt="1"/>
+          </p:nvPr>
+        </p:nvSpPr>
+        <p:spPr>
+          <a:xfrm>
+            <a:off x="3675888" y="4069080"/>
+            <a:ext cx="2203704" cy="1078992"/>
+          </a:xfrm>
+          <a:prstGeom prst="rect">
+            <a:avLst/>
+          </a:prstGeom>
+          <a:noFill/>
+          <a:ln/>
+        </p:spPr>
+        <p:txBody>
+          <a:bodyPr wrap="square" lIns="0" tIns="0" rIns="0" bIns="0" rtlCol="0"/>
+          <a:lstStyle/>
+          <a:p>
+            <a:pPr indent="0" marL="0">
+              <a:buNone/>
+            </a:pPr>
+            <a:r>
+              <a:rPr lang="en-US" sz="1600" dirty="0">
+                <a:solidFill>
+                  <a:srgbClr val="14161B"/>
+                </a:solidFill>
+                <a:latin typeface="Trade Gothic Next" pitchFamily="34" charset="0"/>
+                <a:ea typeface="Trade Gothic Next" pitchFamily="34" charset="-122"/>
+                <a:cs typeface="Trade Gothic Next" pitchFamily="34" charset="-120"/>
+              </a:rPr>
+              <a:t>The metal ion behind each color</a:t>
+            </a:r>
+            <a:endParaRPr lang="en-US" sz="1600" dirty="0"/>
+          </a:p>
+        </p:txBody>
+      </p:sp>
+      <p:sp>
+        <p:nvSpPr>
+          <p:cNvPr id="9" name="Text 10"/>
+          <p:cNvSpPr txBox="1"/>
+          <p:nvPr>
+            <p:ph idx="119" type="body" hasCustomPrompt="1"/>
+          </p:nvPr>
+        </p:nvSpPr>
+        <p:spPr>
+          <a:xfrm>
+            <a:off x="6464808" y="2880360"/>
+            <a:ext cx="4837176" cy="2286000"/>
+          </a:xfrm>
+          <a:prstGeom prst="rect">
+            <a:avLst/>
+          </a:prstGeom>
+          <a:noFill/>
+          <a:ln/>
+        </p:spPr>
+        <p:txBody>
+          <a:bodyPr wrap="square" lIns="0" tIns="0" rIns="0" bIns="0" rtlCol="0"/>
+          <a:lstStyle/>
+          <a:p>
+            <a:pPr indent="0" marL="0">
+              <a:buNone/>
+            </a:pPr>
+            <a:endParaRPr lang="en-US" sz="1900" dirty="0"/>
+          </a:p>
+        </p:txBody>
+      </p:sp>
+      <p:sp>
+        <p:nvSpPr>
+          <p:cNvPr id="10" name="Text 12"/>
+          <p:cNvSpPr txBox="1"/>
+          <p:nvPr>
+            <p:ph idx="122" type="body" hasCustomPrompt="1"/>
+          </p:nvPr>
+        </p:nvSpPr>
+        <p:spPr>
+          <a:xfrm>
+            <a:off x="2240280" y="5605272"/>
+            <a:ext cx="8991295" cy="402336"/>
+          </a:xfrm>
+          <a:prstGeom prst="rect">
+            <a:avLst/>
+          </a:prstGeom>
+          <a:noFill/>
+          <a:ln/>
+        </p:spPr>
+        <p:txBody>
+          <a:bodyPr wrap="square" lIns="0" tIns="0" rIns="0" bIns="0" rtlCol="0" anchor="ctr"/>
+          <a:lstStyle/>
+          <a:p>
+            <a:pPr indent="0" marL="0">
+              <a:buNone/>
+            </a:pPr>
+            <a:r>
+              <a:rPr lang="en-US" sz="1600" b="1" dirty="0">
+                <a:solidFill>
+                  <a:srgbClr val="EDF0E5"/>
+                </a:solidFill>
+                <a:latin typeface="Trade Gothic Next" pitchFamily="34" charset="0"/>
+                <a:ea typeface="Trade Gothic Next" pitchFamily="34" charset="-122"/>
+                <a:cs typeface="Trade Gothic Next" pitchFamily="34" charset="-120"/>
+              </a:rPr>
+              <a:t>Write the metal ion for each color, not just the color.</a:t>
+            </a:r>
+            <a:endParaRPr lang="en-US" sz="1600" dirty="0"/>
+          </a:p>
+        </p:txBody>
+      </p:sp>
+      <p:sp>
+        <p:nvSpPr>
+          <p:cNvPr id="11" name="Text 1"/>
+          <p:cNvSpPr txBox="1"/>
+          <p:nvPr>
+            <p:ph idx="101" type="body" hasCustomPrompt="1"/>
+          </p:nvPr>
+        </p:nvSpPr>
+        <p:spPr>
+          <a:xfrm>
+            <a:off x="685800" y="384048"/>
+            <a:ext cx="6400800" cy="237744"/>
+          </a:xfrm>
+          <a:prstGeom prst="rect">
+            <a:avLst/>
+          </a:prstGeom>
+          <a:noFill/>
+          <a:ln/>
+        </p:spPr>
+        <p:txBody>
+          <a:bodyPr wrap="square" lIns="0" tIns="0" rIns="0" bIns="0" rtlCol="0" anchor="ctr"/>
+          <a:lstStyle/>
+          <a:p>
+            <a:pPr indent="0" marL="0">
+              <a:buNone/>
+            </a:pPr>
+            <a:r>
+              <a:rPr lang="en-US" sz="1100" b="1" spc="160" kern="0" dirty="0">
+                <a:solidFill>
+                  <a:srgbClr val="14161B"/>
+                </a:solidFill>
+                <a:latin typeface="Trade Gothic Next" pitchFamily="34" charset="0"/>
+                <a:ea typeface="Trade Gothic Next" pitchFamily="34" charset="-122"/>
+                <a:cs typeface="Trade Gothic Next" pitchFamily="34" charset="-120"/>
+              </a:rPr>
+              <a:t>UNIT 02  •  CHEMISTRY</a:t>
+            </a:r>
+            <a:endParaRPr lang="en-US" sz="1100" dirty="0"/>
+          </a:p>
+        </p:txBody>
+      </p:sp>
+      <p:sp>
+        <p:nvSpPr>
+          <p:cNvPr id="12" name="Text 13"/>
+          <p:cNvSpPr txBox="1"/>
+          <p:nvPr>
+            <p:ph idx="124" type="body" hasCustomPrompt="1"/>
+          </p:nvPr>
+        </p:nvSpPr>
+        <p:spPr>
+          <a:xfrm>
+            <a:off x="8762695" y="6382512"/>
+            <a:ext cx="2743200" cy="237744"/>
+          </a:xfrm>
+          <a:prstGeom prst="rect">
+            <a:avLst/>
+          </a:prstGeom>
+          <a:noFill/>
+          <a:ln/>
+        </p:spPr>
+        <p:txBody>
+          <a:bodyPr wrap="square" lIns="0" tIns="0" rIns="0" bIns="0" rtlCol="0" anchor="ctr"/>
+          <a:lstStyle/>
+          <a:p>
+            <a:pPr algn="r" indent="0" marL="0">
+              <a:buNone/>
+            </a:pPr>
+            <a:r>
+              <a:rPr lang="en-US" sz="1000" b="1" spc="140" kern="0" dirty="0">
+                <a:solidFill>
+                  <a:srgbClr val="2E3338"/>
+                </a:solidFill>
+                <a:latin typeface="Trade Gothic Next" pitchFamily="34" charset="0"/>
+                <a:ea typeface="Trade Gothic Next" pitchFamily="34" charset="-122"/>
+                <a:cs typeface="Trade Gothic Next" pitchFamily="34" charset="-120"/>
+              </a:rPr>
+              <a:t>U02 • S02.5</a:t>
+            </a:r>
+            <a:endParaRPr lang="en-US" sz="1000" dirty="0"/>
+          </a:p>
+        </p:txBody>
+      </p:sp>
+      <p:sp>
+        <p:nvSpPr>
+          <p:cNvPr id="14" name="Text 4"/>
+          <p:cNvSpPr txBox="1"/>
+          <p:nvPr>
+            <p:ph idx="107" hasCustomPrompt="1"/>
+          </p:nvPr>
+        </p:nvSpPr>
+        <p:spPr>
+          <a:xfrm>
+            <a:off x="9262872" y="1088136"/>
+            <a:ext cx="1901952" cy="1069848"/>
+          </a:xfrm>
+          <a:prstGeom prst="rect">
+            <a:avLst/>
+          </a:prstGeom>
+          <a:noFill/>
+          <a:ln/>
+        </p:spPr>
+        <p:txBody>
+          <a:bodyPr wrap="square" lIns="0" tIns="0" rIns="0" bIns="0" rtlCol="0" anchor="ctr"/>
+          <a:lstStyle/>
+          <a:p>
+            <a:pPr algn="ctr" indent="0" marL="0">
+              <a:buNone/>
+            </a:pPr>
+            <a:endParaRPr lang="en-US" sz="1200" dirty="0"/>
+          </a:p>
+        </p:txBody>
+      </p:sp>
+    </p:spTree>
+  </p:cSld>
+  <p:clrMapOvr>
+    <a:masterClrMapping/>
+  </p:clrMapOvr>
+</p:sld>
+</file>
+
 <file path=ppt/slides/slide19.xml><?xml version="1.0" encoding="utf-8"?>
 <p:sld xmlns:a="http://schemas.openxmlformats.org/drawingml/2006/main" xmlns:r="http://schemas.openxmlformats.org/officeDocument/2006/relationships" xmlns:p="http://schemas.openxmlformats.org/presentationml/2006/main">
   <p:cSld name="Slide 19">
@@ -17871,7 +17528,7 @@
         <p:spPr>
           <a:xfrm>
             <a:off x="685800" y="932688"/>
-            <a:ext cx="7863840" cy="868680"/>
+            <a:ext cx="10820095" cy="868680"/>
           </a:xfrm>
           <a:prstGeom prst="rect">
             <a:avLst/>
@@ -17895,7 +17552,7 @@
                 <a:ea typeface="Trade Gothic Next" pitchFamily="34" charset="-122"/>
                 <a:cs typeface="Trade Gothic Next" pitchFamily="34" charset="-120"/>
               </a:rPr>
-              <a:t>Example: Identify the Metals</a:t>
+              <a:t>Two Unknowns, Identified</a:t>
             </a:r>
             <a:endParaRPr lang="en-US" sz="2800" dirty="0"/>
           </a:p>
@@ -17912,7 +17569,7 @@
         <p:spPr>
           <a:xfrm>
             <a:off x="685800" y="1847088"/>
-            <a:ext cx="7863840" cy="384048"/>
+            <a:ext cx="10820095" cy="384048"/>
           </a:xfrm>
           <a:prstGeom prst="rect">
             <a:avLst/>
@@ -17936,7 +17593,7 @@
                 <a:ea typeface="Trade Gothic Next" pitchFamily="34" charset="-122"/>
                 <a:cs typeface="Trade Gothic Next" pitchFamily="34" charset="-120"/>
               </a:rPr>
-              <a:t>Use the flame color tables. Copy the reasoning.</a:t>
+              <a:t>Sodium is a common contaminant.</a:t>
             </a:r>
             <a:endParaRPr lang="en-US" sz="1700" dirty="0"/>
           </a:p>
@@ -17944,7 +17601,48 @@
       </p:sp>
       <p:sp>
         <p:nvSpPr>
-          <p:cNvPr id="4" name="Text 6"/>
+          <p:cNvPr id="4" name="Text 5"/>
+          <p:cNvSpPr txBox="1"/>
+          <p:nvPr>
+            <p:ph idx="109" type="body" hasCustomPrompt="1"/>
+          </p:nvPr>
+        </p:nvSpPr>
+        <p:spPr>
+          <a:xfrm>
+            <a:off x="5276088" y="2560320"/>
+            <a:ext cx="2752344" cy="219456"/>
+          </a:xfrm>
+          <a:prstGeom prst="rect">
+            <a:avLst/>
+          </a:prstGeom>
+          <a:noFill/>
+          <a:ln/>
+        </p:spPr>
+        <p:txBody>
+          <a:bodyPr wrap="square" lIns="0" tIns="0" rIns="0" bIns="0" rtlCol="0"/>
+          <a:lstStyle/>
+          <a:p>
+            <a:pPr indent="0" marL="0">
+              <a:buNone/>
+            </a:pPr>
+            <a:r>
+              <a:rPr lang="en-US" sz="1200" b="1" spc="120" kern="0" dirty="0">
+                <a:solidFill>
+                  <a:srgbClr val="2E3338"/>
+                </a:solidFill>
+                <a:latin typeface="Trade Gothic Next" pitchFamily="34" charset="0"/>
+                <a:ea typeface="Trade Gothic Next" pitchFamily="34" charset="-122"/>
+                <a:cs typeface="Trade Gothic Next" pitchFamily="34" charset="-120"/>
+              </a:rPr>
+              <a:t>SETUP</a:t>
+            </a:r>
+            <a:endParaRPr lang="en-US" sz="1200" dirty="0"/>
+          </a:p>
+        </p:txBody>
+      </p:sp>
+      <p:sp>
+        <p:nvSpPr>
+          <p:cNvPr id="5" name="Text 5"/>
           <p:cNvSpPr txBox="1"/>
           <p:nvPr>
             <p:ph idx="110" type="body" hasCustomPrompt="1"/>
@@ -17952,8 +17650,8 @@
         </p:nvSpPr>
         <p:spPr>
           <a:xfrm>
-            <a:off x="886968" y="2798064"/>
-            <a:ext cx="4992624" cy="548640"/>
+            <a:off x="5276088" y="2852928"/>
+            <a:ext cx="2752344" cy="1901952"/>
           </a:xfrm>
           <a:prstGeom prst="rect">
             <a:avLst/>
@@ -17971,13 +17669,306 @@
             <a:r>
               <a:rPr lang="en-US" sz="1600" dirty="0">
                 <a:solidFill>
+                  <a:srgbClr val="14161B"/>
+                </a:solidFill>
+                <a:latin typeface="Trade Gothic Next" pitchFamily="34" charset="0"/>
+                <a:ea typeface="Trade Gothic Next" pitchFamily="34" charset="-122"/>
+                <a:cs typeface="Trade Gothic Next" pitchFamily="34" charset="-120"/>
+              </a:rPr>
+              <a:t>Match each color</a:t>
+            </a:r>
+            <a:endParaRPr lang="en-US" sz="1600" dirty="0"/>
+          </a:p>
+          <a:p>
+            <a:pPr indent="0" marL="0">
+              <a:buNone/>
+            </a:pPr>
+            <a:r>
+              <a:rPr lang="en-US" sz="1600" dirty="0">
+                <a:solidFill>
+                  <a:srgbClr val="14161B"/>
+                </a:solidFill>
+                <a:latin typeface="Trade Gothic Next" pitchFamily="34" charset="0"/>
+                <a:ea typeface="Trade Gothic Next" pitchFamily="34" charset="-122"/>
+                <a:cs typeface="Trade Gothic Next" pitchFamily="34" charset="-120"/>
+              </a:rPr>
+              <a:t>to the table.</a:t>
+            </a:r>
+            <a:endParaRPr lang="en-US" sz="1600" dirty="0"/>
+          </a:p>
+          <a:p>
+            <a:pPr indent="0" marL="0">
+              <a:buNone/>
+            </a:pPr>
+            <a:r>
+              <a:rPr lang="en-US" sz="1600" dirty="0">
+                <a:solidFill>
+                  <a:srgbClr val="14161B"/>
+                </a:solidFill>
+                <a:latin typeface="Trade Gothic Next" pitchFamily="34" charset="0"/>
+                <a:ea typeface="Trade Gothic Next" pitchFamily="34" charset="-122"/>
+                <a:cs typeface="Trade Gothic Next" pitchFamily="34" charset="-120"/>
+              </a:rPr>
+              <a:t>Na</a:t>
+            </a:r>
+            <a:pPr indent="0" marL="0">
+              <a:buNone/>
+            </a:pPr>
+            <a:r>
+              <a:rPr lang="en-US" sz="1600" baseline="30000" dirty="0">
+                <a:solidFill>
+                  <a:srgbClr val="14161B"/>
+                </a:solidFill>
+                <a:latin typeface="Trade Gothic Next" pitchFamily="34" charset="0"/>
+                <a:ea typeface="Trade Gothic Next" pitchFamily="34" charset="-122"/>
+                <a:cs typeface="Trade Gothic Next" pitchFamily="34" charset="-120"/>
+              </a:rPr>
+              <a:t>+</a:t>
+            </a:r>
+            <a:pPr indent="0" marL="0">
+              <a:buNone/>
+            </a:pPr>
+            <a:r>
+              <a:rPr lang="en-US" sz="1600" dirty="0">
+                <a:solidFill>
+                  <a:srgbClr val="14161B"/>
+                </a:solidFill>
+                <a:latin typeface="Trade Gothic Next" pitchFamily="34" charset="0"/>
+                <a:ea typeface="Trade Gothic Next" pitchFamily="34" charset="-122"/>
+                <a:cs typeface="Trade Gothic Next" pitchFamily="34" charset="-120"/>
+              </a:rPr>
+              <a:t> gives yellow.</a:t>
+            </a:r>
+            <a:endParaRPr lang="en-US" sz="1600" dirty="0"/>
+          </a:p>
+        </p:txBody>
+      </p:sp>
+      <p:sp>
+        <p:nvSpPr>
+          <p:cNvPr id="6" name="Text 7"/>
+          <p:cNvSpPr txBox="1"/>
+          <p:nvPr>
+            <p:ph idx="113" type="body" hasCustomPrompt="1"/>
+          </p:nvPr>
+        </p:nvSpPr>
+        <p:spPr>
+          <a:xfrm>
+            <a:off x="8613648" y="2871216"/>
+            <a:ext cx="2688336" cy="1920240"/>
+          </a:xfrm>
+          <a:prstGeom prst="rect">
+            <a:avLst/>
+          </a:prstGeom>
+          <a:noFill/>
+          <a:ln/>
+        </p:spPr>
+        <p:txBody>
+          <a:bodyPr wrap="square" lIns="0" tIns="0" rIns="0" bIns="0" rtlCol="0"/>
+          <a:lstStyle/>
+          <a:p>
+            <a:pPr indent="0" marL="0">
+              <a:buNone/>
+            </a:pPr>
+            <a:r>
+              <a:rPr lang="en-US" sz="1900" dirty="0">
+                <a:solidFill>
+                  <a:srgbClr val="14161B"/>
+                </a:solidFill>
+                <a:latin typeface="Trade Gothic Next" pitchFamily="34" charset="0"/>
+                <a:ea typeface="Trade Gothic Next" pitchFamily="34" charset="-122"/>
+                <a:cs typeface="Trade Gothic Next" pitchFamily="34" charset="-120"/>
+              </a:rPr>
+              <a:t>Salt A: K</a:t>
+            </a:r>
+            <a:pPr indent="0" marL="0">
+              <a:buNone/>
+            </a:pPr>
+            <a:r>
+              <a:rPr lang="en-US" sz="1900" baseline="30000" dirty="0">
+                <a:solidFill>
+                  <a:srgbClr val="14161B"/>
+                </a:solidFill>
+                <a:latin typeface="Trade Gothic Next" pitchFamily="34" charset="0"/>
+                <a:ea typeface="Trade Gothic Next" pitchFamily="34" charset="-122"/>
+                <a:cs typeface="Trade Gothic Next" pitchFamily="34" charset="-120"/>
+              </a:rPr>
+              <a:t>+</a:t>
+            </a:r>
+            <a:pPr indent="0" marL="0">
+              <a:buNone/>
+            </a:pPr>
+            <a:r>
+              <a:rPr lang="en-US" sz="1900" dirty="0">
+                <a:solidFill>
+                  <a:srgbClr val="14161B"/>
+                </a:solidFill>
+                <a:latin typeface="Trade Gothic Next" pitchFamily="34" charset="0"/>
+                <a:ea typeface="Trade Gothic Next" pitchFamily="34" charset="-122"/>
+                <a:cs typeface="Trade Gothic Next" pitchFamily="34" charset="-120"/>
+              </a:rPr>
+              <a:t> (lilac)</a:t>
+            </a:r>
+            <a:endParaRPr lang="en-US" sz="1900" dirty="0"/>
+          </a:p>
+          <a:p>
+            <a:pPr indent="0" marL="0">
+              <a:buNone/>
+            </a:pPr>
+            <a:r>
+              <a:rPr lang="en-US" sz="1900" dirty="0">
+                <a:solidFill>
+                  <a:srgbClr val="14161B"/>
+                </a:solidFill>
+                <a:latin typeface="Trade Gothic Next" pitchFamily="34" charset="0"/>
+                <a:ea typeface="Trade Gothic Next" pitchFamily="34" charset="-122"/>
+                <a:cs typeface="Trade Gothic Next" pitchFamily="34" charset="-120"/>
+              </a:rPr>
+              <a:t>Yellow trace: Na</a:t>
+            </a:r>
+            <a:pPr indent="0" marL="0">
+              <a:buNone/>
+            </a:pPr>
+            <a:r>
+              <a:rPr lang="en-US" sz="1900" baseline="30000" dirty="0">
+                <a:solidFill>
+                  <a:srgbClr val="14161B"/>
+                </a:solidFill>
+                <a:latin typeface="Trade Gothic Next" pitchFamily="34" charset="0"/>
+                <a:ea typeface="Trade Gothic Next" pitchFamily="34" charset="-122"/>
+                <a:cs typeface="Trade Gothic Next" pitchFamily="34" charset="-120"/>
+              </a:rPr>
+              <a:t>+</a:t>
+            </a:r>
+            <a:endParaRPr lang="en-US" sz="1900" dirty="0"/>
+          </a:p>
+          <a:p>
+            <a:pPr indent="0" marL="0">
+              <a:buNone/>
+            </a:pPr>
+            <a:r>
+              <a:rPr lang="en-US" sz="1900" dirty="0">
+                <a:solidFill>
+                  <a:srgbClr val="14161B"/>
+                </a:solidFill>
+                <a:latin typeface="Trade Gothic Next" pitchFamily="34" charset="0"/>
+                <a:ea typeface="Trade Gothic Next" pitchFamily="34" charset="-122"/>
+                <a:cs typeface="Trade Gothic Next" pitchFamily="34" charset="-120"/>
+              </a:rPr>
+              <a:t>Salt B: Ca</a:t>
+            </a:r>
+            <a:pPr indent="0" marL="0">
+              <a:buNone/>
+            </a:pPr>
+            <a:r>
+              <a:rPr lang="en-US" sz="1900" baseline="30000" dirty="0">
+                <a:solidFill>
+                  <a:srgbClr val="14161B"/>
+                </a:solidFill>
+                <a:latin typeface="Trade Gothic Next" pitchFamily="34" charset="0"/>
+                <a:ea typeface="Trade Gothic Next" pitchFamily="34" charset="-122"/>
+                <a:cs typeface="Trade Gothic Next" pitchFamily="34" charset="-120"/>
+              </a:rPr>
+              <a:t>2+</a:t>
+            </a:r>
+            <a:pPr indent="0" marL="0">
+              <a:buNone/>
+            </a:pPr>
+            <a:r>
+              <a:rPr lang="en-US" sz="1900" dirty="0">
+                <a:solidFill>
+                  <a:srgbClr val="14161B"/>
+                </a:solidFill>
+                <a:latin typeface="Trade Gothic Next" pitchFamily="34" charset="0"/>
+                <a:ea typeface="Trade Gothic Next" pitchFamily="34" charset="-122"/>
+                <a:cs typeface="Trade Gothic Next" pitchFamily="34" charset="-120"/>
+              </a:rPr>
+              <a:t> (orange-red)</a:t>
+            </a:r>
+            <a:endParaRPr lang="en-US" sz="1900" dirty="0"/>
+          </a:p>
+          <a:p>
+            <a:pPr indent="0" marL="0">
+              <a:buNone/>
+            </a:pPr>
+            <a:r>
+              <a:rPr lang="en-US" sz="1900" dirty="0">
+                <a:solidFill>
+                  <a:srgbClr val="14161B"/>
+                </a:solidFill>
+                <a:latin typeface="Trade Gothic Next" pitchFamily="34" charset="0"/>
+                <a:ea typeface="Trade Gothic Next" pitchFamily="34" charset="-122"/>
+                <a:cs typeface="Trade Gothic Next" pitchFamily="34" charset="-120"/>
+              </a:rPr>
+              <a:t>Sr</a:t>
+            </a:r>
+            <a:pPr indent="0" marL="0">
+              <a:buNone/>
+            </a:pPr>
+            <a:r>
+              <a:rPr lang="en-US" sz="1900" baseline="30000" dirty="0">
+                <a:solidFill>
+                  <a:srgbClr val="14161B"/>
+                </a:solidFill>
+                <a:latin typeface="Trade Gothic Next" pitchFamily="34" charset="0"/>
+                <a:ea typeface="Trade Gothic Next" pitchFamily="34" charset="-122"/>
+                <a:cs typeface="Trade Gothic Next" pitchFamily="34" charset="-120"/>
+              </a:rPr>
+              <a:t>2+</a:t>
+            </a:r>
+            <a:pPr indent="0" marL="0">
+              <a:buNone/>
+            </a:pPr>
+            <a:r>
+              <a:rPr lang="en-US" sz="1900" dirty="0">
+                <a:solidFill>
+                  <a:srgbClr val="14161B"/>
+                </a:solidFill>
+                <a:latin typeface="Trade Gothic Next" pitchFamily="34" charset="0"/>
+                <a:ea typeface="Trade Gothic Next" pitchFamily="34" charset="-122"/>
+                <a:cs typeface="Trade Gothic Next" pitchFamily="34" charset="-120"/>
+              </a:rPr>
+              <a:t> looks similar</a:t>
+            </a:r>
+            <a:endParaRPr lang="en-US" sz="1900" dirty="0"/>
+          </a:p>
+        </p:txBody>
+      </p:sp>
+      <p:sp>
+        <p:nvSpPr>
+          <p:cNvPr id="7" name="Text 9"/>
+          <p:cNvSpPr txBox="1"/>
+          <p:nvPr>
+            <p:ph idx="116" type="body" hasCustomPrompt="1"/>
+          </p:nvPr>
+        </p:nvSpPr>
+        <p:spPr>
+          <a:xfrm>
+            <a:off x="2240280" y="5212080"/>
+            <a:ext cx="8991295" cy="402336"/>
+          </a:xfrm>
+          <a:prstGeom prst="rect">
+            <a:avLst/>
+          </a:prstGeom>
+          <a:noFill/>
+          <a:ln/>
+        </p:spPr>
+        <p:txBody>
+          <a:bodyPr wrap="square" lIns="0" tIns="0" rIns="0" bIns="0" rtlCol="0" anchor="ctr"/>
+          <a:lstStyle/>
+          <a:p>
+            <a:pPr indent="0" marL="0">
+              <a:buNone/>
+            </a:pPr>
+            <a:r>
+              <a:rPr lang="en-US" sz="1600" b="1" dirty="0">
+                <a:solidFill>
                   <a:srgbClr val="EDF0E5"/>
                 </a:solidFill>
                 <a:latin typeface="Trade Gothic Next" pitchFamily="34" charset="0"/>
                 <a:ea typeface="Trade Gothic Next" pitchFamily="34" charset="-122"/>
                 <a:cs typeface="Trade Gothic Next" pitchFamily="34" charset="-120"/>
               </a:rPr>
-              <a:t>One salt burns lilac with a trace of yellow. Another burns orange-red. Which metals?</a:t>
+              <a:t>Flame colors can look alike, so a flame test alone does not prove the ion.</a:t>
             </a:r>
             <a:endParaRPr lang="en-US" sz="1600" dirty="0"/>
           </a:p>
@@ -17985,259 +17976,7 @@
       </p:sp>
       <p:sp>
         <p:nvSpPr>
-          <p:cNvPr id="5" name="Text 7"/>
-          <p:cNvSpPr txBox="1"/>
-          <p:nvPr>
-            <p:ph idx="112" type="body" hasCustomPrompt="1"/>
-          </p:nvPr>
-        </p:nvSpPr>
-        <p:spPr>
-          <a:xfrm>
-            <a:off x="886968" y="3776472"/>
-            <a:ext cx="2203704" cy="219456"/>
-          </a:xfrm>
-          <a:prstGeom prst="rect">
-            <a:avLst/>
-          </a:prstGeom>
-          <a:noFill/>
-          <a:ln/>
-        </p:spPr>
-        <p:txBody>
-          <a:bodyPr wrap="square" lIns="0" tIns="0" rIns="0" bIns="0" rtlCol="0"/>
-          <a:lstStyle/>
-          <a:p>
-            <a:pPr indent="0" marL="0">
-              <a:buNone/>
-            </a:pPr>
-            <a:r>
-              <a:rPr lang="en-US" sz="1200" b="1" spc="120" kern="0" dirty="0">
-                <a:solidFill>
-                  <a:srgbClr val="2E3338"/>
-                </a:solidFill>
-                <a:latin typeface="Trade Gothic Next" pitchFamily="34" charset="0"/>
-                <a:ea typeface="Trade Gothic Next" pitchFamily="34" charset="-122"/>
-                <a:cs typeface="Trade Gothic Next" pitchFamily="34" charset="-120"/>
-              </a:rPr>
-              <a:t>GIVEN</a:t>
-            </a:r>
-            <a:endParaRPr lang="en-US" sz="1200" dirty="0"/>
-          </a:p>
-        </p:txBody>
-      </p:sp>
-      <p:sp>
-        <p:nvSpPr>
-          <p:cNvPr id="6" name="Text 7"/>
-          <p:cNvSpPr txBox="1"/>
-          <p:nvPr>
-            <p:ph idx="113" type="body" hasCustomPrompt="1"/>
-          </p:nvPr>
-        </p:nvSpPr>
-        <p:spPr>
-          <a:xfrm>
-            <a:off x="886968" y="4069080"/>
-            <a:ext cx="2203704" cy="1078992"/>
-          </a:xfrm>
-          <a:prstGeom prst="rect">
-            <a:avLst/>
-          </a:prstGeom>
-          <a:noFill/>
-          <a:ln/>
-        </p:spPr>
-        <p:txBody>
-          <a:bodyPr wrap="square" lIns="0" tIns="0" rIns="0" bIns="0" rtlCol="0"/>
-          <a:lstStyle/>
-          <a:p>
-            <a:pPr indent="0" marL="0">
-              <a:buNone/>
-            </a:pPr>
-            <a:r>
-              <a:rPr lang="en-US" sz="1600" dirty="0">
-                <a:solidFill>
-                  <a:srgbClr val="14161B"/>
-                </a:solidFill>
-                <a:latin typeface="Trade Gothic Next" pitchFamily="34" charset="0"/>
-                <a:ea typeface="Trade Gothic Next" pitchFamily="34" charset="-122"/>
-                <a:cs typeface="Trade Gothic Next" pitchFamily="34" charset="-120"/>
-              </a:rPr>
-              <a:t>Salt A: lilac, with some yellow</a:t>
-            </a:r>
-            <a:endParaRPr lang="en-US" sz="1600" dirty="0"/>
-          </a:p>
-          <a:p>
-            <a:pPr indent="0" marL="0">
-              <a:buNone/>
-            </a:pPr>
-            <a:r>
-              <a:rPr lang="en-US" sz="1600" dirty="0">
-                <a:solidFill>
-                  <a:srgbClr val="14161B"/>
-                </a:solidFill>
-                <a:latin typeface="Trade Gothic Next" pitchFamily="34" charset="0"/>
-                <a:ea typeface="Trade Gothic Next" pitchFamily="34" charset="-122"/>
-                <a:cs typeface="Trade Gothic Next" pitchFamily="34" charset="-120"/>
-              </a:rPr>
-              <a:t>Salt B: orange-red</a:t>
-            </a:r>
-            <a:endParaRPr lang="en-US" sz="1600" dirty="0"/>
-          </a:p>
-        </p:txBody>
-      </p:sp>
-      <p:sp>
-        <p:nvSpPr>
-          <p:cNvPr id="7" name="Text 8"/>
-          <p:cNvSpPr txBox="1"/>
-          <p:nvPr>
-            <p:ph idx="115" type="body" hasCustomPrompt="1"/>
-          </p:nvPr>
-        </p:nvSpPr>
-        <p:spPr>
-          <a:xfrm>
-            <a:off x="3675888" y="3776472"/>
-            <a:ext cx="2203704" cy="219456"/>
-          </a:xfrm>
-          <a:prstGeom prst="rect">
-            <a:avLst/>
-          </a:prstGeom>
-          <a:noFill/>
-          <a:ln/>
-        </p:spPr>
-        <p:txBody>
-          <a:bodyPr wrap="square" lIns="0" tIns="0" rIns="0" bIns="0" rtlCol="0"/>
-          <a:lstStyle/>
-          <a:p>
-            <a:pPr indent="0" marL="0">
-              <a:buNone/>
-            </a:pPr>
-            <a:r>
-              <a:rPr lang="en-US" sz="1200" b="1" spc="120" kern="0" dirty="0">
-                <a:solidFill>
-                  <a:srgbClr val="2E3338"/>
-                </a:solidFill>
-                <a:latin typeface="Trade Gothic Next" pitchFamily="34" charset="0"/>
-                <a:ea typeface="Trade Gothic Next" pitchFamily="34" charset="-122"/>
-                <a:cs typeface="Trade Gothic Next" pitchFamily="34" charset="-120"/>
-              </a:rPr>
-              <a:t>NEED</a:t>
-            </a:r>
-            <a:endParaRPr lang="en-US" sz="1200" dirty="0"/>
-          </a:p>
-        </p:txBody>
-      </p:sp>
-      <p:sp>
-        <p:nvSpPr>
-          <p:cNvPr id="8" name="Text 8"/>
-          <p:cNvSpPr txBox="1"/>
-          <p:nvPr>
-            <p:ph idx="116" type="body" hasCustomPrompt="1"/>
-          </p:nvPr>
-        </p:nvSpPr>
-        <p:spPr>
-          <a:xfrm>
-            <a:off x="3675888" y="4069080"/>
-            <a:ext cx="2203704" cy="1078992"/>
-          </a:xfrm>
-          <a:prstGeom prst="rect">
-            <a:avLst/>
-          </a:prstGeom>
-          <a:noFill/>
-          <a:ln/>
-        </p:spPr>
-        <p:txBody>
-          <a:bodyPr wrap="square" lIns="0" tIns="0" rIns="0" bIns="0" rtlCol="0"/>
-          <a:lstStyle/>
-          <a:p>
-            <a:pPr indent="0" marL="0">
-              <a:buNone/>
-            </a:pPr>
-            <a:r>
-              <a:rPr lang="en-US" sz="1600" dirty="0">
-                <a:solidFill>
-                  <a:srgbClr val="14161B"/>
-                </a:solidFill>
-                <a:latin typeface="Trade Gothic Next" pitchFamily="34" charset="0"/>
-                <a:ea typeface="Trade Gothic Next" pitchFamily="34" charset="-122"/>
-                <a:cs typeface="Trade Gothic Next" pitchFamily="34" charset="-120"/>
-              </a:rPr>
-              <a:t>The metal ion behind each color</a:t>
-            </a:r>
-            <a:endParaRPr lang="en-US" sz="1600" dirty="0"/>
-          </a:p>
-        </p:txBody>
-      </p:sp>
-      <p:sp>
-        <p:nvSpPr>
-          <p:cNvPr id="9" name="Text 10"/>
-          <p:cNvSpPr txBox="1"/>
-          <p:nvPr>
-            <p:ph idx="119" type="body" hasCustomPrompt="1"/>
-          </p:nvPr>
-        </p:nvSpPr>
-        <p:spPr>
-          <a:xfrm>
-            <a:off x="6464808" y="2880360"/>
-            <a:ext cx="4837176" cy="2286000"/>
-          </a:xfrm>
-          <a:prstGeom prst="rect">
-            <a:avLst/>
-          </a:prstGeom>
-          <a:noFill/>
-          <a:ln/>
-        </p:spPr>
-        <p:txBody>
-          <a:bodyPr wrap="square" lIns="0" tIns="0" rIns="0" bIns="0" rtlCol="0"/>
-          <a:lstStyle/>
-          <a:p>
-            <a:pPr indent="0" marL="0">
-              <a:buNone/>
-            </a:pPr>
-            <a:endParaRPr lang="en-US" sz="1900" dirty="0"/>
-          </a:p>
-        </p:txBody>
-      </p:sp>
-      <p:sp>
-        <p:nvSpPr>
-          <p:cNvPr id="10" name="Text 12"/>
-          <p:cNvSpPr txBox="1"/>
-          <p:nvPr>
-            <p:ph idx="122" type="body" hasCustomPrompt="1"/>
-          </p:nvPr>
-        </p:nvSpPr>
-        <p:spPr>
-          <a:xfrm>
-            <a:off x="2240280" y="5605272"/>
-            <a:ext cx="8991295" cy="402336"/>
-          </a:xfrm>
-          <a:prstGeom prst="rect">
-            <a:avLst/>
-          </a:prstGeom>
-          <a:noFill/>
-          <a:ln/>
-        </p:spPr>
-        <p:txBody>
-          <a:bodyPr wrap="square" lIns="0" tIns="0" rIns="0" bIns="0" rtlCol="0" anchor="ctr"/>
-          <a:lstStyle/>
-          <a:p>
-            <a:pPr indent="0" marL="0">
-              <a:buNone/>
-            </a:pPr>
-            <a:r>
-              <a:rPr lang="en-US" sz="1600" b="1" dirty="0">
-                <a:solidFill>
-                  <a:srgbClr val="EDF0E5"/>
-                </a:solidFill>
-                <a:latin typeface="Trade Gothic Next" pitchFamily="34" charset="0"/>
-                <a:ea typeface="Trade Gothic Next" pitchFamily="34" charset="-122"/>
-                <a:cs typeface="Trade Gothic Next" pitchFamily="34" charset="-120"/>
-              </a:rPr>
-              <a:t>Write the metal ion for each color, not just the color.</a:t>
-            </a:r>
-            <a:endParaRPr lang="en-US" sz="1600" dirty="0"/>
-          </a:p>
-        </p:txBody>
-      </p:sp>
-      <p:sp>
-        <p:nvSpPr>
-          <p:cNvPr id="11" name="Text 1"/>
+          <p:cNvPr id="8" name="Text 1"/>
           <p:cNvSpPr txBox="1"/>
           <p:nvPr>
             <p:ph idx="101" type="body" hasCustomPrompt="1"/>
@@ -18278,10 +18017,10 @@
       </p:sp>
       <p:sp>
         <p:nvSpPr>
-          <p:cNvPr id="12" name="Text 13"/>
-          <p:cNvSpPr txBox="1"/>
-          <p:nvPr>
-            <p:ph idx="124" type="body" hasCustomPrompt="1"/>
+          <p:cNvPr id="9" name="Text 10"/>
+          <p:cNvSpPr txBox="1"/>
+          <p:nvPr>
+            <p:ph idx="118" type="body" hasCustomPrompt="1"/>
           </p:nvPr>
         </p:nvSpPr>
         <p:spPr>
@@ -18319,7 +18058,7 @@
       </p:sp>
       <p:sp>
         <p:nvSpPr>
-          <p:cNvPr id="14" name="Text 4"/>
+          <p:cNvPr id="11" name="Text 4"/>
           <p:cNvSpPr txBox="1"/>
           <p:nvPr>
             <p:ph idx="107" hasCustomPrompt="1"/>
@@ -18327,8 +18066,8 @@
         </p:nvSpPr>
         <p:spPr>
           <a:xfrm>
-            <a:off x="9262872" y="1088136"/>
-            <a:ext cx="1901952" cy="1069848"/>
+            <a:off x="832104" y="2542032"/>
+            <a:ext cx="3867912" cy="2267712"/>
           </a:xfrm>
           <a:prstGeom prst="rect">
             <a:avLst/>
@@ -18635,600 +18374,6 @@
 <file path=ppt/slides/slide20.xml><?xml version="1.0" encoding="utf-8"?>
 <p:sld xmlns:a="http://schemas.openxmlformats.org/drawingml/2006/main" xmlns:r="http://schemas.openxmlformats.org/officeDocument/2006/relationships" xmlns:p="http://schemas.openxmlformats.org/presentationml/2006/main">
   <p:cSld name="Slide 20">
-    <p:spTree>
-      <p:nvGrpSpPr>
-        <p:cNvPr id="1" name=""/>
-        <p:cNvGrpSpPr/>
-        <p:nvPr/>
-      </p:nvGrpSpPr>
-      <p:grpSpPr>
-        <a:xfrm>
-          <a:off x="0" y="0"/>
-          <a:ext cx="0" cy="0"/>
-          <a:chOff x="0" y="0"/>
-          <a:chExt cx="0" cy="0"/>
-        </a:xfrm>
-      </p:grpSpPr>
-      <p:sp>
-        <p:nvSpPr>
-          <p:cNvPr id="2" name="Text 2"/>
-          <p:cNvSpPr txBox="1"/>
-          <p:nvPr>
-            <p:ph idx="103" type="title" hasCustomPrompt="1"/>
-          </p:nvPr>
-        </p:nvSpPr>
-        <p:spPr>
-          <a:xfrm>
-            <a:off x="685800" y="932688"/>
-            <a:ext cx="10820095" cy="868680"/>
-          </a:xfrm>
-          <a:prstGeom prst="rect">
-            <a:avLst/>
-          </a:prstGeom>
-          <a:noFill/>
-          <a:ln/>
-        </p:spPr>
-        <p:txBody>
-          <a:bodyPr wrap="square" lIns="0" tIns="0" rIns="0" bIns="0" rtlCol="0" anchor="t"/>
-          <a:lstStyle/>
-          <a:p>
-            <a:pPr algn="l" indent="0" marL="0">
-              <a:buNone/>
-            </a:pPr>
-            <a:r>
-              <a:rPr lang="en-US" sz="2800" b="1" dirty="0">
-                <a:solidFill>
-                  <a:srgbClr val="14161B"/>
-                </a:solidFill>
-                <a:latin typeface="Trade Gothic Next" pitchFamily="34" charset="0"/>
-                <a:ea typeface="Trade Gothic Next" pitchFamily="34" charset="-122"/>
-                <a:cs typeface="Trade Gothic Next" pitchFamily="34" charset="-120"/>
-              </a:rPr>
-              <a:t>Two Unknowns, Identified</a:t>
-            </a:r>
-            <a:endParaRPr lang="en-US" sz="2800" dirty="0"/>
-          </a:p>
-        </p:txBody>
-      </p:sp>
-      <p:sp>
-        <p:nvSpPr>
-          <p:cNvPr id="3" name="Text 2"/>
-          <p:cNvSpPr txBox="1"/>
-          <p:nvPr>
-            <p:ph idx="104" type="body" hasCustomPrompt="1"/>
-          </p:nvPr>
-        </p:nvSpPr>
-        <p:spPr>
-          <a:xfrm>
-            <a:off x="685800" y="1847088"/>
-            <a:ext cx="10820095" cy="384048"/>
-          </a:xfrm>
-          <a:prstGeom prst="rect">
-            <a:avLst/>
-          </a:prstGeom>
-          <a:noFill/>
-          <a:ln/>
-        </p:spPr>
-        <p:txBody>
-          <a:bodyPr wrap="square" lIns="0" tIns="0" rIns="0" bIns="0" rtlCol="0"/>
-          <a:lstStyle/>
-          <a:p>
-            <a:pPr indent="0" marL="0">
-              <a:buNone/>
-            </a:pPr>
-            <a:r>
-              <a:rPr lang="en-US" sz="1700" dirty="0">
-                <a:solidFill>
-                  <a:srgbClr val="2E3338"/>
-                </a:solidFill>
-                <a:latin typeface="Trade Gothic Next" pitchFamily="34" charset="0"/>
-                <a:ea typeface="Trade Gothic Next" pitchFamily="34" charset="-122"/>
-                <a:cs typeface="Trade Gothic Next" pitchFamily="34" charset="-120"/>
-              </a:rPr>
-              <a:t>Sodium is a common contaminant.</a:t>
-            </a:r>
-            <a:endParaRPr lang="en-US" sz="1700" dirty="0"/>
-          </a:p>
-        </p:txBody>
-      </p:sp>
-      <p:sp>
-        <p:nvSpPr>
-          <p:cNvPr id="4" name="Text 5"/>
-          <p:cNvSpPr txBox="1"/>
-          <p:nvPr>
-            <p:ph idx="109" type="body" hasCustomPrompt="1"/>
-          </p:nvPr>
-        </p:nvSpPr>
-        <p:spPr>
-          <a:xfrm>
-            <a:off x="5276088" y="2560320"/>
-            <a:ext cx="2752344" cy="219456"/>
-          </a:xfrm>
-          <a:prstGeom prst="rect">
-            <a:avLst/>
-          </a:prstGeom>
-          <a:noFill/>
-          <a:ln/>
-        </p:spPr>
-        <p:txBody>
-          <a:bodyPr wrap="square" lIns="0" tIns="0" rIns="0" bIns="0" rtlCol="0"/>
-          <a:lstStyle/>
-          <a:p>
-            <a:pPr indent="0" marL="0">
-              <a:buNone/>
-            </a:pPr>
-            <a:r>
-              <a:rPr lang="en-US" sz="1200" b="1" spc="120" kern="0" dirty="0">
-                <a:solidFill>
-                  <a:srgbClr val="2E3338"/>
-                </a:solidFill>
-                <a:latin typeface="Trade Gothic Next" pitchFamily="34" charset="0"/>
-                <a:ea typeface="Trade Gothic Next" pitchFamily="34" charset="-122"/>
-                <a:cs typeface="Trade Gothic Next" pitchFamily="34" charset="-120"/>
-              </a:rPr>
-              <a:t>SETUP</a:t>
-            </a:r>
-            <a:endParaRPr lang="en-US" sz="1200" dirty="0"/>
-          </a:p>
-        </p:txBody>
-      </p:sp>
-      <p:sp>
-        <p:nvSpPr>
-          <p:cNvPr id="5" name="Text 5"/>
-          <p:cNvSpPr txBox="1"/>
-          <p:nvPr>
-            <p:ph idx="110" type="body" hasCustomPrompt="1"/>
-          </p:nvPr>
-        </p:nvSpPr>
-        <p:spPr>
-          <a:xfrm>
-            <a:off x="5276088" y="2852928"/>
-            <a:ext cx="2752344" cy="1901952"/>
-          </a:xfrm>
-          <a:prstGeom prst="rect">
-            <a:avLst/>
-          </a:prstGeom>
-          <a:noFill/>
-          <a:ln/>
-        </p:spPr>
-        <p:txBody>
-          <a:bodyPr wrap="square" lIns="0" tIns="0" rIns="0" bIns="0" rtlCol="0"/>
-          <a:lstStyle/>
-          <a:p>
-            <a:pPr indent="0" marL="0">
-              <a:buNone/>
-            </a:pPr>
-            <a:r>
-              <a:rPr lang="en-US" sz="1600" dirty="0">
-                <a:solidFill>
-                  <a:srgbClr val="14161B"/>
-                </a:solidFill>
-                <a:latin typeface="Trade Gothic Next" pitchFamily="34" charset="0"/>
-                <a:ea typeface="Trade Gothic Next" pitchFamily="34" charset="-122"/>
-                <a:cs typeface="Trade Gothic Next" pitchFamily="34" charset="-120"/>
-              </a:rPr>
-              <a:t>Match each color</a:t>
-            </a:r>
-            <a:endParaRPr lang="en-US" sz="1600" dirty="0"/>
-          </a:p>
-          <a:p>
-            <a:pPr indent="0" marL="0">
-              <a:buNone/>
-            </a:pPr>
-            <a:r>
-              <a:rPr lang="en-US" sz="1600" dirty="0">
-                <a:solidFill>
-                  <a:srgbClr val="14161B"/>
-                </a:solidFill>
-                <a:latin typeface="Trade Gothic Next" pitchFamily="34" charset="0"/>
-                <a:ea typeface="Trade Gothic Next" pitchFamily="34" charset="-122"/>
-                <a:cs typeface="Trade Gothic Next" pitchFamily="34" charset="-120"/>
-              </a:rPr>
-              <a:t>to the table.</a:t>
-            </a:r>
-            <a:endParaRPr lang="en-US" sz="1600" dirty="0"/>
-          </a:p>
-          <a:p>
-            <a:pPr indent="0" marL="0">
-              <a:buNone/>
-            </a:pPr>
-            <a:r>
-              <a:rPr lang="en-US" sz="1600" dirty="0">
-                <a:solidFill>
-                  <a:srgbClr val="14161B"/>
-                </a:solidFill>
-                <a:latin typeface="Trade Gothic Next" pitchFamily="34" charset="0"/>
-                <a:ea typeface="Trade Gothic Next" pitchFamily="34" charset="-122"/>
-                <a:cs typeface="Trade Gothic Next" pitchFamily="34" charset="-120"/>
-              </a:rPr>
-              <a:t>Na</a:t>
-            </a:r>
-            <a:pPr indent="0" marL="0">
-              <a:buNone/>
-            </a:pPr>
-            <a:r>
-              <a:rPr lang="en-US" sz="1600" baseline="30000" dirty="0">
-                <a:solidFill>
-                  <a:srgbClr val="14161B"/>
-                </a:solidFill>
-                <a:latin typeface="Trade Gothic Next" pitchFamily="34" charset="0"/>
-                <a:ea typeface="Trade Gothic Next" pitchFamily="34" charset="-122"/>
-                <a:cs typeface="Trade Gothic Next" pitchFamily="34" charset="-120"/>
-              </a:rPr>
-              <a:t>+</a:t>
-            </a:r>
-            <a:pPr indent="0" marL="0">
-              <a:buNone/>
-            </a:pPr>
-            <a:r>
-              <a:rPr lang="en-US" sz="1600" dirty="0">
-                <a:solidFill>
-                  <a:srgbClr val="14161B"/>
-                </a:solidFill>
-                <a:latin typeface="Trade Gothic Next" pitchFamily="34" charset="0"/>
-                <a:ea typeface="Trade Gothic Next" pitchFamily="34" charset="-122"/>
-                <a:cs typeface="Trade Gothic Next" pitchFamily="34" charset="-120"/>
-              </a:rPr>
-              <a:t> gives yellow.</a:t>
-            </a:r>
-            <a:endParaRPr lang="en-US" sz="1600" dirty="0"/>
-          </a:p>
-        </p:txBody>
-      </p:sp>
-      <p:sp>
-        <p:nvSpPr>
-          <p:cNvPr id="6" name="Text 7"/>
-          <p:cNvSpPr txBox="1"/>
-          <p:nvPr>
-            <p:ph idx="113" type="body" hasCustomPrompt="1"/>
-          </p:nvPr>
-        </p:nvSpPr>
-        <p:spPr>
-          <a:xfrm>
-            <a:off x="8613648" y="2871216"/>
-            <a:ext cx="2688336" cy="1920240"/>
-          </a:xfrm>
-          <a:prstGeom prst="rect">
-            <a:avLst/>
-          </a:prstGeom>
-          <a:noFill/>
-          <a:ln/>
-        </p:spPr>
-        <p:txBody>
-          <a:bodyPr wrap="square" lIns="0" tIns="0" rIns="0" bIns="0" rtlCol="0"/>
-          <a:lstStyle/>
-          <a:p>
-            <a:pPr indent="0" marL="0">
-              <a:buNone/>
-            </a:pPr>
-            <a:r>
-              <a:rPr lang="en-US" sz="1900" dirty="0">
-                <a:solidFill>
-                  <a:srgbClr val="14161B"/>
-                </a:solidFill>
-                <a:latin typeface="Trade Gothic Next" pitchFamily="34" charset="0"/>
-                <a:ea typeface="Trade Gothic Next" pitchFamily="34" charset="-122"/>
-                <a:cs typeface="Trade Gothic Next" pitchFamily="34" charset="-120"/>
-              </a:rPr>
-              <a:t>Salt A: K</a:t>
-            </a:r>
-            <a:pPr indent="0" marL="0">
-              <a:buNone/>
-            </a:pPr>
-            <a:r>
-              <a:rPr lang="en-US" sz="1900" baseline="30000" dirty="0">
-                <a:solidFill>
-                  <a:srgbClr val="14161B"/>
-                </a:solidFill>
-                <a:latin typeface="Trade Gothic Next" pitchFamily="34" charset="0"/>
-                <a:ea typeface="Trade Gothic Next" pitchFamily="34" charset="-122"/>
-                <a:cs typeface="Trade Gothic Next" pitchFamily="34" charset="-120"/>
-              </a:rPr>
-              <a:t>+</a:t>
-            </a:r>
-            <a:pPr indent="0" marL="0">
-              <a:buNone/>
-            </a:pPr>
-            <a:r>
-              <a:rPr lang="en-US" sz="1900" dirty="0">
-                <a:solidFill>
-                  <a:srgbClr val="14161B"/>
-                </a:solidFill>
-                <a:latin typeface="Trade Gothic Next" pitchFamily="34" charset="0"/>
-                <a:ea typeface="Trade Gothic Next" pitchFamily="34" charset="-122"/>
-                <a:cs typeface="Trade Gothic Next" pitchFamily="34" charset="-120"/>
-              </a:rPr>
-              <a:t> (lilac)</a:t>
-            </a:r>
-            <a:endParaRPr lang="en-US" sz="1900" dirty="0"/>
-          </a:p>
-          <a:p>
-            <a:pPr indent="0" marL="0">
-              <a:buNone/>
-            </a:pPr>
-            <a:r>
-              <a:rPr lang="en-US" sz="1900" dirty="0">
-                <a:solidFill>
-                  <a:srgbClr val="14161B"/>
-                </a:solidFill>
-                <a:latin typeface="Trade Gothic Next" pitchFamily="34" charset="0"/>
-                <a:ea typeface="Trade Gothic Next" pitchFamily="34" charset="-122"/>
-                <a:cs typeface="Trade Gothic Next" pitchFamily="34" charset="-120"/>
-              </a:rPr>
-              <a:t>Yellow trace: Na</a:t>
-            </a:r>
-            <a:pPr indent="0" marL="0">
-              <a:buNone/>
-            </a:pPr>
-            <a:r>
-              <a:rPr lang="en-US" sz="1900" baseline="30000" dirty="0">
-                <a:solidFill>
-                  <a:srgbClr val="14161B"/>
-                </a:solidFill>
-                <a:latin typeface="Trade Gothic Next" pitchFamily="34" charset="0"/>
-                <a:ea typeface="Trade Gothic Next" pitchFamily="34" charset="-122"/>
-                <a:cs typeface="Trade Gothic Next" pitchFamily="34" charset="-120"/>
-              </a:rPr>
-              <a:t>+</a:t>
-            </a:r>
-            <a:endParaRPr lang="en-US" sz="1900" dirty="0"/>
-          </a:p>
-          <a:p>
-            <a:pPr indent="0" marL="0">
-              <a:buNone/>
-            </a:pPr>
-            <a:r>
-              <a:rPr lang="en-US" sz="1900" dirty="0">
-                <a:solidFill>
-                  <a:srgbClr val="14161B"/>
-                </a:solidFill>
-                <a:latin typeface="Trade Gothic Next" pitchFamily="34" charset="0"/>
-                <a:ea typeface="Trade Gothic Next" pitchFamily="34" charset="-122"/>
-                <a:cs typeface="Trade Gothic Next" pitchFamily="34" charset="-120"/>
-              </a:rPr>
-              <a:t>Salt B: Ca</a:t>
-            </a:r>
-            <a:pPr indent="0" marL="0">
-              <a:buNone/>
-            </a:pPr>
-            <a:r>
-              <a:rPr lang="en-US" sz="1900" baseline="30000" dirty="0">
-                <a:solidFill>
-                  <a:srgbClr val="14161B"/>
-                </a:solidFill>
-                <a:latin typeface="Trade Gothic Next" pitchFamily="34" charset="0"/>
-                <a:ea typeface="Trade Gothic Next" pitchFamily="34" charset="-122"/>
-                <a:cs typeface="Trade Gothic Next" pitchFamily="34" charset="-120"/>
-              </a:rPr>
-              <a:t>2+</a:t>
-            </a:r>
-            <a:pPr indent="0" marL="0">
-              <a:buNone/>
-            </a:pPr>
-            <a:r>
-              <a:rPr lang="en-US" sz="1900" dirty="0">
-                <a:solidFill>
-                  <a:srgbClr val="14161B"/>
-                </a:solidFill>
-                <a:latin typeface="Trade Gothic Next" pitchFamily="34" charset="0"/>
-                <a:ea typeface="Trade Gothic Next" pitchFamily="34" charset="-122"/>
-                <a:cs typeface="Trade Gothic Next" pitchFamily="34" charset="-120"/>
-              </a:rPr>
-              <a:t> (orange-red)</a:t>
-            </a:r>
-            <a:endParaRPr lang="en-US" sz="1900" dirty="0"/>
-          </a:p>
-          <a:p>
-            <a:pPr indent="0" marL="0">
-              <a:buNone/>
-            </a:pPr>
-            <a:r>
-              <a:rPr lang="en-US" sz="1900" dirty="0">
-                <a:solidFill>
-                  <a:srgbClr val="14161B"/>
-                </a:solidFill>
-                <a:latin typeface="Trade Gothic Next" pitchFamily="34" charset="0"/>
-                <a:ea typeface="Trade Gothic Next" pitchFamily="34" charset="-122"/>
-                <a:cs typeface="Trade Gothic Next" pitchFamily="34" charset="-120"/>
-              </a:rPr>
-              <a:t>Sr</a:t>
-            </a:r>
-            <a:pPr indent="0" marL="0">
-              <a:buNone/>
-            </a:pPr>
-            <a:r>
-              <a:rPr lang="en-US" sz="1900" baseline="30000" dirty="0">
-                <a:solidFill>
-                  <a:srgbClr val="14161B"/>
-                </a:solidFill>
-                <a:latin typeface="Trade Gothic Next" pitchFamily="34" charset="0"/>
-                <a:ea typeface="Trade Gothic Next" pitchFamily="34" charset="-122"/>
-                <a:cs typeface="Trade Gothic Next" pitchFamily="34" charset="-120"/>
-              </a:rPr>
-              <a:t>2+</a:t>
-            </a:r>
-            <a:pPr indent="0" marL="0">
-              <a:buNone/>
-            </a:pPr>
-            <a:r>
-              <a:rPr lang="en-US" sz="1900" dirty="0">
-                <a:solidFill>
-                  <a:srgbClr val="14161B"/>
-                </a:solidFill>
-                <a:latin typeface="Trade Gothic Next" pitchFamily="34" charset="0"/>
-                <a:ea typeface="Trade Gothic Next" pitchFamily="34" charset="-122"/>
-                <a:cs typeface="Trade Gothic Next" pitchFamily="34" charset="-120"/>
-              </a:rPr>
-              <a:t> looks similar</a:t>
-            </a:r>
-            <a:endParaRPr lang="en-US" sz="1900" dirty="0"/>
-          </a:p>
-        </p:txBody>
-      </p:sp>
-      <p:sp>
-        <p:nvSpPr>
-          <p:cNvPr id="7" name="Text 9"/>
-          <p:cNvSpPr txBox="1"/>
-          <p:nvPr>
-            <p:ph idx="116" type="body" hasCustomPrompt="1"/>
-          </p:nvPr>
-        </p:nvSpPr>
-        <p:spPr>
-          <a:xfrm>
-            <a:off x="2240280" y="5212080"/>
-            <a:ext cx="8991295" cy="402336"/>
-          </a:xfrm>
-          <a:prstGeom prst="rect">
-            <a:avLst/>
-          </a:prstGeom>
-          <a:noFill/>
-          <a:ln/>
-        </p:spPr>
-        <p:txBody>
-          <a:bodyPr wrap="square" lIns="0" tIns="0" rIns="0" bIns="0" rtlCol="0" anchor="ctr"/>
-          <a:lstStyle/>
-          <a:p>
-            <a:pPr indent="0" marL="0">
-              <a:buNone/>
-            </a:pPr>
-            <a:r>
-              <a:rPr lang="en-US" sz="1600" b="1" dirty="0">
-                <a:solidFill>
-                  <a:srgbClr val="EDF0E5"/>
-                </a:solidFill>
-                <a:latin typeface="Trade Gothic Next" pitchFamily="34" charset="0"/>
-                <a:ea typeface="Trade Gothic Next" pitchFamily="34" charset="-122"/>
-                <a:cs typeface="Trade Gothic Next" pitchFamily="34" charset="-120"/>
-              </a:rPr>
-              <a:t>Flame colors can look alike, so a flame test alone does not prove the ion.</a:t>
-            </a:r>
-            <a:endParaRPr lang="en-US" sz="1600" dirty="0"/>
-          </a:p>
-        </p:txBody>
-      </p:sp>
-      <p:sp>
-        <p:nvSpPr>
-          <p:cNvPr id="8" name="Text 1"/>
-          <p:cNvSpPr txBox="1"/>
-          <p:nvPr>
-            <p:ph idx="101" type="body" hasCustomPrompt="1"/>
-          </p:nvPr>
-        </p:nvSpPr>
-        <p:spPr>
-          <a:xfrm>
-            <a:off x="685800" y="384048"/>
-            <a:ext cx="6400800" cy="237744"/>
-          </a:xfrm>
-          <a:prstGeom prst="rect">
-            <a:avLst/>
-          </a:prstGeom>
-          <a:noFill/>
-          <a:ln/>
-        </p:spPr>
-        <p:txBody>
-          <a:bodyPr wrap="square" lIns="0" tIns="0" rIns="0" bIns="0" rtlCol="0" anchor="ctr"/>
-          <a:lstStyle/>
-          <a:p>
-            <a:pPr indent="0" marL="0">
-              <a:buNone/>
-            </a:pPr>
-            <a:r>
-              <a:rPr lang="en-US" sz="1100" b="1" spc="160" kern="0" dirty="0">
-                <a:solidFill>
-                  <a:srgbClr val="14161B"/>
-                </a:solidFill>
-                <a:latin typeface="Trade Gothic Next" pitchFamily="34" charset="0"/>
-                <a:ea typeface="Trade Gothic Next" pitchFamily="34" charset="-122"/>
-                <a:cs typeface="Trade Gothic Next" pitchFamily="34" charset="-120"/>
-              </a:rPr>
-              <a:t>UNIT 02  •  CHEMISTRY</a:t>
-            </a:r>
-            <a:endParaRPr lang="en-US" sz="1100" dirty="0"/>
-          </a:p>
-        </p:txBody>
-      </p:sp>
-      <p:sp>
-        <p:nvSpPr>
-          <p:cNvPr id="9" name="Text 10"/>
-          <p:cNvSpPr txBox="1"/>
-          <p:nvPr>
-            <p:ph idx="118" type="body" hasCustomPrompt="1"/>
-          </p:nvPr>
-        </p:nvSpPr>
-        <p:spPr>
-          <a:xfrm>
-            <a:off x="8762695" y="6382512"/>
-            <a:ext cx="2743200" cy="237744"/>
-          </a:xfrm>
-          <a:prstGeom prst="rect">
-            <a:avLst/>
-          </a:prstGeom>
-          <a:noFill/>
-          <a:ln/>
-        </p:spPr>
-        <p:txBody>
-          <a:bodyPr wrap="square" lIns="0" tIns="0" rIns="0" bIns="0" rtlCol="0" anchor="ctr"/>
-          <a:lstStyle/>
-          <a:p>
-            <a:pPr algn="r" indent="0" marL="0">
-              <a:buNone/>
-            </a:pPr>
-            <a:r>
-              <a:rPr lang="en-US" sz="1000" b="1" spc="140" kern="0" dirty="0">
-                <a:solidFill>
-                  <a:srgbClr val="2E3338"/>
-                </a:solidFill>
-                <a:latin typeface="Trade Gothic Next" pitchFamily="34" charset="0"/>
-                <a:ea typeface="Trade Gothic Next" pitchFamily="34" charset="-122"/>
-                <a:cs typeface="Trade Gothic Next" pitchFamily="34" charset="-120"/>
-              </a:rPr>
-              <a:t>U02 • S02.5</a:t>
-            </a:r>
-            <a:endParaRPr lang="en-US" sz="1000" dirty="0"/>
-          </a:p>
-        </p:txBody>
-      </p:sp>
-      <p:sp>
-        <p:nvSpPr>
-          <p:cNvPr id="11" name="Text 4"/>
-          <p:cNvSpPr txBox="1"/>
-          <p:nvPr>
-            <p:ph idx="107" hasCustomPrompt="1"/>
-          </p:nvPr>
-        </p:nvSpPr>
-        <p:spPr>
-          <a:xfrm>
-            <a:off x="832104" y="2542032"/>
-            <a:ext cx="3867912" cy="2267712"/>
-          </a:xfrm>
-          <a:prstGeom prst="rect">
-            <a:avLst/>
-          </a:prstGeom>
-          <a:noFill/>
-          <a:ln/>
-        </p:spPr>
-        <p:txBody>
-          <a:bodyPr wrap="square" lIns="0" tIns="0" rIns="0" bIns="0" rtlCol="0" anchor="ctr"/>
-          <a:lstStyle/>
-          <a:p>
-            <a:pPr algn="ctr" indent="0" marL="0">
-              <a:buNone/>
-            </a:pPr>
-            <a:endParaRPr lang="en-US" sz="1200" dirty="0"/>
-          </a:p>
-        </p:txBody>
-      </p:sp>
-    </p:spTree>
-  </p:cSld>
-  <p:clrMapOvr>
-    <a:masterClrMapping/>
-  </p:clrMapOvr>
-</p:sld>
-</file>
-
-<file path=ppt/slides/slide21.xml><?xml version="1.0" encoding="utf-8"?>
-<p:sld xmlns:a="http://schemas.openxmlformats.org/drawingml/2006/main" xmlns:r="http://schemas.openxmlformats.org/officeDocument/2006/relationships" xmlns:p="http://schemas.openxmlformats.org/presentationml/2006/main">
-  <p:cSld name="Slide 21">
     <p:spTree>
       <p:nvGrpSpPr>
         <p:cNvPr id="1" name=""/>
@@ -20355,7 +19500,63 @@
                 <a:ea typeface="Trade Gothic Next" pitchFamily="34" charset="-122"/>
                 <a:cs typeface="Trade Gothic Next" pitchFamily="34" charset="-120"/>
               </a:rPr>
-              <a:t>Light we can see runs from about 400 nm to 700 nm.</a:t>
+              <a:t>Visible light runs from about 400 nm to 700 nm (4.00 × 10</a:t>
+            </a:r>
+            <a:pPr indent="0" marL="0">
+              <a:buNone/>
+            </a:pPr>
+            <a:r>
+              <a:rPr lang="en-US" sz="1700" baseline="30000" dirty="0">
+                <a:solidFill>
+                  <a:srgbClr val="2E3338"/>
+                </a:solidFill>
+                <a:latin typeface="Trade Gothic Next" pitchFamily="34" charset="0"/>
+                <a:ea typeface="Trade Gothic Next" pitchFamily="34" charset="-122"/>
+                <a:cs typeface="Trade Gothic Next" pitchFamily="34" charset="-120"/>
+              </a:rPr>
+              <a:t>−7</a:t>
+            </a:r>
+            <a:pPr indent="0" marL="0">
+              <a:buNone/>
+            </a:pPr>
+            <a:r>
+              <a:rPr lang="en-US" sz="1700" dirty="0">
+                <a:solidFill>
+                  <a:srgbClr val="2E3338"/>
+                </a:solidFill>
+                <a:latin typeface="Trade Gothic Next" pitchFamily="34" charset="0"/>
+                <a:ea typeface="Trade Gothic Next" pitchFamily="34" charset="-122"/>
+                <a:cs typeface="Trade Gothic Next" pitchFamily="34" charset="-120"/>
+              </a:rPr>
+              <a:t> m to 7.00 × 10</a:t>
+            </a:r>
+            <a:pPr indent="0" marL="0">
+              <a:buNone/>
+            </a:pPr>
+            <a:r>
+              <a:rPr lang="en-US" sz="1700" baseline="30000" dirty="0">
+                <a:solidFill>
+                  <a:srgbClr val="2E3338"/>
+                </a:solidFill>
+                <a:latin typeface="Trade Gothic Next" pitchFamily="34" charset="0"/>
+                <a:ea typeface="Trade Gothic Next" pitchFamily="34" charset="-122"/>
+                <a:cs typeface="Trade Gothic Next" pitchFamily="34" charset="-120"/>
+              </a:rPr>
+              <a:t>−7</a:t>
+            </a:r>
+            <a:pPr indent="0" marL="0">
+              <a:buNone/>
+            </a:pPr>
+            <a:r>
+              <a:rPr lang="en-US" sz="1700" dirty="0">
+                <a:solidFill>
+                  <a:srgbClr val="2E3338"/>
+                </a:solidFill>
+                <a:latin typeface="Trade Gothic Next" pitchFamily="34" charset="0"/>
+                <a:ea typeface="Trade Gothic Next" pitchFamily="34" charset="-122"/>
+                <a:cs typeface="Trade Gothic Next" pitchFamily="34" charset="-120"/>
+              </a:rPr>
+              <a:t> m).</a:t>
             </a:r>
             <a:endParaRPr lang="en-US" sz="1700" dirty="0"/>
           </a:p>
@@ -21299,7 +20500,7 @@
                 <a:ea typeface="Trade Gothic Next" pitchFamily="34" charset="-122"/>
                 <a:cs typeface="Trade Gothic Next" pitchFamily="34" charset="-120"/>
               </a:rPr>
-              <a:t>The Photon Energy Equation</a:t>
+              <a:t>Hot Solid or Hot Gas</a:t>
             </a:r>
             <a:endParaRPr lang="en-US" sz="2800" dirty="0"/>
           </a:p>
@@ -21340,7 +20541,7 @@
                 <a:ea typeface="Trade Gothic Next" pitchFamily="34" charset="-122"/>
                 <a:cs typeface="Trade Gothic Next" pitchFamily="34" charset="-120"/>
               </a:rPr>
-              <a:t>Energy goes up as wavelength goes down. Calculator provided.</a:t>
+              <a:t>What is glowing decides what the spectrum looks like.</a:t>
             </a:r>
             <a:endParaRPr lang="en-US" sz="1700" dirty="0"/>
           </a:p>
@@ -21348,16 +20549,16 @@
       </p:sp>
       <p:sp>
         <p:nvSpPr>
-          <p:cNvPr id="4" name="Text 6"/>
-          <p:cNvSpPr txBox="1"/>
-          <p:nvPr>
-            <p:ph idx="110" type="body" hasCustomPrompt="1"/>
-          </p:nvPr>
-        </p:nvSpPr>
-        <p:spPr>
-          <a:xfrm>
-            <a:off x="5779008" y="2743200"/>
-            <a:ext cx="5522976" cy="502920"/>
+          <p:cNvPr id="4" name="Text 4"/>
+          <p:cNvSpPr txBox="1"/>
+          <p:nvPr>
+            <p:ph idx="108" type="body" hasCustomPrompt="1"/>
+          </p:nvPr>
+        </p:nvSpPr>
+        <p:spPr>
+          <a:xfrm>
+            <a:off x="5733288" y="2542032"/>
+            <a:ext cx="2752344" cy="219456"/>
           </a:xfrm>
           <a:prstGeom prst="rect">
             <a:avLst/>
@@ -21373,83 +20574,170 @@
               <a:buNone/>
             </a:pPr>
             <a:r>
+              <a:rPr lang="en-US" sz="1200" b="1" spc="120" kern="0" dirty="0">
+                <a:solidFill>
+                  <a:srgbClr val="2E3338"/>
+                </a:solidFill>
+                <a:latin typeface="Trade Gothic Next" pitchFamily="34" charset="0"/>
+                <a:ea typeface="Trade Gothic Next" pitchFamily="34" charset="-122"/>
+                <a:cs typeface="Trade Gothic Next" pitchFamily="34" charset="-120"/>
+              </a:rPr>
+              <a:t>HOT SOLID</a:t>
+            </a:r>
+            <a:endParaRPr lang="en-US" sz="1200" dirty="0"/>
+          </a:p>
+        </p:txBody>
+      </p:sp>
+      <p:sp>
+        <p:nvSpPr>
+          <p:cNvPr id="5" name="Text 4"/>
+          <p:cNvSpPr txBox="1"/>
+          <p:nvPr>
+            <p:ph idx="109" type="body" hasCustomPrompt="1"/>
+          </p:nvPr>
+        </p:nvSpPr>
+        <p:spPr>
+          <a:xfrm>
+            <a:off x="5733288" y="2834640"/>
+            <a:ext cx="2752344" cy="1965960"/>
+          </a:xfrm>
+          <a:prstGeom prst="rect">
+            <a:avLst/>
+          </a:prstGeom>
+          <a:noFill/>
+          <a:ln/>
+        </p:spPr>
+        <p:txBody>
+          <a:bodyPr wrap="square" lIns="0" tIns="0" rIns="0" bIns="0" rtlCol="0"/>
+          <a:lstStyle/>
+          <a:p>
+            <a:pPr indent="0" marL="0">
+              <a:buNone/>
+            </a:pPr>
+            <a:r>
               <a:rPr lang="en-US" sz="1600" dirty="0">
                 <a:solidFill>
+                  <a:srgbClr val="14161B"/>
+                </a:solidFill>
+                <a:latin typeface="Trade Gothic Next" pitchFamily="34" charset="0"/>
+                <a:ea typeface="Trade Gothic Next" pitchFamily="34" charset="-122"/>
+                <a:cs typeface="Trade Gothic Next" pitchFamily="34" charset="-120"/>
+              </a:rPr>
+              <a:t>A glowing filament.</a:t>
+            </a:r>
+            <a:endParaRPr lang="en-US" sz="1600" dirty="0"/>
+          </a:p>
+          <a:p>
+            <a:pPr indent="0" marL="0">
+              <a:buNone/>
+            </a:pPr>
+            <a:endParaRPr lang="en-US" sz="1600" dirty="0"/>
+          </a:p>
+          <a:p>
+            <a:pPr indent="0" marL="0">
+              <a:buNone/>
+            </a:pPr>
+            <a:r>
+              <a:rPr lang="en-US" sz="1600" dirty="0">
+                <a:solidFill>
+                  <a:srgbClr val="14161B"/>
+                </a:solidFill>
+                <a:latin typeface="Trade Gothic Next" pitchFamily="34" charset="0"/>
+                <a:ea typeface="Trade Gothic Next" pitchFamily="34" charset="-122"/>
+                <a:cs typeface="Trade Gothic Next" pitchFamily="34" charset="-120"/>
+              </a:rPr>
+              <a:t>Gives every color, no gaps.</a:t>
+            </a:r>
+            <a:endParaRPr lang="en-US" sz="1600" dirty="0"/>
+          </a:p>
+        </p:txBody>
+      </p:sp>
+      <p:sp>
+        <p:nvSpPr>
+          <p:cNvPr id="6" name="Text 5"/>
+          <p:cNvSpPr txBox="1"/>
+          <p:nvPr>
+            <p:ph idx="111" type="body" hasCustomPrompt="1"/>
+          </p:nvPr>
+        </p:nvSpPr>
+        <p:spPr>
+          <a:xfrm>
+            <a:off x="9116568" y="2542032"/>
+            <a:ext cx="2752344" cy="219456"/>
+          </a:xfrm>
+          <a:prstGeom prst="rect">
+            <a:avLst/>
+          </a:prstGeom>
+          <a:noFill/>
+          <a:ln/>
+        </p:spPr>
+        <p:txBody>
+          <a:bodyPr wrap="square" lIns="0" tIns="0" rIns="0" bIns="0" rtlCol="0"/>
+          <a:lstStyle/>
+          <a:p>
+            <a:pPr indent="0" marL="0">
+              <a:buNone/>
+            </a:pPr>
+            <a:r>
+              <a:rPr lang="en-US" sz="1200" b="1" spc="120" kern="0" dirty="0">
+                <a:solidFill>
+                  <a:srgbClr val="BDB6AA"/>
+                </a:solidFill>
+                <a:latin typeface="Trade Gothic Next" pitchFamily="34" charset="0"/>
+                <a:ea typeface="Trade Gothic Next" pitchFamily="34" charset="-122"/>
+                <a:cs typeface="Trade Gothic Next" pitchFamily="34" charset="-120"/>
+              </a:rPr>
+              <a:t>HOT GAS</a:t>
+            </a:r>
+            <a:endParaRPr lang="en-US" sz="1200" dirty="0"/>
+          </a:p>
+        </p:txBody>
+      </p:sp>
+      <p:sp>
+        <p:nvSpPr>
+          <p:cNvPr id="7" name="Text 5"/>
+          <p:cNvSpPr txBox="1"/>
+          <p:nvPr>
+            <p:ph idx="112" type="body" hasCustomPrompt="1"/>
+          </p:nvPr>
+        </p:nvSpPr>
+        <p:spPr>
+          <a:xfrm>
+            <a:off x="9116568" y="2834640"/>
+            <a:ext cx="2752344" cy="1965960"/>
+          </a:xfrm>
+          <a:prstGeom prst="rect">
+            <a:avLst/>
+          </a:prstGeom>
+          <a:noFill/>
+          <a:ln/>
+        </p:spPr>
+        <p:txBody>
+          <a:bodyPr wrap="square" lIns="0" tIns="0" rIns="0" bIns="0" rtlCol="0"/>
+          <a:lstStyle/>
+          <a:p>
+            <a:pPr indent="0" marL="0">
+              <a:buNone/>
+            </a:pPr>
+            <a:r>
+              <a:rPr lang="en-US" sz="1600" dirty="0">
+                <a:solidFill>
                   <a:srgbClr val="EDF0E5"/>
                 </a:solidFill>
                 <a:latin typeface="Trade Gothic Next" pitchFamily="34" charset="0"/>
                 <a:ea typeface="Trade Gothic Next" pitchFamily="34" charset="-122"/>
                 <a:cs typeface="Trade Gothic Next" pitchFamily="34" charset="-120"/>
               </a:rPr>
-              <a:t>How much energy does one photon of a given wavelength carry?</a:t>
+              <a:t>Excited atoms in a tube.</a:t>
             </a:r>
             <a:endParaRPr lang="en-US" sz="1600" dirty="0"/>
           </a:p>
-        </p:txBody>
-      </p:sp>
-      <p:sp>
-        <p:nvSpPr>
-          <p:cNvPr id="5" name="Text 7"/>
-          <p:cNvSpPr txBox="1"/>
-          <p:nvPr>
-            <p:ph idx="112" type="body" hasCustomPrompt="1"/>
-          </p:nvPr>
-        </p:nvSpPr>
-        <p:spPr>
-          <a:xfrm>
-            <a:off x="5779008" y="3685032"/>
-            <a:ext cx="2468880" cy="219456"/>
-          </a:xfrm>
-          <a:prstGeom prst="rect">
-            <a:avLst/>
-          </a:prstGeom>
-          <a:noFill/>
-          <a:ln/>
-        </p:spPr>
-        <p:txBody>
-          <a:bodyPr wrap="square" lIns="0" tIns="0" rIns="0" bIns="0" rtlCol="0"/>
-          <a:lstStyle/>
-          <a:p>
-            <a:pPr indent="0" marL="0">
-              <a:buNone/>
-            </a:pPr>
-            <a:r>
-              <a:rPr lang="en-US" sz="1200" b="1" spc="120" kern="0" dirty="0">
-                <a:solidFill>
-                  <a:srgbClr val="2E3338"/>
-                </a:solidFill>
-                <a:latin typeface="Trade Gothic Next" pitchFamily="34" charset="0"/>
-                <a:ea typeface="Trade Gothic Next" pitchFamily="34" charset="-122"/>
-                <a:cs typeface="Trade Gothic Next" pitchFamily="34" charset="-120"/>
-              </a:rPr>
-              <a:t>GIVEN</a:t>
-            </a:r>
-            <a:endParaRPr lang="en-US" sz="1200" dirty="0"/>
-          </a:p>
-        </p:txBody>
-      </p:sp>
-      <p:sp>
-        <p:nvSpPr>
-          <p:cNvPr id="6" name="Text 7"/>
-          <p:cNvSpPr txBox="1"/>
-          <p:nvPr>
-            <p:ph idx="113" type="body" hasCustomPrompt="1"/>
-          </p:nvPr>
-        </p:nvSpPr>
-        <p:spPr>
-          <a:xfrm>
-            <a:off x="5779008" y="3977640"/>
-            <a:ext cx="2468880" cy="841248"/>
-          </a:xfrm>
-          <a:prstGeom prst="rect">
-            <a:avLst/>
-          </a:prstGeom>
-          <a:noFill/>
-          <a:ln/>
-        </p:spPr>
-        <p:txBody>
-          <a:bodyPr wrap="square" lIns="0" tIns="0" rIns="0" bIns="0" rtlCol="0"/>
-          <a:lstStyle/>
+          <a:p>
+            <a:pPr indent="0" marL="0">
+              <a:buNone/>
+            </a:pPr>
+            <a:endParaRPr lang="en-US" sz="1600" dirty="0"/>
+          </a:p>
           <a:p>
             <a:pPr indent="0" marL="0">
               <a:buNone/>
@@ -21457,296 +20745,62 @@
             <a:r>
               <a:rPr lang="en-US" sz="1600" dirty="0">
                 <a:solidFill>
-                  <a:srgbClr val="14161B"/>
-                </a:solidFill>
-                <a:latin typeface="Trade Gothic Next" pitchFamily="34" charset="0"/>
-                <a:ea typeface="Trade Gothic Next" pitchFamily="34" charset="-122"/>
-                <a:cs typeface="Trade Gothic Next" pitchFamily="34" charset="-120"/>
-              </a:rPr>
-              <a:t>h = 6.626 × 10</a:t>
-            </a:r>
-            <a:pPr indent="0" marL="0">
-              <a:buNone/>
-            </a:pPr>
-            <a:r>
-              <a:rPr lang="en-US" sz="1600" baseline="30000" dirty="0">
-                <a:solidFill>
-                  <a:srgbClr val="14161B"/>
-                </a:solidFill>
-                <a:latin typeface="Trade Gothic Next" pitchFamily="34" charset="0"/>
-                <a:ea typeface="Trade Gothic Next" pitchFamily="34" charset="-122"/>
-                <a:cs typeface="Trade Gothic Next" pitchFamily="34" charset="-120"/>
-              </a:rPr>
-              <a:t>−34</a:t>
-            </a:r>
-            <a:pPr indent="0" marL="0">
-              <a:buNone/>
-            </a:pPr>
-            <a:r>
-              <a:rPr lang="en-US" sz="1600" dirty="0">
-                <a:solidFill>
-                  <a:srgbClr val="14161B"/>
-                </a:solidFill>
-                <a:latin typeface="Trade Gothic Next" pitchFamily="34" charset="0"/>
-                <a:ea typeface="Trade Gothic Next" pitchFamily="34" charset="-122"/>
-                <a:cs typeface="Trade Gothic Next" pitchFamily="34" charset="-120"/>
-              </a:rPr>
-              <a:t> J·s</a:t>
+                  <a:srgbClr val="EDF0E5"/>
+                </a:solidFill>
+                <a:latin typeface="Trade Gothic Next" pitchFamily="34" charset="0"/>
+                <a:ea typeface="Trade Gothic Next" pitchFamily="34" charset="-122"/>
+                <a:cs typeface="Trade Gothic Next" pitchFamily="34" charset="-120"/>
+              </a:rPr>
+              <a:t>Give a few separate lines.</a:t>
             </a:r>
             <a:endParaRPr lang="en-US" sz="1600" dirty="0"/>
           </a:p>
-          <a:p>
-            <a:pPr indent="0" marL="0">
-              <a:buNone/>
-            </a:pPr>
-            <a:r>
-              <a:rPr lang="en-US" sz="1600" dirty="0">
-                <a:solidFill>
-                  <a:srgbClr val="14161B"/>
-                </a:solidFill>
-                <a:latin typeface="Trade Gothic Next" pitchFamily="34" charset="0"/>
-                <a:ea typeface="Trade Gothic Next" pitchFamily="34" charset="-122"/>
-                <a:cs typeface="Trade Gothic Next" pitchFamily="34" charset="-120"/>
-              </a:rPr>
-              <a:t>c = 3.00 × 10</a:t>
-            </a:r>
-            <a:pPr indent="0" marL="0">
-              <a:buNone/>
-            </a:pPr>
-            <a:r>
-              <a:rPr lang="en-US" sz="1600" baseline="30000" dirty="0">
-                <a:solidFill>
-                  <a:srgbClr val="14161B"/>
-                </a:solidFill>
-                <a:latin typeface="Trade Gothic Next" pitchFamily="34" charset="0"/>
-                <a:ea typeface="Trade Gothic Next" pitchFamily="34" charset="-122"/>
-                <a:cs typeface="Trade Gothic Next" pitchFamily="34" charset="-120"/>
-              </a:rPr>
-              <a:t>8</a:t>
-            </a:r>
-            <a:pPr indent="0" marL="0">
-              <a:buNone/>
-            </a:pPr>
-            <a:r>
-              <a:rPr lang="en-US" sz="1600" dirty="0">
-                <a:solidFill>
-                  <a:srgbClr val="14161B"/>
-                </a:solidFill>
-                <a:latin typeface="Trade Gothic Next" pitchFamily="34" charset="0"/>
-                <a:ea typeface="Trade Gothic Next" pitchFamily="34" charset="-122"/>
-                <a:cs typeface="Trade Gothic Next" pitchFamily="34" charset="-120"/>
-              </a:rPr>
-              <a:t> m/s</a:t>
+        </p:txBody>
+      </p:sp>
+      <p:sp>
+        <p:nvSpPr>
+          <p:cNvPr id="8" name="Text 7"/>
+          <p:cNvSpPr txBox="1"/>
+          <p:nvPr>
+            <p:ph idx="115" type="body" hasCustomPrompt="1"/>
+          </p:nvPr>
+        </p:nvSpPr>
+        <p:spPr>
+          <a:xfrm>
+            <a:off x="2240280" y="5394960"/>
+            <a:ext cx="8991295" cy="402336"/>
+          </a:xfrm>
+          <a:prstGeom prst="rect">
+            <a:avLst/>
+          </a:prstGeom>
+          <a:noFill/>
+          <a:ln/>
+        </p:spPr>
+        <p:txBody>
+          <a:bodyPr wrap="square" lIns="0" tIns="0" rIns="0" bIns="0" rtlCol="0" anchor="ctr"/>
+          <a:lstStyle/>
+          <a:p>
+            <a:pPr indent="0" marL="0">
+              <a:buNone/>
+            </a:pPr>
+            <a:r>
+              <a:rPr lang="en-US" sz="1600" b="1" dirty="0">
+                <a:solidFill>
+                  <a:srgbClr val="EDF0E5"/>
+                </a:solidFill>
+                <a:latin typeface="Trade Gothic Next" pitchFamily="34" charset="0"/>
+                <a:ea typeface="Trade Gothic Next" pitchFamily="34" charset="-122"/>
+                <a:cs typeface="Trade Gothic Next" pitchFamily="34" charset="-120"/>
+              </a:rPr>
+              <a:t>A hot solid gives a continuous spectrum. A hot gas gives a line spectrum.</a:t>
             </a:r>
             <a:endParaRPr lang="en-US" sz="1600" dirty="0"/>
           </a:p>
-          <a:p>
-            <a:pPr indent="0" marL="0">
-              <a:buNone/>
-            </a:pPr>
-            <a:r>
-              <a:rPr lang="en-US" sz="1600" dirty="0">
-                <a:solidFill>
-                  <a:srgbClr val="14161B"/>
-                </a:solidFill>
-                <a:latin typeface="Trade Gothic Next" pitchFamily="34" charset="0"/>
-                <a:ea typeface="Trade Gothic Next" pitchFamily="34" charset="-122"/>
-                <a:cs typeface="Trade Gothic Next" pitchFamily="34" charset="-120"/>
-              </a:rPr>
-              <a:t>1 nm = 1 × 10</a:t>
-            </a:r>
-            <a:pPr indent="0" marL="0">
-              <a:buNone/>
-            </a:pPr>
-            <a:r>
-              <a:rPr lang="en-US" sz="1600" baseline="30000" dirty="0">
-                <a:solidFill>
-                  <a:srgbClr val="14161B"/>
-                </a:solidFill>
-                <a:latin typeface="Trade Gothic Next" pitchFamily="34" charset="0"/>
-                <a:ea typeface="Trade Gothic Next" pitchFamily="34" charset="-122"/>
-                <a:cs typeface="Trade Gothic Next" pitchFamily="34" charset="-120"/>
-              </a:rPr>
-              <a:t>−9</a:t>
-            </a:r>
-            <a:pPr indent="0" marL="0">
-              <a:buNone/>
-            </a:pPr>
-            <a:r>
-              <a:rPr lang="en-US" sz="1600" dirty="0">
-                <a:solidFill>
-                  <a:srgbClr val="14161B"/>
-                </a:solidFill>
-                <a:latin typeface="Trade Gothic Next" pitchFamily="34" charset="0"/>
-                <a:ea typeface="Trade Gothic Next" pitchFamily="34" charset="-122"/>
-                <a:cs typeface="Trade Gothic Next" pitchFamily="34" charset="-120"/>
-              </a:rPr>
-              <a:t> m</a:t>
-            </a:r>
-            <a:endParaRPr lang="en-US" sz="1600" dirty="0"/>
-          </a:p>
-        </p:txBody>
-      </p:sp>
-      <p:sp>
-        <p:nvSpPr>
-          <p:cNvPr id="7" name="Text 8"/>
-          <p:cNvSpPr txBox="1"/>
-          <p:nvPr>
-            <p:ph idx="115" type="body" hasCustomPrompt="1"/>
-          </p:nvPr>
-        </p:nvSpPr>
-        <p:spPr>
-          <a:xfrm>
-            <a:off x="8833104" y="3685032"/>
-            <a:ext cx="2468880" cy="219456"/>
-          </a:xfrm>
-          <a:prstGeom prst="rect">
-            <a:avLst/>
-          </a:prstGeom>
-          <a:noFill/>
-          <a:ln/>
-        </p:spPr>
-        <p:txBody>
-          <a:bodyPr wrap="square" lIns="0" tIns="0" rIns="0" bIns="0" rtlCol="0"/>
-          <a:lstStyle/>
-          <a:p>
-            <a:pPr indent="0" marL="0">
-              <a:buNone/>
-            </a:pPr>
-            <a:r>
-              <a:rPr lang="en-US" sz="1200" b="1" spc="120" kern="0" dirty="0">
-                <a:solidFill>
-                  <a:srgbClr val="2E3338"/>
-                </a:solidFill>
-                <a:latin typeface="Trade Gothic Next" pitchFamily="34" charset="0"/>
-                <a:ea typeface="Trade Gothic Next" pitchFamily="34" charset="-122"/>
-                <a:cs typeface="Trade Gothic Next" pitchFamily="34" charset="-120"/>
-              </a:rPr>
-              <a:t>EQUATION</a:t>
-            </a:r>
-            <a:endParaRPr lang="en-US" sz="1200" dirty="0"/>
-          </a:p>
-        </p:txBody>
-      </p:sp>
-      <p:sp>
-        <p:nvSpPr>
-          <p:cNvPr id="8" name="Text 8"/>
-          <p:cNvSpPr txBox="1"/>
-          <p:nvPr>
-            <p:ph idx="116" type="body" hasCustomPrompt="1"/>
-          </p:nvPr>
-        </p:nvSpPr>
-        <p:spPr>
-          <a:xfrm>
-            <a:off x="8833104" y="3977640"/>
-            <a:ext cx="2468880" cy="841248"/>
-          </a:xfrm>
-          <a:prstGeom prst="rect">
-            <a:avLst/>
-          </a:prstGeom>
-          <a:noFill/>
-          <a:ln/>
-        </p:spPr>
-        <p:txBody>
-          <a:bodyPr wrap="square" lIns="0" tIns="0" rIns="0" bIns="0" rtlCol="0"/>
-          <a:lstStyle/>
-          <a:p>
-            <a:pPr indent="0" marL="0">
-              <a:buNone/>
-            </a:pPr>
-            <a:r>
-              <a:rPr lang="en-US" sz="1600" dirty="0">
-                <a:solidFill>
-                  <a:srgbClr val="14161B"/>
-                </a:solidFill>
-                <a:latin typeface="Trade Gothic Next" pitchFamily="34" charset="0"/>
-                <a:ea typeface="Trade Gothic Next" pitchFamily="34" charset="-122"/>
-                <a:cs typeface="Trade Gothic Next" pitchFamily="34" charset="-120"/>
-              </a:rPr>
-              <a:t>E = hc ÷ wavelength</a:t>
-            </a:r>
-            <a:endParaRPr lang="en-US" sz="1600" dirty="0"/>
-          </a:p>
-          <a:p>
-            <a:pPr indent="0" marL="0">
-              <a:buNone/>
-            </a:pPr>
-            <a:r>
-              <a:rPr lang="en-US" sz="1600" dirty="0">
-                <a:solidFill>
-                  <a:srgbClr val="14161B"/>
-                </a:solidFill>
-                <a:latin typeface="Trade Gothic Next" pitchFamily="34" charset="0"/>
-                <a:ea typeface="Trade Gothic Next" pitchFamily="34" charset="-122"/>
-                <a:cs typeface="Trade Gothic Next" pitchFamily="34" charset="-120"/>
-              </a:rPr>
-              <a:t>E = h × frequency</a:t>
-            </a:r>
-            <a:endParaRPr lang="en-US" sz="1600" dirty="0"/>
-          </a:p>
-          <a:p>
-            <a:pPr indent="0" marL="0">
-              <a:buNone/>
-            </a:pPr>
-            <a:r>
-              <a:rPr lang="en-US" sz="1600" dirty="0">
-                <a:solidFill>
-                  <a:srgbClr val="14161B"/>
-                </a:solidFill>
-                <a:latin typeface="Trade Gothic Next" pitchFamily="34" charset="0"/>
-                <a:ea typeface="Trade Gothic Next" pitchFamily="34" charset="-122"/>
-                <a:cs typeface="Trade Gothic Next" pitchFamily="34" charset="-120"/>
-              </a:rPr>
-              <a:t>c = wavelength × frequency</a:t>
-            </a:r>
-            <a:endParaRPr lang="en-US" sz="1600" dirty="0"/>
-          </a:p>
-        </p:txBody>
-      </p:sp>
-      <p:sp>
-        <p:nvSpPr>
-          <p:cNvPr id="9" name="Text 10"/>
-          <p:cNvSpPr txBox="1"/>
-          <p:nvPr>
-            <p:ph idx="119" type="body" hasCustomPrompt="1"/>
-          </p:nvPr>
-        </p:nvSpPr>
-        <p:spPr>
-          <a:xfrm>
-            <a:off x="5779008" y="5504688"/>
-            <a:ext cx="5522976" cy="384048"/>
-          </a:xfrm>
-          <a:prstGeom prst="rect">
-            <a:avLst/>
-          </a:prstGeom>
-          <a:noFill/>
-          <a:ln/>
-        </p:spPr>
-        <p:txBody>
-          <a:bodyPr wrap="square" lIns="0" tIns="0" rIns="0" bIns="0" rtlCol="0"/>
-          <a:lstStyle/>
-          <a:p>
-            <a:pPr indent="0" marL="0">
-              <a:buNone/>
-            </a:pPr>
-            <a:r>
-              <a:rPr lang="en-US" sz="2000" b="1" dirty="0">
-                <a:solidFill>
-                  <a:srgbClr val="14161B"/>
-                </a:solidFill>
-                <a:latin typeface="Trade Gothic Next" pitchFamily="34" charset="0"/>
-                <a:ea typeface="Trade Gothic Next" pitchFamily="34" charset="-122"/>
-                <a:cs typeface="Trade Gothic Next" pitchFamily="34" charset="-120"/>
-              </a:rPr>
-              <a:t>E in joules (J)</a:t>
-            </a:r>
-            <a:endParaRPr lang="en-US" sz="2000" dirty="0"/>
-          </a:p>
-        </p:txBody>
-      </p:sp>
-      <p:sp>
-        <p:nvSpPr>
-          <p:cNvPr id="10" name="Text 1"/>
+        </p:txBody>
+      </p:sp>
+      <p:sp>
+        <p:nvSpPr>
+          <p:cNvPr id="9" name="Text 1"/>
           <p:cNvSpPr txBox="1"/>
           <p:nvPr>
             <p:ph idx="101" type="body" hasCustomPrompt="1"/>
@@ -21787,10 +20841,10 @@
       </p:sp>
       <p:sp>
         <p:nvSpPr>
-          <p:cNvPr id="11" name="Text 11"/>
-          <p:cNvSpPr txBox="1"/>
-          <p:nvPr>
-            <p:ph idx="121" type="body" hasCustomPrompt="1"/>
+          <p:cNvPr id="10" name="Text 8"/>
+          <p:cNvSpPr txBox="1"/>
+          <p:nvPr>
+            <p:ph idx="117" type="body" hasCustomPrompt="1"/>
           </p:nvPr>
         </p:nvSpPr>
         <p:spPr>
@@ -21828,16 +20882,16 @@
       </p:sp>
       <p:sp>
         <p:nvSpPr>
-          <p:cNvPr id="13" name="Text 4"/>
-          <p:cNvSpPr txBox="1"/>
-          <p:nvPr>
-            <p:ph idx="107" hasCustomPrompt="1"/>
-          </p:nvPr>
-        </p:nvSpPr>
-        <p:spPr>
-          <a:xfrm>
-            <a:off x="832104" y="2542032"/>
-            <a:ext cx="4370832" cy="2331720"/>
+          <p:cNvPr id="12" name="Text 3"/>
+          <p:cNvSpPr txBox="1"/>
+          <p:nvPr>
+            <p:ph idx="106" hasCustomPrompt="1"/>
+          </p:nvPr>
+        </p:nvSpPr>
+        <p:spPr>
+          <a:xfrm>
+            <a:off x="685800" y="2377440"/>
+            <a:ext cx="4663440" cy="2624328"/>
           </a:xfrm>
           <a:prstGeom prst="rect">
             <a:avLst/>
@@ -21867,476 +20921,6 @@
 <file path=ppt/slides/slide7.xml><?xml version="1.0" encoding="utf-8"?>
 <p:sld xmlns:a="http://schemas.openxmlformats.org/drawingml/2006/main" xmlns:r="http://schemas.openxmlformats.org/officeDocument/2006/relationships" xmlns:p="http://schemas.openxmlformats.org/presentationml/2006/main">
   <p:cSld name="Slide 7">
-    <p:spTree>
-      <p:nvGrpSpPr>
-        <p:cNvPr id="1" name=""/>
-        <p:cNvGrpSpPr/>
-        <p:nvPr/>
-      </p:nvGrpSpPr>
-      <p:grpSpPr>
-        <a:xfrm>
-          <a:off x="0" y="0"/>
-          <a:ext cx="0" cy="0"/>
-          <a:chOff x="0" y="0"/>
-          <a:chExt cx="0" cy="0"/>
-        </a:xfrm>
-      </p:grpSpPr>
-      <p:sp>
-        <p:nvSpPr>
-          <p:cNvPr id="2" name="Text 2"/>
-          <p:cNvSpPr txBox="1"/>
-          <p:nvPr>
-            <p:ph idx="103" type="title" hasCustomPrompt="1"/>
-          </p:nvPr>
-        </p:nvSpPr>
-        <p:spPr>
-          <a:xfrm>
-            <a:off x="685800" y="932688"/>
-            <a:ext cx="10820095" cy="868680"/>
-          </a:xfrm>
-          <a:prstGeom prst="rect">
-            <a:avLst/>
-          </a:prstGeom>
-          <a:noFill/>
-          <a:ln/>
-        </p:spPr>
-        <p:txBody>
-          <a:bodyPr wrap="square" lIns="0" tIns="0" rIns="0" bIns="0" rtlCol="0" anchor="t"/>
-          <a:lstStyle/>
-          <a:p>
-            <a:pPr algn="l" indent="0" marL="0">
-              <a:buNone/>
-            </a:pPr>
-            <a:r>
-              <a:rPr lang="en-US" sz="2800" b="1" dirty="0">
-                <a:solidFill>
-                  <a:srgbClr val="14161B"/>
-                </a:solidFill>
-                <a:latin typeface="Trade Gothic Next" pitchFamily="34" charset="0"/>
-                <a:ea typeface="Trade Gothic Next" pitchFamily="34" charset="-122"/>
-                <a:cs typeface="Trade Gothic Next" pitchFamily="34" charset="-120"/>
-              </a:rPr>
-              <a:t>Hot Solid or Hot Gas</a:t>
-            </a:r>
-            <a:endParaRPr lang="en-US" sz="2800" dirty="0"/>
-          </a:p>
-        </p:txBody>
-      </p:sp>
-      <p:sp>
-        <p:nvSpPr>
-          <p:cNvPr id="3" name="Text 2"/>
-          <p:cNvSpPr txBox="1"/>
-          <p:nvPr>
-            <p:ph idx="104" type="body" hasCustomPrompt="1"/>
-          </p:nvPr>
-        </p:nvSpPr>
-        <p:spPr>
-          <a:xfrm>
-            <a:off x="685800" y="1847088"/>
-            <a:ext cx="10820095" cy="384048"/>
-          </a:xfrm>
-          <a:prstGeom prst="rect">
-            <a:avLst/>
-          </a:prstGeom>
-          <a:noFill/>
-          <a:ln/>
-        </p:spPr>
-        <p:txBody>
-          <a:bodyPr wrap="square" lIns="0" tIns="0" rIns="0" bIns="0" rtlCol="0"/>
-          <a:lstStyle/>
-          <a:p>
-            <a:pPr indent="0" marL="0">
-              <a:buNone/>
-            </a:pPr>
-            <a:r>
-              <a:rPr lang="en-US" sz="1700" dirty="0">
-                <a:solidFill>
-                  <a:srgbClr val="2E3338"/>
-                </a:solidFill>
-                <a:latin typeface="Trade Gothic Next" pitchFamily="34" charset="0"/>
-                <a:ea typeface="Trade Gothic Next" pitchFamily="34" charset="-122"/>
-                <a:cs typeface="Trade Gothic Next" pitchFamily="34" charset="-120"/>
-              </a:rPr>
-              <a:t>What is glowing decides what the spectrum looks like.</a:t>
-            </a:r>
-            <a:endParaRPr lang="en-US" sz="1700" dirty="0"/>
-          </a:p>
-        </p:txBody>
-      </p:sp>
-      <p:sp>
-        <p:nvSpPr>
-          <p:cNvPr id="4" name="Text 4"/>
-          <p:cNvSpPr txBox="1"/>
-          <p:nvPr>
-            <p:ph idx="108" type="body" hasCustomPrompt="1"/>
-          </p:nvPr>
-        </p:nvSpPr>
-        <p:spPr>
-          <a:xfrm>
-            <a:off x="5733288" y="2542032"/>
-            <a:ext cx="2752344" cy="219456"/>
-          </a:xfrm>
-          <a:prstGeom prst="rect">
-            <a:avLst/>
-          </a:prstGeom>
-          <a:noFill/>
-          <a:ln/>
-        </p:spPr>
-        <p:txBody>
-          <a:bodyPr wrap="square" lIns="0" tIns="0" rIns="0" bIns="0" rtlCol="0"/>
-          <a:lstStyle/>
-          <a:p>
-            <a:pPr indent="0" marL="0">
-              <a:buNone/>
-            </a:pPr>
-            <a:r>
-              <a:rPr lang="en-US" sz="1200" b="1" spc="120" kern="0" dirty="0">
-                <a:solidFill>
-                  <a:srgbClr val="2E3338"/>
-                </a:solidFill>
-                <a:latin typeface="Trade Gothic Next" pitchFamily="34" charset="0"/>
-                <a:ea typeface="Trade Gothic Next" pitchFamily="34" charset="-122"/>
-                <a:cs typeface="Trade Gothic Next" pitchFamily="34" charset="-120"/>
-              </a:rPr>
-              <a:t>HOT SOLID</a:t>
-            </a:r>
-            <a:endParaRPr lang="en-US" sz="1200" dirty="0"/>
-          </a:p>
-        </p:txBody>
-      </p:sp>
-      <p:sp>
-        <p:nvSpPr>
-          <p:cNvPr id="5" name="Text 4"/>
-          <p:cNvSpPr txBox="1"/>
-          <p:nvPr>
-            <p:ph idx="109" type="body" hasCustomPrompt="1"/>
-          </p:nvPr>
-        </p:nvSpPr>
-        <p:spPr>
-          <a:xfrm>
-            <a:off x="5733288" y="2834640"/>
-            <a:ext cx="2752344" cy="1965960"/>
-          </a:xfrm>
-          <a:prstGeom prst="rect">
-            <a:avLst/>
-          </a:prstGeom>
-          <a:noFill/>
-          <a:ln/>
-        </p:spPr>
-        <p:txBody>
-          <a:bodyPr wrap="square" lIns="0" tIns="0" rIns="0" bIns="0" rtlCol="0"/>
-          <a:lstStyle/>
-          <a:p>
-            <a:pPr indent="0" marL="0">
-              <a:buNone/>
-            </a:pPr>
-            <a:r>
-              <a:rPr lang="en-US" sz="1600" dirty="0">
-                <a:solidFill>
-                  <a:srgbClr val="14161B"/>
-                </a:solidFill>
-                <a:latin typeface="Trade Gothic Next" pitchFamily="34" charset="0"/>
-                <a:ea typeface="Trade Gothic Next" pitchFamily="34" charset="-122"/>
-                <a:cs typeface="Trade Gothic Next" pitchFamily="34" charset="-120"/>
-              </a:rPr>
-              <a:t>A glowing filament.</a:t>
-            </a:r>
-            <a:endParaRPr lang="en-US" sz="1600" dirty="0"/>
-          </a:p>
-          <a:p>
-            <a:pPr indent="0" marL="0">
-              <a:buNone/>
-            </a:pPr>
-            <a:endParaRPr lang="en-US" sz="1600" dirty="0"/>
-          </a:p>
-          <a:p>
-            <a:pPr indent="0" marL="0">
-              <a:buNone/>
-            </a:pPr>
-            <a:r>
-              <a:rPr lang="en-US" sz="1600" dirty="0">
-                <a:solidFill>
-                  <a:srgbClr val="14161B"/>
-                </a:solidFill>
-                <a:latin typeface="Trade Gothic Next" pitchFamily="34" charset="0"/>
-                <a:ea typeface="Trade Gothic Next" pitchFamily="34" charset="-122"/>
-                <a:cs typeface="Trade Gothic Next" pitchFamily="34" charset="-120"/>
-              </a:rPr>
-              <a:t>Gives every color, no gaps.</a:t>
-            </a:r>
-            <a:endParaRPr lang="en-US" sz="1600" dirty="0"/>
-          </a:p>
-        </p:txBody>
-      </p:sp>
-      <p:sp>
-        <p:nvSpPr>
-          <p:cNvPr id="6" name="Text 5"/>
-          <p:cNvSpPr txBox="1"/>
-          <p:nvPr>
-            <p:ph idx="111" type="body" hasCustomPrompt="1"/>
-          </p:nvPr>
-        </p:nvSpPr>
-        <p:spPr>
-          <a:xfrm>
-            <a:off x="9116568" y="2542032"/>
-            <a:ext cx="2752344" cy="219456"/>
-          </a:xfrm>
-          <a:prstGeom prst="rect">
-            <a:avLst/>
-          </a:prstGeom>
-          <a:noFill/>
-          <a:ln/>
-        </p:spPr>
-        <p:txBody>
-          <a:bodyPr wrap="square" lIns="0" tIns="0" rIns="0" bIns="0" rtlCol="0"/>
-          <a:lstStyle/>
-          <a:p>
-            <a:pPr indent="0" marL="0">
-              <a:buNone/>
-            </a:pPr>
-            <a:r>
-              <a:rPr lang="en-US" sz="1200" b="1" spc="120" kern="0" dirty="0">
-                <a:solidFill>
-                  <a:srgbClr val="BDB6AA"/>
-                </a:solidFill>
-                <a:latin typeface="Trade Gothic Next" pitchFamily="34" charset="0"/>
-                <a:ea typeface="Trade Gothic Next" pitchFamily="34" charset="-122"/>
-                <a:cs typeface="Trade Gothic Next" pitchFamily="34" charset="-120"/>
-              </a:rPr>
-              <a:t>HOT GAS</a:t>
-            </a:r>
-            <a:endParaRPr lang="en-US" sz="1200" dirty="0"/>
-          </a:p>
-        </p:txBody>
-      </p:sp>
-      <p:sp>
-        <p:nvSpPr>
-          <p:cNvPr id="7" name="Text 5"/>
-          <p:cNvSpPr txBox="1"/>
-          <p:nvPr>
-            <p:ph idx="112" type="body" hasCustomPrompt="1"/>
-          </p:nvPr>
-        </p:nvSpPr>
-        <p:spPr>
-          <a:xfrm>
-            <a:off x="9116568" y="2834640"/>
-            <a:ext cx="2752344" cy="1965960"/>
-          </a:xfrm>
-          <a:prstGeom prst="rect">
-            <a:avLst/>
-          </a:prstGeom>
-          <a:noFill/>
-          <a:ln/>
-        </p:spPr>
-        <p:txBody>
-          <a:bodyPr wrap="square" lIns="0" tIns="0" rIns="0" bIns="0" rtlCol="0"/>
-          <a:lstStyle/>
-          <a:p>
-            <a:pPr indent="0" marL="0">
-              <a:buNone/>
-            </a:pPr>
-            <a:r>
-              <a:rPr lang="en-US" sz="1600" dirty="0">
-                <a:solidFill>
-                  <a:srgbClr val="EDF0E5"/>
-                </a:solidFill>
-                <a:latin typeface="Trade Gothic Next" pitchFamily="34" charset="0"/>
-                <a:ea typeface="Trade Gothic Next" pitchFamily="34" charset="-122"/>
-                <a:cs typeface="Trade Gothic Next" pitchFamily="34" charset="-120"/>
-              </a:rPr>
-              <a:t>Excited atoms in a tube.</a:t>
-            </a:r>
-            <a:endParaRPr lang="en-US" sz="1600" dirty="0"/>
-          </a:p>
-          <a:p>
-            <a:pPr indent="0" marL="0">
-              <a:buNone/>
-            </a:pPr>
-            <a:endParaRPr lang="en-US" sz="1600" dirty="0"/>
-          </a:p>
-          <a:p>
-            <a:pPr indent="0" marL="0">
-              <a:buNone/>
-            </a:pPr>
-            <a:r>
-              <a:rPr lang="en-US" sz="1600" dirty="0">
-                <a:solidFill>
-                  <a:srgbClr val="EDF0E5"/>
-                </a:solidFill>
-                <a:latin typeface="Trade Gothic Next" pitchFamily="34" charset="0"/>
-                <a:ea typeface="Trade Gothic Next" pitchFamily="34" charset="-122"/>
-                <a:cs typeface="Trade Gothic Next" pitchFamily="34" charset="-120"/>
-              </a:rPr>
-              <a:t>Give a few separate lines.</a:t>
-            </a:r>
-            <a:endParaRPr lang="en-US" sz="1600" dirty="0"/>
-          </a:p>
-        </p:txBody>
-      </p:sp>
-      <p:sp>
-        <p:nvSpPr>
-          <p:cNvPr id="8" name="Text 7"/>
-          <p:cNvSpPr txBox="1"/>
-          <p:nvPr>
-            <p:ph idx="115" type="body" hasCustomPrompt="1"/>
-          </p:nvPr>
-        </p:nvSpPr>
-        <p:spPr>
-          <a:xfrm>
-            <a:off x="2240280" y="5394960"/>
-            <a:ext cx="8991295" cy="402336"/>
-          </a:xfrm>
-          <a:prstGeom prst="rect">
-            <a:avLst/>
-          </a:prstGeom>
-          <a:noFill/>
-          <a:ln/>
-        </p:spPr>
-        <p:txBody>
-          <a:bodyPr wrap="square" lIns="0" tIns="0" rIns="0" bIns="0" rtlCol="0" anchor="ctr"/>
-          <a:lstStyle/>
-          <a:p>
-            <a:pPr indent="0" marL="0">
-              <a:buNone/>
-            </a:pPr>
-            <a:r>
-              <a:rPr lang="en-US" sz="1600" b="1" dirty="0">
-                <a:solidFill>
-                  <a:srgbClr val="EDF0E5"/>
-                </a:solidFill>
-                <a:latin typeface="Trade Gothic Next" pitchFamily="34" charset="0"/>
-                <a:ea typeface="Trade Gothic Next" pitchFamily="34" charset="-122"/>
-                <a:cs typeface="Trade Gothic Next" pitchFamily="34" charset="-120"/>
-              </a:rPr>
-              <a:t>A hot solid gives a continuous spectrum. A hot gas gives a line spectrum.</a:t>
-            </a:r>
-            <a:endParaRPr lang="en-US" sz="1600" dirty="0"/>
-          </a:p>
-        </p:txBody>
-      </p:sp>
-      <p:sp>
-        <p:nvSpPr>
-          <p:cNvPr id="9" name="Text 1"/>
-          <p:cNvSpPr txBox="1"/>
-          <p:nvPr>
-            <p:ph idx="101" type="body" hasCustomPrompt="1"/>
-          </p:nvPr>
-        </p:nvSpPr>
-        <p:spPr>
-          <a:xfrm>
-            <a:off x="685800" y="384048"/>
-            <a:ext cx="6400800" cy="237744"/>
-          </a:xfrm>
-          <a:prstGeom prst="rect">
-            <a:avLst/>
-          </a:prstGeom>
-          <a:noFill/>
-          <a:ln/>
-        </p:spPr>
-        <p:txBody>
-          <a:bodyPr wrap="square" lIns="0" tIns="0" rIns="0" bIns="0" rtlCol="0" anchor="ctr"/>
-          <a:lstStyle/>
-          <a:p>
-            <a:pPr indent="0" marL="0">
-              <a:buNone/>
-            </a:pPr>
-            <a:r>
-              <a:rPr lang="en-US" sz="1100" b="1" spc="160" kern="0" dirty="0">
-                <a:solidFill>
-                  <a:srgbClr val="14161B"/>
-                </a:solidFill>
-                <a:latin typeface="Trade Gothic Next" pitchFamily="34" charset="0"/>
-                <a:ea typeface="Trade Gothic Next" pitchFamily="34" charset="-122"/>
-                <a:cs typeface="Trade Gothic Next" pitchFamily="34" charset="-120"/>
-              </a:rPr>
-              <a:t>UNIT 02  •  CHEMISTRY</a:t>
-            </a:r>
-            <a:endParaRPr lang="en-US" sz="1100" dirty="0"/>
-          </a:p>
-        </p:txBody>
-      </p:sp>
-      <p:sp>
-        <p:nvSpPr>
-          <p:cNvPr id="10" name="Text 8"/>
-          <p:cNvSpPr txBox="1"/>
-          <p:nvPr>
-            <p:ph idx="117" type="body" hasCustomPrompt="1"/>
-          </p:nvPr>
-        </p:nvSpPr>
-        <p:spPr>
-          <a:xfrm>
-            <a:off x="8762695" y="6382512"/>
-            <a:ext cx="2743200" cy="237744"/>
-          </a:xfrm>
-          <a:prstGeom prst="rect">
-            <a:avLst/>
-          </a:prstGeom>
-          <a:noFill/>
-          <a:ln/>
-        </p:spPr>
-        <p:txBody>
-          <a:bodyPr wrap="square" lIns="0" tIns="0" rIns="0" bIns="0" rtlCol="0" anchor="ctr"/>
-          <a:lstStyle/>
-          <a:p>
-            <a:pPr algn="r" indent="0" marL="0">
-              <a:buNone/>
-            </a:pPr>
-            <a:r>
-              <a:rPr lang="en-US" sz="1000" b="1" spc="140" kern="0" dirty="0">
-                <a:solidFill>
-                  <a:srgbClr val="2E3338"/>
-                </a:solidFill>
-                <a:latin typeface="Trade Gothic Next" pitchFamily="34" charset="0"/>
-                <a:ea typeface="Trade Gothic Next" pitchFamily="34" charset="-122"/>
-                <a:cs typeface="Trade Gothic Next" pitchFamily="34" charset="-120"/>
-              </a:rPr>
-              <a:t>U02 • S02.5</a:t>
-            </a:r>
-            <a:endParaRPr lang="en-US" sz="1000" dirty="0"/>
-          </a:p>
-        </p:txBody>
-      </p:sp>
-      <p:sp>
-        <p:nvSpPr>
-          <p:cNvPr id="12" name="Text 3"/>
-          <p:cNvSpPr txBox="1"/>
-          <p:nvPr>
-            <p:ph idx="106" hasCustomPrompt="1"/>
-          </p:nvPr>
-        </p:nvSpPr>
-        <p:spPr>
-          <a:xfrm>
-            <a:off x="685800" y="2377440"/>
-            <a:ext cx="4663440" cy="2624328"/>
-          </a:xfrm>
-          <a:prstGeom prst="rect">
-            <a:avLst/>
-          </a:prstGeom>
-          <a:noFill/>
-          <a:ln/>
-        </p:spPr>
-        <p:txBody>
-          <a:bodyPr wrap="square" lIns="0" tIns="0" rIns="0" bIns="0" rtlCol="0" anchor="ctr"/>
-          <a:lstStyle/>
-          <a:p>
-            <a:pPr algn="ctr" indent="0" marL="0">
-              <a:buNone/>
-            </a:pPr>
-            <a:endParaRPr lang="en-US" sz="1200" dirty="0"/>
-          </a:p>
-        </p:txBody>
-      </p:sp>
-    </p:spTree>
-  </p:cSld>
-  <p:clrMapOvr>
-    <a:masterClrMapping/>
-  </p:clrMapOvr>
-</p:sld>
-</file>
-
-<file path=ppt/slides/slide8.xml><?xml version="1.0" encoding="utf-8"?>
-<p:sld xmlns:a="http://schemas.openxmlformats.org/drawingml/2006/main" xmlns:r="http://schemas.openxmlformats.org/officeDocument/2006/relationships" xmlns:p="http://schemas.openxmlformats.org/presentationml/2006/main">
-  <p:cSld name="Slide 8">
     <p:spTree>
       <p:nvGrpSpPr>
         <p:cNvPr id="1" name=""/>
@@ -22823,9 +21407,9 @@
 </p:sld>
 </file>
 
-<file path=ppt/slides/slide9.xml><?xml version="1.0" encoding="utf-8"?>
+<file path=ppt/slides/slide8.xml><?xml version="1.0" encoding="utf-8"?>
 <p:sld xmlns:a="http://schemas.openxmlformats.org/drawingml/2006/main" xmlns:r="http://schemas.openxmlformats.org/officeDocument/2006/relationships" xmlns:p="http://schemas.openxmlformats.org/presentationml/2006/main">
-  <p:cSld name="Slide 9">
+  <p:cSld name="Slide 8">
     <p:spTree>
       <p:nvGrpSpPr>
         <p:cNvPr id="1" name=""/>
@@ -23187,6 +21771,495 @@
                 <a:cs typeface="Trade Gothic Next" pitchFamily="34" charset="-120"/>
               </a:rPr>
               <a:t>More are in ultraviolet (UV) and infrared (IR).</a:t>
+            </a:r>
+            <a:endParaRPr lang="en-US" sz="1600" dirty="0"/>
+          </a:p>
+        </p:txBody>
+      </p:sp>
+      <p:sp>
+        <p:nvSpPr>
+          <p:cNvPr id="11" name="Text 1"/>
+          <p:cNvSpPr txBox="1"/>
+          <p:nvPr>
+            <p:ph idx="101" type="body" hasCustomPrompt="1"/>
+          </p:nvPr>
+        </p:nvSpPr>
+        <p:spPr>
+          <a:xfrm>
+            <a:off x="685800" y="384048"/>
+            <a:ext cx="6400800" cy="237744"/>
+          </a:xfrm>
+          <a:prstGeom prst="rect">
+            <a:avLst/>
+          </a:prstGeom>
+          <a:noFill/>
+          <a:ln/>
+        </p:spPr>
+        <p:txBody>
+          <a:bodyPr wrap="square" lIns="0" tIns="0" rIns="0" bIns="0" rtlCol="0" anchor="ctr"/>
+          <a:lstStyle/>
+          <a:p>
+            <a:pPr indent="0" marL="0">
+              <a:buNone/>
+            </a:pPr>
+            <a:r>
+              <a:rPr lang="en-US" sz="1100" b="1" spc="160" kern="0" dirty="0">
+                <a:solidFill>
+                  <a:srgbClr val="14161B"/>
+                </a:solidFill>
+                <a:latin typeface="Trade Gothic Next" pitchFamily="34" charset="0"/>
+                <a:ea typeface="Trade Gothic Next" pitchFamily="34" charset="-122"/>
+                <a:cs typeface="Trade Gothic Next" pitchFamily="34" charset="-120"/>
+              </a:rPr>
+              <a:t>UNIT 02  •  CHEMISTRY</a:t>
+            </a:r>
+            <a:endParaRPr lang="en-US" sz="1100" dirty="0"/>
+          </a:p>
+        </p:txBody>
+      </p:sp>
+      <p:sp>
+        <p:nvSpPr>
+          <p:cNvPr id="12" name="Text 7"/>
+          <p:cNvSpPr txBox="1"/>
+          <p:nvPr>
+            <p:ph idx="117" type="body" hasCustomPrompt="1"/>
+          </p:nvPr>
+        </p:nvSpPr>
+        <p:spPr>
+          <a:xfrm>
+            <a:off x="8762695" y="6382512"/>
+            <a:ext cx="2743200" cy="237744"/>
+          </a:xfrm>
+          <a:prstGeom prst="rect">
+            <a:avLst/>
+          </a:prstGeom>
+          <a:noFill/>
+          <a:ln/>
+        </p:spPr>
+        <p:txBody>
+          <a:bodyPr wrap="square" lIns="0" tIns="0" rIns="0" bIns="0" rtlCol="0" anchor="ctr"/>
+          <a:lstStyle/>
+          <a:p>
+            <a:pPr algn="r" indent="0" marL="0">
+              <a:buNone/>
+            </a:pPr>
+            <a:r>
+              <a:rPr lang="en-US" sz="1000" b="1" spc="140" kern="0" dirty="0">
+                <a:solidFill>
+                  <a:srgbClr val="2E3338"/>
+                </a:solidFill>
+                <a:latin typeface="Trade Gothic Next" pitchFamily="34" charset="0"/>
+                <a:ea typeface="Trade Gothic Next" pitchFamily="34" charset="-122"/>
+                <a:cs typeface="Trade Gothic Next" pitchFamily="34" charset="-120"/>
+              </a:rPr>
+              <a:t>U02 • S02.5</a:t>
+            </a:r>
+            <a:endParaRPr lang="en-US" sz="1000" dirty="0"/>
+          </a:p>
+        </p:txBody>
+      </p:sp>
+      <p:sp>
+        <p:nvSpPr>
+          <p:cNvPr id="14" name="Text 3"/>
+          <p:cNvSpPr txBox="1"/>
+          <p:nvPr>
+            <p:ph idx="106" type="body" hasCustomPrompt="1"/>
+          </p:nvPr>
+        </p:nvSpPr>
+        <p:spPr>
+          <a:xfrm>
+            <a:off x="914400" y="2651760"/>
+            <a:ext cx="4617720" cy="2743200"/>
+          </a:xfrm>
+          <a:prstGeom prst="rect">
+            <a:avLst/>
+          </a:prstGeom>
+          <a:noFill/>
+          <a:ln/>
+        </p:spPr>
+        <p:txBody>
+          <a:bodyPr wrap="square" lIns="0" tIns="0" rIns="0" bIns="0" rtlCol="0" anchor="ctr"/>
+          <a:lstStyle/>
+          <a:p>
+            <a:pPr algn="ctr" indent="0" marL="0">
+              <a:buNone/>
+            </a:pPr>
+            <a:endParaRPr lang="en-US" sz="2000" dirty="0"/>
+          </a:p>
+        </p:txBody>
+      </p:sp>
+    </p:spTree>
+  </p:cSld>
+  <p:clrMapOvr>
+    <a:masterClrMapping/>
+  </p:clrMapOvr>
+</p:sld>
+</file>
+
+<file path=ppt/slides/slide9.xml><?xml version="1.0" encoding="utf-8"?>
+<p:sld xmlns:a="http://schemas.openxmlformats.org/drawingml/2006/main" xmlns:r="http://schemas.openxmlformats.org/officeDocument/2006/relationships" xmlns:p="http://schemas.openxmlformats.org/presentationml/2006/main">
+  <p:cSld name="Slide 9">
+    <p:spTree>
+      <p:nvGrpSpPr>
+        <p:cNvPr id="1" name=""/>
+        <p:cNvGrpSpPr/>
+        <p:nvPr/>
+      </p:nvGrpSpPr>
+      <p:grpSpPr>
+        <a:xfrm>
+          <a:off x="0" y="0"/>
+          <a:ext cx="0" cy="0"/>
+          <a:chOff x="0" y="0"/>
+          <a:chExt cx="0" cy="0"/>
+        </a:xfrm>
+      </p:grpSpPr>
+      <p:pic>
+        <p:nvPicPr>
+          <p:cNvPr id="2" name="Image 0" descr="/home/user/WorkWork/templates/slide/assets/chem_u02_s2.5_energy_transitions.png">    </p:cNvPr>
+          <p:cNvPicPr>
+            <a:picLocks noChangeAspect="1"/>
+          </p:cNvPicPr>
+          <p:nvPr/>
+        </p:nvPicPr>
+        <p:blipFill>
+          <a:blip r:embed="rId1"/>
+          <a:stretch>
+            <a:fillRect/>
+          </a:stretch>
+        </p:blipFill>
+        <p:spPr>
+          <a:xfrm>
+            <a:off x="914400" y="2651760"/>
+            <a:ext cx="4617720" cy="2743200"/>
+          </a:xfrm>
+          <a:prstGeom prst="rect">
+            <a:avLst/>
+          </a:prstGeom>
+        </p:spPr>
+      </p:pic>
+      <p:sp>
+        <p:nvSpPr>
+          <p:cNvPr id="3" name="Text 2"/>
+          <p:cNvSpPr txBox="1"/>
+          <p:nvPr>
+            <p:ph idx="103" type="title" hasCustomPrompt="1"/>
+          </p:nvPr>
+        </p:nvSpPr>
+        <p:spPr>
+          <a:xfrm>
+            <a:off x="685800" y="932688"/>
+            <a:ext cx="10820095" cy="868680"/>
+          </a:xfrm>
+          <a:prstGeom prst="rect">
+            <a:avLst/>
+          </a:prstGeom>
+          <a:noFill/>
+          <a:ln/>
+        </p:spPr>
+        <p:txBody>
+          <a:bodyPr wrap="square" lIns="0" tIns="0" rIns="0" bIns="0" rtlCol="0" anchor="t"/>
+          <a:lstStyle/>
+          <a:p>
+            <a:pPr algn="l" indent="0" marL="0">
+              <a:buNone/>
+            </a:pPr>
+            <a:r>
+              <a:rPr lang="en-US" sz="2800" b="1" dirty="0">
+                <a:solidFill>
+                  <a:srgbClr val="14161B"/>
+                </a:solidFill>
+                <a:latin typeface="Trade Gothic Next" pitchFamily="34" charset="0"/>
+                <a:ea typeface="Trade Gothic Next" pitchFamily="34" charset="-122"/>
+                <a:cs typeface="Trade Gothic Next" pitchFamily="34" charset="-120"/>
+              </a:rPr>
+              <a:t>Which Drop Makes Which Line</a:t>
+            </a:r>
+            <a:endParaRPr lang="en-US" sz="2800" dirty="0"/>
+          </a:p>
+        </p:txBody>
+      </p:sp>
+      <p:sp>
+        <p:nvSpPr>
+          <p:cNvPr id="4" name="Text 2"/>
+          <p:cNvSpPr txBox="1"/>
+          <p:nvPr>
+            <p:ph idx="104" type="body" hasCustomPrompt="1"/>
+          </p:nvPr>
+        </p:nvSpPr>
+        <p:spPr>
+          <a:xfrm>
+            <a:off x="685800" y="1847088"/>
+            <a:ext cx="10820095" cy="384048"/>
+          </a:xfrm>
+          <a:prstGeom prst="rect">
+            <a:avLst/>
+          </a:prstGeom>
+          <a:noFill/>
+          <a:ln/>
+        </p:spPr>
+        <p:txBody>
+          <a:bodyPr wrap="square" lIns="0" tIns="0" rIns="0" bIns="0" rtlCol="0"/>
+          <a:lstStyle/>
+          <a:p>
+            <a:pPr indent="0" marL="0">
+              <a:buNone/>
+            </a:pPr>
+            <a:r>
+              <a:rPr lang="en-US" sz="1700" dirty="0">
+                <a:solidFill>
+                  <a:srgbClr val="2E3338"/>
+                </a:solidFill>
+                <a:latin typeface="Trade Gothic Next" pitchFamily="34" charset="0"/>
+                <a:ea typeface="Trade Gothic Next" pitchFamily="34" charset="-122"/>
+                <a:cs typeface="Trade Gothic Next" pitchFamily="34" charset="-120"/>
+              </a:rPr>
+              <a:t>Each line is one electron dropping to n = 2.</a:t>
+            </a:r>
+            <a:endParaRPr lang="en-US" sz="1700" dirty="0"/>
+          </a:p>
+        </p:txBody>
+      </p:sp>
+      <p:sp>
+        <p:nvSpPr>
+          <p:cNvPr id="5" name="Text 4"/>
+          <p:cNvSpPr txBox="1"/>
+          <p:nvPr>
+            <p:ph idx="108" type="body" hasCustomPrompt="1"/>
+          </p:nvPr>
+        </p:nvSpPr>
+        <p:spPr>
+          <a:xfrm>
+            <a:off x="6327648" y="2560320"/>
+            <a:ext cx="5129784" cy="219456"/>
+          </a:xfrm>
+          <a:prstGeom prst="rect">
+            <a:avLst/>
+          </a:prstGeom>
+          <a:noFill/>
+          <a:ln/>
+        </p:spPr>
+        <p:txBody>
+          <a:bodyPr wrap="square" lIns="0" tIns="0" rIns="0" bIns="0" rtlCol="0"/>
+          <a:lstStyle/>
+          <a:p>
+            <a:pPr indent="0" marL="0">
+              <a:buNone/>
+            </a:pPr>
+            <a:r>
+              <a:rPr lang="en-US" sz="1200" b="1" spc="120" kern="0" dirty="0">
+                <a:solidFill>
+                  <a:srgbClr val="2E3338"/>
+                </a:solidFill>
+                <a:latin typeface="Trade Gothic Next" pitchFamily="34" charset="0"/>
+                <a:ea typeface="Trade Gothic Next" pitchFamily="34" charset="-122"/>
+                <a:cs typeface="Trade Gothic Next" pitchFamily="34" charset="-120"/>
+              </a:rPr>
+              <a:t>EXCITED STATE</a:t>
+            </a:r>
+            <a:endParaRPr lang="en-US" sz="1200" dirty="0"/>
+          </a:p>
+        </p:txBody>
+      </p:sp>
+      <p:sp>
+        <p:nvSpPr>
+          <p:cNvPr id="6" name="Text 4"/>
+          <p:cNvSpPr txBox="1"/>
+          <p:nvPr>
+            <p:ph idx="109" type="body" hasCustomPrompt="1"/>
+          </p:nvPr>
+        </p:nvSpPr>
+        <p:spPr>
+          <a:xfrm>
+            <a:off x="6327648" y="2852928"/>
+            <a:ext cx="5129784" cy="329184"/>
+          </a:xfrm>
+          <a:prstGeom prst="rect">
+            <a:avLst/>
+          </a:prstGeom>
+          <a:noFill/>
+          <a:ln/>
+        </p:spPr>
+        <p:txBody>
+          <a:bodyPr wrap="square" lIns="0" tIns="0" rIns="0" bIns="0" rtlCol="0"/>
+          <a:lstStyle/>
+          <a:p>
+            <a:pPr indent="0" marL="0">
+              <a:buNone/>
+            </a:pPr>
+            <a:r>
+              <a:rPr lang="en-US" sz="1600" dirty="0">
+                <a:solidFill>
+                  <a:srgbClr val="14161B"/>
+                </a:solidFill>
+                <a:latin typeface="Trade Gothic Next" pitchFamily="34" charset="0"/>
+                <a:ea typeface="Trade Gothic Next" pitchFamily="34" charset="-122"/>
+                <a:cs typeface="Trade Gothic Next" pitchFamily="34" charset="-120"/>
+              </a:rPr>
+              <a:t>Heat or electricity lifts an electron up a level.</a:t>
+            </a:r>
+            <a:endParaRPr lang="en-US" sz="1600" dirty="0"/>
+          </a:p>
+        </p:txBody>
+      </p:sp>
+      <p:sp>
+        <p:nvSpPr>
+          <p:cNvPr id="7" name="Text 5"/>
+          <p:cNvSpPr txBox="1"/>
+          <p:nvPr>
+            <p:ph idx="111" type="body" hasCustomPrompt="1"/>
+          </p:nvPr>
+        </p:nvSpPr>
+        <p:spPr>
+          <a:xfrm>
+            <a:off x="6327648" y="3694176"/>
+            <a:ext cx="5129784" cy="219456"/>
+          </a:xfrm>
+          <a:prstGeom prst="rect">
+            <a:avLst/>
+          </a:prstGeom>
+          <a:noFill/>
+          <a:ln/>
+        </p:spPr>
+        <p:txBody>
+          <a:bodyPr wrap="square" lIns="0" tIns="0" rIns="0" bIns="0" rtlCol="0"/>
+          <a:lstStyle/>
+          <a:p>
+            <a:pPr indent="0" marL="0">
+              <a:buNone/>
+            </a:pPr>
+            <a:r>
+              <a:rPr lang="en-US" sz="1200" b="1" spc="120" kern="0" dirty="0">
+                <a:solidFill>
+                  <a:srgbClr val="2E3338"/>
+                </a:solidFill>
+                <a:latin typeface="Trade Gothic Next" pitchFamily="34" charset="0"/>
+                <a:ea typeface="Trade Gothic Next" pitchFamily="34" charset="-122"/>
+                <a:cs typeface="Trade Gothic Next" pitchFamily="34" charset="-120"/>
+              </a:rPr>
+              <a:t>EMISSION</a:t>
+            </a:r>
+            <a:endParaRPr lang="en-US" sz="1200" dirty="0"/>
+          </a:p>
+        </p:txBody>
+      </p:sp>
+      <p:sp>
+        <p:nvSpPr>
+          <p:cNvPr id="8" name="Text 5"/>
+          <p:cNvSpPr txBox="1"/>
+          <p:nvPr>
+            <p:ph idx="112" type="body" hasCustomPrompt="1"/>
+          </p:nvPr>
+        </p:nvSpPr>
+        <p:spPr>
+          <a:xfrm>
+            <a:off x="6327648" y="3986784"/>
+            <a:ext cx="5129784" cy="329184"/>
+          </a:xfrm>
+          <a:prstGeom prst="rect">
+            <a:avLst/>
+          </a:prstGeom>
+          <a:noFill/>
+          <a:ln/>
+        </p:spPr>
+        <p:txBody>
+          <a:bodyPr wrap="square" lIns="0" tIns="0" rIns="0" bIns="0" rtlCol="0"/>
+          <a:lstStyle/>
+          <a:p>
+            <a:pPr indent="0" marL="0">
+              <a:buNone/>
+            </a:pPr>
+            <a:r>
+              <a:rPr lang="en-US" sz="1600" dirty="0">
+                <a:solidFill>
+                  <a:srgbClr val="14161B"/>
+                </a:solidFill>
+                <a:latin typeface="Trade Gothic Next" pitchFamily="34" charset="0"/>
+                <a:ea typeface="Trade Gothic Next" pitchFamily="34" charset="-122"/>
+                <a:cs typeface="Trade Gothic Next" pitchFamily="34" charset="-120"/>
+              </a:rPr>
+              <a:t>The drop releases one photon with energy ΔE.</a:t>
+            </a:r>
+            <a:endParaRPr lang="en-US" sz="1600" dirty="0"/>
+          </a:p>
+        </p:txBody>
+      </p:sp>
+      <p:sp>
+        <p:nvSpPr>
+          <p:cNvPr id="9" name="Text 6"/>
+          <p:cNvSpPr txBox="1"/>
+          <p:nvPr>
+            <p:ph idx="114" type="body" hasCustomPrompt="1"/>
+          </p:nvPr>
+        </p:nvSpPr>
+        <p:spPr>
+          <a:xfrm>
+            <a:off x="6327648" y="4828032"/>
+            <a:ext cx="5129784" cy="219456"/>
+          </a:xfrm>
+          <a:prstGeom prst="rect">
+            <a:avLst/>
+          </a:prstGeom>
+          <a:noFill/>
+          <a:ln/>
+        </p:spPr>
+        <p:txBody>
+          <a:bodyPr wrap="square" lIns="0" tIns="0" rIns="0" bIns="0" rtlCol="0"/>
+          <a:lstStyle/>
+          <a:p>
+            <a:pPr indent="0" marL="0">
+              <a:buNone/>
+            </a:pPr>
+            <a:r>
+              <a:rPr lang="en-US" sz="1200" b="1" spc="120" kern="0" dirty="0">
+                <a:solidFill>
+                  <a:srgbClr val="2E3338"/>
+                </a:solidFill>
+                <a:latin typeface="Trade Gothic Next" pitchFamily="34" charset="0"/>
+                <a:ea typeface="Trade Gothic Next" pitchFamily="34" charset="-122"/>
+                <a:cs typeface="Trade Gothic Next" pitchFamily="34" charset="-120"/>
+              </a:rPr>
+              <a:t>BIGGER DROP</a:t>
+            </a:r>
+            <a:endParaRPr lang="en-US" sz="1200" dirty="0"/>
+          </a:p>
+        </p:txBody>
+      </p:sp>
+      <p:sp>
+        <p:nvSpPr>
+          <p:cNvPr id="10" name="Text 6"/>
+          <p:cNvSpPr txBox="1"/>
+          <p:nvPr>
+            <p:ph idx="115" type="body" hasCustomPrompt="1"/>
+          </p:nvPr>
+        </p:nvSpPr>
+        <p:spPr>
+          <a:xfrm>
+            <a:off x="6327648" y="5120640"/>
+            <a:ext cx="5129784" cy="320040"/>
+          </a:xfrm>
+          <a:prstGeom prst="rect">
+            <a:avLst/>
+          </a:prstGeom>
+          <a:noFill/>
+          <a:ln/>
+        </p:spPr>
+        <p:txBody>
+          <a:bodyPr wrap="square" lIns="0" tIns="0" rIns="0" bIns="0" rtlCol="0"/>
+          <a:lstStyle/>
+          <a:p>
+            <a:pPr indent="0" marL="0">
+              <a:buNone/>
+            </a:pPr>
+            <a:r>
+              <a:rPr lang="en-US" sz="1600" dirty="0">
+                <a:solidFill>
+                  <a:srgbClr val="14161B"/>
+                </a:solidFill>
+                <a:latin typeface="Trade Gothic Next" pitchFamily="34" charset="0"/>
+                <a:ea typeface="Trade Gothic Next" pitchFamily="34" charset="-122"/>
+                <a:cs typeface="Trade Gothic Next" pitchFamily="34" charset="-120"/>
+              </a:rPr>
+              <a:t>More energy, shorter wavelength, bluer light.</a:t>
             </a:r>
             <a:endParaRPr lang="en-US" sz="1600" dirty="0"/>
           </a:p>

--- a/deliverables/chem-u02/SHULL_CHEM_Slides_U02_S02.5.pptx
+++ b/deliverables/chem-u02/SHULL_CHEM_Slides_U02_S02.5.pptx
@@ -21524,7 +21524,7 @@
                 <a:ea typeface="Trade Gothic Next" pitchFamily="34" charset="-122"/>
                 <a:cs typeface="Trade Gothic Next" pitchFamily="34" charset="-120"/>
               </a:rPr>
-              <a:t>Four lines, computed from the energy levels.</a:t>
+              <a:t>Four lines, from the energy levels.</a:t>
             </a:r>
             <a:endParaRPr lang="en-US" sz="1700" dirty="0"/>
           </a:p>
@@ -22177,7 +22177,7 @@
                 <a:ea typeface="Trade Gothic Next" pitchFamily="34" charset="-122"/>
                 <a:cs typeface="Trade Gothic Next" pitchFamily="34" charset="-120"/>
               </a:rPr>
-              <a:t>The drop releases one photon with energy ΔE.</a:t>
+              <a:t>The drop releases one photon of light. That is the energy released.</a:t>
             </a:r>
             <a:endParaRPr lang="en-US" sz="1600" dirty="0"/>
           </a:p>

--- a/deliverables/chem-u02/SHULL_CHEM_Slides_U02_S02.5.pptx
+++ b/deliverables/chem-u02/SHULL_CHEM_Slides_U02_S02.5.pptx
@@ -22177,7 +22177,7 @@
                 <a:ea typeface="Trade Gothic Next" pitchFamily="34" charset="-122"/>
                 <a:cs typeface="Trade Gothic Next" pitchFamily="34" charset="-120"/>
               </a:rPr>
-              <a:t>The drop releases one photon of light. That is the energy released.</a:t>
+              <a:t>The drop releases energy as one photon.</a:t>
             </a:r>
             <a:endParaRPr lang="en-US" sz="1600" dirty="0"/>
           </a:p>

--- a/deliverables/chem-u02/SHULL_CHEM_Slides_U02_S02.5.pptx
+++ b/deliverables/chem-u02/SHULL_CHEM_Slides_U02_S02.5.pptx
@@ -521,7 +521,7 @@
           <a:p>
             <a:r>
               <a:rPr lang="en-US" dirty="0"/>
-              <a:t>Opens 2.5; builds on 2.1 energy levels and delta E. Goal: students leave able to say how an atom makes colored light. IMAGE SLOT EMPTY, photo to shoot or generate: a hydrogen gas discharge tube glowing in a dark lab.</a:t>
+              <a:t>Opens 2.5; builds on 2.1 energy levels. Goal: students leave able to say how an atom makes colored light. IMAGE SLOT EMPTY, photo to shoot or generate: a hydrogen gas discharge tube glowing in a dark lab.</a:t>
             </a:r>
             <a:endParaRPr lang="en-US" dirty="0"/>
           </a:p>
